--- a/assets/Nectarbloom Common Errors.pptx
+++ b/assets/Nectarbloom Common Errors.pptx
@@ -17,6 +17,7 @@
     <p:sldId id="265" r:id="rId16"/>
     <p:sldId id="266" r:id="rId17"/>
     <p:sldId id="267" r:id="rId18"/>
+    <p:sldId id="268" r:id="rId19"/>
   </p:sldIdLst>
   <p:sldSz cx="12191695" cy="6858000" type="screen4x3"/>
   <p:notesSz cx="6858000" cy="9144000"/>
@@ -116,6 +117,1626 @@
     </a:lvl9pPr>
   </p:defaultTextStyle>
 </p:presentation>
+</file>
+
+<file path=ppt/notesMasters/notesMaster1.xml><?xml version="1.0" encoding="utf-8"?>
+<p:notesMaster xmlns:a="http://schemas.openxmlformats.org/drawingml/2006/main" xmlns:p="http://schemas.openxmlformats.org/presentationml/2006/main" xmlns:r="http://schemas.openxmlformats.org/officeDocument/2006/relationships">
+  <p:cSld>
+    <p:bg>
+      <p:bgRef idx="1001">
+        <a:schemeClr val="bg1"/>
+      </p:bgRef>
+    </p:bg>
+    <p:spTree>
+      <p:nvGrpSpPr>
+        <p:cNvPr id="1" name=""/>
+        <p:cNvGrpSpPr/>
+        <p:nvPr/>
+      </p:nvGrpSpPr>
+      <p:grpSpPr>
+        <a:xfrm>
+          <a:off x="0" y="0"/>
+          <a:ext cx="0" cy="0"/>
+          <a:chOff x="0" y="0"/>
+          <a:chExt cx="0" cy="0"/>
+        </a:xfrm>
+      </p:grpSpPr>
+      <p:sp>
+        <p:nvSpPr>
+          <p:cNvPr id="2" name="Header Placeholder 1"/>
+          <p:cNvSpPr>
+            <a:spLocks noGrp="1"/>
+          </p:cNvSpPr>
+          <p:nvPr>
+            <p:ph type="hdr" sz="quarter"/>
+          </p:nvPr>
+        </p:nvSpPr>
+        <p:spPr>
+          <a:xfrm>
+            <a:off x="0" y="0"/>
+            <a:ext cx="2971800" cy="457200"/>
+          </a:xfrm>
+          <a:prstGeom prst="rect">
+            <a:avLst/>
+          </a:prstGeom>
+        </p:spPr>
+        <p:txBody>
+          <a:bodyPr vert="horz" lIns="91440" tIns="45720" rIns="91440" bIns="45720" rtlCol="0"/>
+          <a:lstStyle>
+            <a:lvl1pPr algn="l">
+              <a:defRPr sz="1200"/>
+            </a:lvl1pPr>
+          </a:lstStyle>
+          <a:p>
+            <a:endParaRPr lang="en-US"/>
+          </a:p>
+        </p:txBody>
+      </p:sp>
+      <p:sp>
+        <p:nvSpPr>
+          <p:cNvPr id="3" name="Date Placeholder 2"/>
+          <p:cNvSpPr>
+            <a:spLocks noGrp="1"/>
+          </p:cNvSpPr>
+          <p:nvPr>
+            <p:ph type="dt" idx="1"/>
+          </p:nvPr>
+        </p:nvSpPr>
+        <p:spPr>
+          <a:xfrm>
+            <a:off x="3884613" y="0"/>
+            <a:ext cx="2971800" cy="457200"/>
+          </a:xfrm>
+          <a:prstGeom prst="rect">
+            <a:avLst/>
+          </a:prstGeom>
+        </p:spPr>
+        <p:txBody>
+          <a:bodyPr vert="horz" lIns="91440" tIns="45720" rIns="91440" bIns="45720" rtlCol="0"/>
+          <a:lstStyle>
+            <a:lvl1pPr algn="r">
+              <a:defRPr sz="1200"/>
+            </a:lvl1pPr>
+          </a:lstStyle>
+          <a:p>
+            <a:fld id="{0F89C1C7-3DCD-1040-A9CF-14679D8B5DDD}" type="datetimeFigureOut">
+              <a:rPr lang="en-US" smtClean="0"/>
+              <a:t>10/17/16</a:t>
+            </a:fld>
+            <a:endParaRPr lang="en-US"/>
+          </a:p>
+        </p:txBody>
+      </p:sp>
+      <p:sp>
+        <p:nvSpPr>
+          <p:cNvPr id="4" name="Slide Image Placeholder 3"/>
+          <p:cNvSpPr>
+            <a:spLocks noGrp="1" noRot="1" noChangeAspect="1"/>
+          </p:cNvSpPr>
+          <p:nvPr>
+            <p:ph type="sldImg" idx="2"/>
+          </p:nvPr>
+        </p:nvSpPr>
+        <p:spPr>
+          <a:xfrm>
+            <a:off x="1143000" y="685800"/>
+            <a:ext cx="4572000" cy="3429000"/>
+          </a:xfrm>
+          <a:prstGeom prst="rect">
+            <a:avLst/>
+          </a:prstGeom>
+          <a:noFill/>
+          <a:ln w="12700">
+            <a:solidFill>
+              <a:prstClr val="black"/>
+            </a:solidFill>
+          </a:ln>
+        </p:spPr>
+        <p:txBody>
+          <a:bodyPr vert="horz" lIns="91440" tIns="45720" rIns="91440" bIns="45720" rtlCol="0" anchor="ctr"/>
+          <a:lstStyle/>
+          <a:p>
+            <a:endParaRPr lang="en-US"/>
+          </a:p>
+        </p:txBody>
+      </p:sp>
+      <p:sp>
+        <p:nvSpPr>
+          <p:cNvPr id="5" name="Notes Placeholder 4"/>
+          <p:cNvSpPr>
+            <a:spLocks noGrp="1"/>
+          </p:cNvSpPr>
+          <p:nvPr>
+            <p:ph type="body" sz="quarter" idx="3"/>
+          </p:nvPr>
+        </p:nvSpPr>
+        <p:spPr>
+          <a:xfrm>
+            <a:off x="685800" y="4343400"/>
+            <a:ext cx="5486400" cy="4114800"/>
+          </a:xfrm>
+          <a:prstGeom prst="rect">
+            <a:avLst/>
+          </a:prstGeom>
+        </p:spPr>
+        <p:txBody>
+          <a:bodyPr vert="horz" lIns="91440" tIns="45720" rIns="91440" bIns="45720" rtlCol="0"/>
+          <a:lstStyle/>
+          <a:p>
+            <a:pPr lvl="0"/>
+            <a:r>
+              <a:rPr lang="en-US" smtClean="0"/>
+              <a:t>Click to edit Master text styles</a:t>
+            </a:r>
+          </a:p>
+          <a:p>
+            <a:pPr lvl="1"/>
+            <a:r>
+              <a:rPr lang="en-US" smtClean="0"/>
+              <a:t>Second level</a:t>
+            </a:r>
+          </a:p>
+          <a:p>
+            <a:pPr lvl="2"/>
+            <a:r>
+              <a:rPr lang="en-US" smtClean="0"/>
+              <a:t>Third level</a:t>
+            </a:r>
+          </a:p>
+          <a:p>
+            <a:pPr lvl="3"/>
+            <a:r>
+              <a:rPr lang="en-US" smtClean="0"/>
+              <a:t>Fourth level</a:t>
+            </a:r>
+          </a:p>
+          <a:p>
+            <a:pPr lvl="4"/>
+            <a:r>
+              <a:rPr lang="en-US" smtClean="0"/>
+              <a:t>Fifth level</a:t>
+            </a:r>
+            <a:endParaRPr lang="en-US"/>
+          </a:p>
+        </p:txBody>
+      </p:sp>
+      <p:sp>
+        <p:nvSpPr>
+          <p:cNvPr id="6" name="Footer Placeholder 5"/>
+          <p:cNvSpPr>
+            <a:spLocks noGrp="1"/>
+          </p:cNvSpPr>
+          <p:nvPr>
+            <p:ph type="ftr" sz="quarter" idx="4"/>
+          </p:nvPr>
+        </p:nvSpPr>
+        <p:spPr>
+          <a:xfrm>
+            <a:off x="0" y="8685213"/>
+            <a:ext cx="2971800" cy="457200"/>
+          </a:xfrm>
+          <a:prstGeom prst="rect">
+            <a:avLst/>
+          </a:prstGeom>
+        </p:spPr>
+        <p:txBody>
+          <a:bodyPr vert="horz" lIns="91440" tIns="45720" rIns="91440" bIns="45720" rtlCol="0" anchor="b"/>
+          <a:lstStyle>
+            <a:lvl1pPr algn="l">
+              <a:defRPr sz="1200"/>
+            </a:lvl1pPr>
+          </a:lstStyle>
+          <a:p>
+            <a:endParaRPr lang="en-US"/>
+          </a:p>
+        </p:txBody>
+      </p:sp>
+      <p:sp>
+        <p:nvSpPr>
+          <p:cNvPr id="7" name="Slide Number Placeholder 6"/>
+          <p:cNvSpPr>
+            <a:spLocks noGrp="1"/>
+          </p:cNvSpPr>
+          <p:nvPr>
+            <p:ph type="sldNum" sz="quarter" idx="5"/>
+          </p:nvPr>
+        </p:nvSpPr>
+        <p:spPr>
+          <a:xfrm>
+            <a:off x="3884613" y="8685213"/>
+            <a:ext cx="2971800" cy="457200"/>
+          </a:xfrm>
+          <a:prstGeom prst="rect">
+            <a:avLst/>
+          </a:prstGeom>
+        </p:spPr>
+        <p:txBody>
+          <a:bodyPr vert="horz" lIns="91440" tIns="45720" rIns="91440" bIns="45720" rtlCol="0" anchor="b"/>
+          <a:lstStyle>
+            <a:lvl1pPr algn="r">
+              <a:defRPr sz="1200"/>
+            </a:lvl1pPr>
+          </a:lstStyle>
+          <a:p>
+            <a:fld id="{BB5E49A5-4136-284D-997B-48E1D791AD67}" type="slidenum">
+              <a:rPr lang="en-US" smtClean="0"/>
+              <a:t>‹#›</a:t>
+            </a:fld>
+            <a:endParaRPr lang="en-US"/>
+          </a:p>
+        </p:txBody>
+      </p:sp>
+    </p:spTree>
+    <p:extLst>
+      <p:ext uri="{BB962C8B-B14F-4D97-AF65-F5344CB8AC3E}">
+        <p14:creationId xmlns:p14="http://schemas.microsoft.com/office/powerpoint/2010/main" val="2623252185"/>
+      </p:ext>
+    </p:extLst>
+  </p:cSld>
+  <p:clrMap bg1="lt1" tx1="dk1" bg2="lt2" tx2="dk2" accent1="accent1" accent2="accent2" accent3="accent3" accent4="accent4" accent5="accent5" accent6="accent6" hlink="hlink" folHlink="folHlink"/>
+  <p:notesStyle>
+    <a:lvl1pPr marL="0" algn="l" defTabSz="457200" rtl="0" eaLnBrk="1" latinLnBrk="0" hangingPunct="1">
+      <a:defRPr sz="1200" kern="1200">
+        <a:solidFill>
+          <a:schemeClr val="tx1"/>
+        </a:solidFill>
+        <a:latin typeface="+mn-lt"/>
+        <a:ea typeface="+mn-ea"/>
+        <a:cs typeface="+mn-cs"/>
+      </a:defRPr>
+    </a:lvl1pPr>
+    <a:lvl2pPr marL="457200" algn="l" defTabSz="457200" rtl="0" eaLnBrk="1" latinLnBrk="0" hangingPunct="1">
+      <a:defRPr sz="1200" kern="1200">
+        <a:solidFill>
+          <a:schemeClr val="tx1"/>
+        </a:solidFill>
+        <a:latin typeface="+mn-lt"/>
+        <a:ea typeface="+mn-ea"/>
+        <a:cs typeface="+mn-cs"/>
+      </a:defRPr>
+    </a:lvl2pPr>
+    <a:lvl3pPr marL="914400" algn="l" defTabSz="457200" rtl="0" eaLnBrk="1" latinLnBrk="0" hangingPunct="1">
+      <a:defRPr sz="1200" kern="1200">
+        <a:solidFill>
+          <a:schemeClr val="tx1"/>
+        </a:solidFill>
+        <a:latin typeface="+mn-lt"/>
+        <a:ea typeface="+mn-ea"/>
+        <a:cs typeface="+mn-cs"/>
+      </a:defRPr>
+    </a:lvl3pPr>
+    <a:lvl4pPr marL="1371600" algn="l" defTabSz="457200" rtl="0" eaLnBrk="1" latinLnBrk="0" hangingPunct="1">
+      <a:defRPr sz="1200" kern="1200">
+        <a:solidFill>
+          <a:schemeClr val="tx1"/>
+        </a:solidFill>
+        <a:latin typeface="+mn-lt"/>
+        <a:ea typeface="+mn-ea"/>
+        <a:cs typeface="+mn-cs"/>
+      </a:defRPr>
+    </a:lvl4pPr>
+    <a:lvl5pPr marL="1828800" algn="l" defTabSz="457200" rtl="0" eaLnBrk="1" latinLnBrk="0" hangingPunct="1">
+      <a:defRPr sz="1200" kern="1200">
+        <a:solidFill>
+          <a:schemeClr val="tx1"/>
+        </a:solidFill>
+        <a:latin typeface="+mn-lt"/>
+        <a:ea typeface="+mn-ea"/>
+        <a:cs typeface="+mn-cs"/>
+      </a:defRPr>
+    </a:lvl5pPr>
+    <a:lvl6pPr marL="2286000" algn="l" defTabSz="457200" rtl="0" eaLnBrk="1" latinLnBrk="0" hangingPunct="1">
+      <a:defRPr sz="1200" kern="1200">
+        <a:solidFill>
+          <a:schemeClr val="tx1"/>
+        </a:solidFill>
+        <a:latin typeface="+mn-lt"/>
+        <a:ea typeface="+mn-ea"/>
+        <a:cs typeface="+mn-cs"/>
+      </a:defRPr>
+    </a:lvl6pPr>
+    <a:lvl7pPr marL="2743200" algn="l" defTabSz="457200" rtl="0" eaLnBrk="1" latinLnBrk="0" hangingPunct="1">
+      <a:defRPr sz="1200" kern="1200">
+        <a:solidFill>
+          <a:schemeClr val="tx1"/>
+        </a:solidFill>
+        <a:latin typeface="+mn-lt"/>
+        <a:ea typeface="+mn-ea"/>
+        <a:cs typeface="+mn-cs"/>
+      </a:defRPr>
+    </a:lvl7pPr>
+    <a:lvl8pPr marL="3200400" algn="l" defTabSz="457200" rtl="0" eaLnBrk="1" latinLnBrk="0" hangingPunct="1">
+      <a:defRPr sz="1200" kern="1200">
+        <a:solidFill>
+          <a:schemeClr val="tx1"/>
+        </a:solidFill>
+        <a:latin typeface="+mn-lt"/>
+        <a:ea typeface="+mn-ea"/>
+        <a:cs typeface="+mn-cs"/>
+      </a:defRPr>
+    </a:lvl8pPr>
+    <a:lvl9pPr marL="3657600" algn="l" defTabSz="457200" rtl="0" eaLnBrk="1" latinLnBrk="0" hangingPunct="1">
+      <a:defRPr sz="1200" kern="1200">
+        <a:solidFill>
+          <a:schemeClr val="tx1"/>
+        </a:solidFill>
+        <a:latin typeface="+mn-lt"/>
+        <a:ea typeface="+mn-ea"/>
+        <a:cs typeface="+mn-cs"/>
+      </a:defRPr>
+    </a:lvl9pPr>
+  </p:notesStyle>
+</p:notesMaster>
+</file>
+
+<file path=ppt/notesSlides/notesSlide1.xml><?xml version="1.0" encoding="utf-8"?>
+<p:notes xmlns:a="http://schemas.openxmlformats.org/drawingml/2006/main" xmlns:p="http://schemas.openxmlformats.org/presentationml/2006/main" xmlns:r="http://schemas.openxmlformats.org/officeDocument/2006/relationships">
+  <p:cSld>
+    <p:spTree>
+      <p:nvGrpSpPr>
+        <p:cNvPr id="1" name=""/>
+        <p:cNvGrpSpPr/>
+        <p:nvPr/>
+      </p:nvGrpSpPr>
+      <p:grpSpPr>
+        <a:xfrm>
+          <a:off x="0" y="0"/>
+          <a:ext cx="0" cy="0"/>
+          <a:chOff x="0" y="0"/>
+          <a:chExt cx="0" cy="0"/>
+        </a:xfrm>
+      </p:grpSpPr>
+      <p:sp>
+        <p:nvSpPr>
+          <p:cNvPr id="2" name="Slide Image Placeholder 1"/>
+          <p:cNvSpPr>
+            <a:spLocks noGrp="1"/>
+          </p:cNvSpPr>
+          <p:nvPr>
+            <p:ph type="sldImg" idx="2"/>
+          </p:nvPr>
+        </p:nvSpPr>
+        <p:spPr/>
+      </p:sp>
+      <p:sp>
+        <p:nvSpPr>
+          <p:cNvPr id="3" name="Notes Placeholder 2"/>
+          <p:cNvSpPr>
+            <a:spLocks noGrp="1"/>
+          </p:cNvSpPr>
+          <p:nvPr>
+            <p:ph type="body" idx="3" sz="quarter"/>
+          </p:nvPr>
+        </p:nvSpPr>
+        <p:spPr/>
+        <p:txBody>
+          <a:bodyPr/>
+          <a:lstStyle/>
+          <a:p>
+            <a:r>
+              <a:t>Welcome, and thanks for making the time. Over the next half hour we will walk through the common errors we keep seeing in the Nectarbloom Prompt and Rubrics queue, and the simple fix for each one. The goal is not to catch anyone out. It is to help you get tasks accepted the first time, so you spend less time on rework.</a:t>
+            </a:r>
+          </a:p>
+          <a:p/>
+          <a:p>
+            <a:r>
+              <a:t>I have grouped everything into six stages, in the order you actually work: the account and reset, the opening prompt, the deliverables and GTFA, the rubric, the simplified run, and submission. At the end there is a short section on the newest issues reviewers are flagging.</a:t>
+            </a:r>
+          </a:p>
+          <a:p/>
+          <a:p>
+            <a:r>
+              <a:t>Please ask questions as we go, and if a mistake I describe today has happened to you, please say so out loud, because those real examples are the most useful part of a session like this. Let's start with the big picture.</a:t>
+            </a:r>
+          </a:p>
+        </p:txBody>
+      </p:sp>
+      <p:sp>
+        <p:nvSpPr>
+          <p:cNvPr id="4" name="Slide Number Placeholder 3"/>
+          <p:cNvSpPr>
+            <a:spLocks noGrp="1"/>
+          </p:cNvSpPr>
+          <p:nvPr>
+            <p:ph type="sldNum" idx="5" sz="quarter"/>
+          </p:nvPr>
+        </p:nvSpPr>
+        <p:spPr/>
+      </p:sp>
+    </p:spTree>
+  </p:cSld>
+  <p:clrMapOvr>
+    <a:masterClrMapping/>
+  </p:clrMapOvr>
+</p:notes>
+</file>
+
+<file path=ppt/notesSlides/notesSlide10.xml><?xml version="1.0" encoding="utf-8"?>
+<p:notes xmlns:a="http://schemas.openxmlformats.org/drawingml/2006/main" xmlns:p="http://schemas.openxmlformats.org/presentationml/2006/main" xmlns:r="http://schemas.openxmlformats.org/officeDocument/2006/relationships">
+  <p:cSld>
+    <p:spTree>
+      <p:nvGrpSpPr>
+        <p:cNvPr id="1" name=""/>
+        <p:cNvGrpSpPr/>
+        <p:nvPr/>
+      </p:nvGrpSpPr>
+      <p:grpSpPr>
+        <a:xfrm>
+          <a:off x="0" y="0"/>
+          <a:ext cx="0" cy="0"/>
+          <a:chOff x="0" y="0"/>
+          <a:chExt cx="0" cy="0"/>
+        </a:xfrm>
+      </p:grpSpPr>
+      <p:sp>
+        <p:nvSpPr>
+          <p:cNvPr id="2" name="Slide Image Placeholder 1"/>
+          <p:cNvSpPr>
+            <a:spLocks noGrp="1"/>
+          </p:cNvSpPr>
+          <p:nvPr>
+            <p:ph type="sldImg" idx="2"/>
+          </p:nvPr>
+        </p:nvSpPr>
+        <p:spPr/>
+      </p:sp>
+      <p:sp>
+        <p:nvSpPr>
+          <p:cNvPr id="3" name="Notes Placeholder 2"/>
+          <p:cNvSpPr>
+            <a:spLocks noGrp="1"/>
+          </p:cNvSpPr>
+          <p:nvPr>
+            <p:ph type="body" idx="3" sz="quarter"/>
+          </p:nvPr>
+        </p:nvSpPr>
+        <p:spPr/>
+        <p:txBody>
+          <a:bodyPr/>
+          <a:lstStyle/>
+          <a:p>
+            <a:r>
+              <a:t>This slide is new, and it covers what reviewers have started flagging most recently. Some of these are not ordinary mistakes; they are integrity problems, and they go on the disable list rather than the rework pile, so please read them carefully.</a:t>
+            </a:r>
+          </a:p>
+          <a:p/>
+          <a:p>
+            <a:r>
+              <a:t>First, broken runs. Sometimes the model cannot reach the account, or it uses another persona's account, or it invents data like 'Alpha' and 'Beta' or '[domaine]' placeholders, or it tells the user to do the work themselves. None of those are usable. Re-run on a clean, correct account, and make sure every entity comes from the universe.</a:t>
+            </a:r>
+          </a:p>
+          <a:p/>
+          <a:p>
+            <a:r>
+              <a:t>Second, and this is a big one right now: evidence that is not from this run. We are seeing input files that are actually the model's own output, a turn record that is really the model's reply instead of the prompt you sent, and chat PDFs, screenshots, or even a GTFA copied from a different chat. Everything you file has to come from this one linked run: the turns are the exact prompts you sent, the inputs are genuine source files, and the PDF, screenshots, and GTFA all match this chat.</a:t>
+            </a:r>
+          </a:p>
+          <a:p/>
+          <a:p>
+            <a:r>
+              <a:t>Third, passing the gate only on paper, and there is a firm rule here now: if the simplified run, graded honestly, scores above 40%, the item is too easy and goes back to be hardened. We never re-rate, cut, or reweight criteria to get under the line. We are seeing items filed under 40% that come out between 41% and 93% when regraded honestly, often because visible draft or calendar cards were marked Fail just because they look like placeholders in the chat PDF. Grade those cards from the share page, where their content is visible, and harden the item rather than grading it down.</a:t>
+            </a:r>
+          </a:p>
+          <a:p/>
+          <a:p>
+            <a:r>
+              <a:t>And fourth, the serious one: integrity violations. Fabricating a figure so a total matches. Marking your self-check as full while the automated check still lists gaps. Flipping grades to hold the gate. Editing turn one without re-running. Please never do any of these. Fix the work, not the number. I want to be direct about this last group: these are not pace or polish issues, they are trust issues, and they affect whether we can keep sending you work, so when in doubt, flag it rather than paper over it. Now, submission.</a:t>
+            </a:r>
+          </a:p>
+        </p:txBody>
+      </p:sp>
+      <p:sp>
+        <p:nvSpPr>
+          <p:cNvPr id="4" name="Slide Number Placeholder 3"/>
+          <p:cNvSpPr>
+            <a:spLocks noGrp="1"/>
+          </p:cNvSpPr>
+          <p:nvPr>
+            <p:ph type="sldNum" idx="5" sz="quarter"/>
+          </p:nvPr>
+        </p:nvSpPr>
+        <p:spPr/>
+      </p:sp>
+    </p:spTree>
+  </p:cSld>
+  <p:clrMapOvr>
+    <a:masterClrMapping/>
+  </p:clrMapOvr>
+</p:notes>
+</file>
+
+<file path=ppt/notesSlides/notesSlide11.xml><?xml version="1.0" encoding="utf-8"?>
+<p:notes xmlns:a="http://schemas.openxmlformats.org/drawingml/2006/main" xmlns:p="http://schemas.openxmlformats.org/presentationml/2006/main" xmlns:r="http://schemas.openxmlformats.org/officeDocument/2006/relationships">
+  <p:cSld>
+    <p:spTree>
+      <p:nvGrpSpPr>
+        <p:cNvPr id="1" name=""/>
+        <p:cNvGrpSpPr/>
+        <p:nvPr/>
+      </p:nvGrpSpPr>
+      <p:grpSpPr>
+        <a:xfrm>
+          <a:off x="0" y="0"/>
+          <a:ext cx="0" cy="0"/>
+          <a:chOff x="0" y="0"/>
+          <a:chExt cx="0" cy="0"/>
+        </a:xfrm>
+      </p:grpSpPr>
+      <p:sp>
+        <p:nvSpPr>
+          <p:cNvPr id="2" name="Slide Image Placeholder 1"/>
+          <p:cNvSpPr>
+            <a:spLocks noGrp="1"/>
+          </p:cNvSpPr>
+          <p:nvPr>
+            <p:ph type="sldImg" idx="2"/>
+          </p:nvPr>
+        </p:nvSpPr>
+        <p:spPr/>
+      </p:sp>
+      <p:sp>
+        <p:nvSpPr>
+          <p:cNvPr id="3" name="Notes Placeholder 2"/>
+          <p:cNvSpPr>
+            <a:spLocks noGrp="1"/>
+          </p:cNvSpPr>
+          <p:nvPr>
+            <p:ph type="body" idx="3" sz="quarter"/>
+          </p:nvPr>
+        </p:nvSpPr>
+        <p:spPr/>
+        <p:txBody>
+          <a:bodyPr/>
+          <a:lstStyle/>
+          <a:p>
+            <a:r>
+              <a:t>Almost done. The work is only graded if a reviewer can open and verify it, and these four mistakes can sink an otherwise good task.</a:t>
+            </a:r>
+          </a:p>
+          <a:p/>
+          <a:p>
+            <a:r>
+              <a:t>First, outputs not preserved. If the reply names a file but it was never uploaded, or an uploaded document is empty apart from its title, the rating cannot be checked. Upload every file the reply names, with its full content.</a:t>
+            </a:r>
+          </a:p>
+          <a:p/>
+          <a:p>
+            <a:r>
+              <a:t>Second, the browser address-bar link. That link is private to your session, so a reviewer cannot open it. Always use the product's Share feature, and save a link after every turn.</a:t>
+            </a:r>
+          </a:p>
+          <a:p/>
+          <a:p>
+            <a:r>
+              <a:t>Third, deleting a chat. This one is final: deleting a chat kills every share link in the task and fails it. Never delete; just start a new chat per task.</a:t>
+            </a:r>
+          </a:p>
+          <a:p/>
+          <a:p>
+            <a:r>
+              <a:t>Fourth, resubmitting without addressing the feedback. If only the run or the wording changed while the listed fixes stayed open, you get the same send-back again. Work through the feedback item by item, and tick each one off before you resubmit.</a:t>
+            </a:r>
+          </a:p>
+          <a:p/>
+          <a:p>
+            <a:r>
+              <a:t>None of these are hard to avoid; they are just easy to forget when you are rushing at the end. Slow down for the last two minutes of each task. A useful habit is to open your own share link in a private browser window before you submit, because if it does not open cleanly there, it will not open for the reviewer either. Let's finish with the checklist.</a:t>
+            </a:r>
+          </a:p>
+        </p:txBody>
+      </p:sp>
+      <p:sp>
+        <p:nvSpPr>
+          <p:cNvPr id="4" name="Slide Number Placeholder 3"/>
+          <p:cNvSpPr>
+            <a:spLocks noGrp="1"/>
+          </p:cNvSpPr>
+          <p:nvPr>
+            <p:ph type="sldNum" idx="5" sz="quarter"/>
+          </p:nvPr>
+        </p:nvSpPr>
+        <p:spPr/>
+      </p:sp>
+    </p:spTree>
+  </p:cSld>
+  <p:clrMapOvr>
+    <a:masterClrMapping/>
+  </p:clrMapOvr>
+</p:notes>
+</file>
+
+<file path=ppt/notesSlides/notesSlide12.xml><?xml version="1.0" encoding="utf-8"?>
+<p:notes xmlns:a="http://schemas.openxmlformats.org/drawingml/2006/main" xmlns:p="http://schemas.openxmlformats.org/presentationml/2006/main" xmlns:r="http://schemas.openxmlformats.org/officeDocument/2006/relationships">
+  <p:cSld>
+    <p:spTree>
+      <p:nvGrpSpPr>
+        <p:cNvPr id="1" name=""/>
+        <p:cNvGrpSpPr/>
+        <p:nvPr/>
+      </p:nvGrpSpPr>
+      <p:grpSpPr>
+        <a:xfrm>
+          <a:off x="0" y="0"/>
+          <a:ext cx="0" cy="0"/>
+          <a:chOff x="0" y="0"/>
+          <a:chExt cx="0" cy="0"/>
+        </a:xfrm>
+      </p:grpSpPr>
+      <p:sp>
+        <p:nvSpPr>
+          <p:cNvPr id="2" name="Slide Image Placeholder 1"/>
+          <p:cNvSpPr>
+            <a:spLocks noGrp="1"/>
+          </p:cNvSpPr>
+          <p:nvPr>
+            <p:ph type="sldImg" idx="2"/>
+          </p:nvPr>
+        </p:nvSpPr>
+        <p:spPr/>
+      </p:sp>
+      <p:sp>
+        <p:nvSpPr>
+          <p:cNvPr id="3" name="Notes Placeholder 2"/>
+          <p:cNvSpPr>
+            <a:spLocks noGrp="1"/>
+          </p:cNvSpPr>
+          <p:nvPr>
+            <p:ph type="body" idx="3" sz="quarter"/>
+          </p:nvPr>
+        </p:nvSpPr>
+        <p:spPr/>
+        <p:txBody>
+          <a:bodyPr/>
+          <a:lstStyle/>
+          <a:p>
+            <a:r>
+              <a:t>This is the slide to keep next to you. Before you submit, re-read your own task as if you were a stranger seeing it for the first time, and ask four questions. Could a model finish it in one reply? If so, it is too easy. Is every name real, something you can see in Gmail, Drive, or Calendar? Does each rubric line have one clear pass or fail answer? And does anything depend on a draft being sent, which is never allowed?</a:t>
+            </a:r>
+          </a:p>
+          <a:p/>
+          <a:p>
+            <a:r>
+              <a:t>On the right are the checks that fail a task outright, no matter how good the rest is: an ungrounded entity, an LLM-written opener, a deleted chat or an address-bar link, a named file with no matching upload, and a PDF that contradicts the live share page. If any are true, fix it before you submit.</a:t>
+            </a:r>
+          </a:p>
+          <a:p/>
+          <a:p>
+            <a:r>
+              <a:t>And when in doubt, ask in the War Room before you run, not after. A wrong account, model, or universe cannot be undone once the run has started, and a quick question is always cheaper than a rejected task. Take ten seconds on each of these before you hit submit, and most send-backs simply never happen.</a:t>
+            </a:r>
+          </a:p>
+        </p:txBody>
+      </p:sp>
+      <p:sp>
+        <p:nvSpPr>
+          <p:cNvPr id="4" name="Slide Number Placeholder 3"/>
+          <p:cNvSpPr>
+            <a:spLocks noGrp="1"/>
+          </p:cNvSpPr>
+          <p:nvPr>
+            <p:ph type="sldNum" idx="5" sz="quarter"/>
+          </p:nvPr>
+        </p:nvSpPr>
+        <p:spPr/>
+      </p:sp>
+    </p:spTree>
+  </p:cSld>
+  <p:clrMapOvr>
+    <a:masterClrMapping/>
+  </p:clrMapOvr>
+</p:notes>
+</file>
+
+<file path=ppt/notesSlides/notesSlide13.xml><?xml version="1.0" encoding="utf-8"?>
+<p:notes xmlns:a="http://schemas.openxmlformats.org/drawingml/2006/main" xmlns:p="http://schemas.openxmlformats.org/presentationml/2006/main" xmlns:r="http://schemas.openxmlformats.org/officeDocument/2006/relationships">
+  <p:cSld>
+    <p:spTree>
+      <p:nvGrpSpPr>
+        <p:cNvPr id="1" name=""/>
+        <p:cNvGrpSpPr/>
+        <p:nvPr/>
+      </p:nvGrpSpPr>
+      <p:grpSpPr>
+        <a:xfrm>
+          <a:off x="0" y="0"/>
+          <a:ext cx="0" cy="0"/>
+          <a:chOff x="0" y="0"/>
+          <a:chExt cx="0" cy="0"/>
+        </a:xfrm>
+      </p:grpSpPr>
+      <p:sp>
+        <p:nvSpPr>
+          <p:cNvPr id="2" name="Slide Image Placeholder 1"/>
+          <p:cNvSpPr>
+            <a:spLocks noGrp="1"/>
+          </p:cNvSpPr>
+          <p:nvPr>
+            <p:ph type="sldImg" idx="2"/>
+          </p:nvPr>
+        </p:nvSpPr>
+        <p:spPr/>
+      </p:sp>
+      <p:sp>
+        <p:nvSpPr>
+          <p:cNvPr id="3" name="Notes Placeholder 2"/>
+          <p:cNvSpPr>
+            <a:spLocks noGrp="1"/>
+          </p:cNvSpPr>
+          <p:nvPr>
+            <p:ph type="body" idx="3" sz="quarter"/>
+          </p:nvPr>
+        </p:nvSpPr>
+        <p:spPr/>
+        <p:txBody>
+          <a:bodyPr/>
+          <a:lstStyle/>
+          <a:p>
+            <a:r>
+              <a:t>That is everything. If you take away three things today, let them be these: ground every entity in the real account, write rubric lines that two people would grade the same way, and never change the evidence or the grades to make a task look better than it is. Do those, and most of your tasks will pass the first time.</a:t>
+            </a:r>
+          </a:p>
+          <a:p/>
+          <a:p>
+            <a:r>
+              <a:t>Thank you for your attention and for the care you put into these items; it genuinely makes the evaluations better. I will stay on for questions, and anything that comes up later, please drop it in the War Room. If it is helpful, I can share these slides along with the speaker notes afterwards, so you have them to refer back to.</a:t>
+            </a:r>
+          </a:p>
+        </p:txBody>
+      </p:sp>
+      <p:sp>
+        <p:nvSpPr>
+          <p:cNvPr id="4" name="Slide Number Placeholder 3"/>
+          <p:cNvSpPr>
+            <a:spLocks noGrp="1"/>
+          </p:cNvSpPr>
+          <p:nvPr>
+            <p:ph type="sldNum" idx="5" sz="quarter"/>
+          </p:nvPr>
+        </p:nvSpPr>
+        <p:spPr/>
+      </p:sp>
+    </p:spTree>
+  </p:cSld>
+  <p:clrMapOvr>
+    <a:masterClrMapping/>
+  </p:clrMapOvr>
+</p:notes>
+</file>
+
+<file path=ppt/notesSlides/notesSlide2.xml><?xml version="1.0" encoding="utf-8"?>
+<p:notes xmlns:a="http://schemas.openxmlformats.org/drawingml/2006/main" xmlns:p="http://schemas.openxmlformats.org/presentationml/2006/main" xmlns:r="http://schemas.openxmlformats.org/officeDocument/2006/relationships">
+  <p:cSld>
+    <p:spTree>
+      <p:nvGrpSpPr>
+        <p:cNvPr id="1" name=""/>
+        <p:cNvGrpSpPr/>
+        <p:nvPr/>
+      </p:nvGrpSpPr>
+      <p:grpSpPr>
+        <a:xfrm>
+          <a:off x="0" y="0"/>
+          <a:ext cx="0" cy="0"/>
+          <a:chOff x="0" y="0"/>
+          <a:chExt cx="0" cy="0"/>
+        </a:xfrm>
+      </p:grpSpPr>
+      <p:sp>
+        <p:nvSpPr>
+          <p:cNvPr id="2" name="Slide Image Placeholder 1"/>
+          <p:cNvSpPr>
+            <a:spLocks noGrp="1"/>
+          </p:cNvSpPr>
+          <p:nvPr>
+            <p:ph type="sldImg" idx="2"/>
+          </p:nvPr>
+        </p:nvSpPr>
+        <p:spPr/>
+      </p:sp>
+      <p:sp>
+        <p:nvSpPr>
+          <p:cNvPr id="3" name="Notes Placeholder 2"/>
+          <p:cNvSpPr>
+            <a:spLocks noGrp="1"/>
+          </p:cNvSpPr>
+          <p:nvPr>
+            <p:ph type="body" idx="3" sz="quarter"/>
+          </p:nvPr>
+        </p:nvSpPr>
+        <p:spPr/>
+        <p:txBody>
+          <a:bodyPr/>
+          <a:lstStyle/>
+          <a:p>
+            <a:r>
+              <a:t>Here is the whole picture on one slide. Every rejection traces back to one of these six stages, and each of the next slides takes one stage and lists the exact mistakes plus the fix.</a:t>
+            </a:r>
+          </a:p>
+          <a:p/>
+          <a:p>
+            <a:r>
+              <a:t>Two numbers should shape how you work. First, the single most common reason a task is sent back is an ungrounded entity: the prompt, outcome, or GTFA mentions a file, person, or date that does not exist in the account. The fix is simple. Open Gmail, Drive, and Calendar first, and confirm every name on screen. If it is not in the universe, it does not go in the task.</a:t>
+            </a:r>
+          </a:p>
+          <a:p/>
+          <a:p>
+            <a:r>
+              <a:t>Second, when reviewers looked at defective rubric criteria, two problems made up more than half of everything they found: 30% was wording two people could not grade the same way, and 26% actually punished the correct answer. We will come back to both, because fixing those two habits clears most rubric rejections.</a:t>
+            </a:r>
+          </a:p>
+          <a:p/>
+          <a:p>
+            <a:r>
+              <a:t>As we go, keep asking one question: would a careful stranger, holding only the prompt and the files, agree with what I wrote? If you remember nothing else today, remember those two numbers: confirm every name on screen, and write rubric lines a stranger could grade. Let's start with the account.</a:t>
+            </a:r>
+          </a:p>
+        </p:txBody>
+      </p:sp>
+      <p:sp>
+        <p:nvSpPr>
+          <p:cNvPr id="4" name="Slide Number Placeholder 3"/>
+          <p:cNvSpPr>
+            <a:spLocks noGrp="1"/>
+          </p:cNvSpPr>
+          <p:nvPr>
+            <p:ph type="sldNum" idx="5" sz="quarter"/>
+          </p:nvPr>
+        </p:nvSpPr>
+        <p:spPr/>
+      </p:sp>
+    </p:spTree>
+  </p:cSld>
+  <p:clrMapOvr>
+    <a:masterClrMapping/>
+  </p:clrMapOvr>
+</p:notes>
+</file>
+
+<file path=ppt/notesSlides/notesSlide3.xml><?xml version="1.0" encoding="utf-8"?>
+<p:notes xmlns:a="http://schemas.openxmlformats.org/drawingml/2006/main" xmlns:p="http://schemas.openxmlformats.org/presentationml/2006/main" xmlns:r="http://schemas.openxmlformats.org/officeDocument/2006/relationships">
+  <p:cSld>
+    <p:spTree>
+      <p:nvGrpSpPr>
+        <p:cNvPr id="1" name=""/>
+        <p:cNvGrpSpPr/>
+        <p:nvPr/>
+      </p:nvGrpSpPr>
+      <p:grpSpPr>
+        <a:xfrm>
+          <a:off x="0" y="0"/>
+          <a:ext cx="0" cy="0"/>
+          <a:chOff x="0" y="0"/>
+          <a:chExt cx="0" cy="0"/>
+        </a:xfrm>
+      </p:grpSpPr>
+      <p:sp>
+        <p:nvSpPr>
+          <p:cNvPr id="2" name="Slide Image Placeholder 1"/>
+          <p:cNvSpPr>
+            <a:spLocks noGrp="1"/>
+          </p:cNvSpPr>
+          <p:nvPr>
+            <p:ph type="sldImg" idx="2"/>
+          </p:nvPr>
+        </p:nvSpPr>
+        <p:spPr/>
+      </p:sp>
+      <p:sp>
+        <p:nvSpPr>
+          <p:cNvPr id="3" name="Notes Placeholder 2"/>
+          <p:cNvSpPr>
+            <a:spLocks noGrp="1"/>
+          </p:cNvSpPr>
+          <p:nvPr>
+            <p:ph type="body" idx="3" sz="quarter"/>
+          </p:nvPr>
+        </p:nvSpPr>
+        <p:spPr/>
+        <p:txBody>
+          <a:bodyPr/>
+          <a:lstStyle/>
+          <a:p>
+            <a:r>
+              <a:t>Everything starts with the right account and a clean environment, and a surprising number of tasks fail before any real work begins.</a:t>
+            </a:r>
+          </a:p>
+          <a:p/>
+          <a:p>
+            <a:r>
+              <a:t>First, the account. Use only the demo account you claimed from the claim link. Not your personal Gmail, not your Outlier login, and not an account from another queue. Mixing accounts breaks the task and cannot be fixed afterwards.</a:t>
+            </a:r>
+          </a:p>
+          <a:p/>
+          <a:p>
+            <a:r>
+              <a:t>Second, the model. Select 3.8 Flash and set the Thinking level to Low. If the work is produced on the wrong model, it is simply not valid. And a newer issue we see a lot: it is not enough to select the model, you have to prove it. If the chat PDF says 'Created with Auto', or the screenshot is missing, or it was taken from an empty chat with no custom label, the reviewer cannot confirm the model and the task is rejected. Screenshot the selector before the run, with the model name clearly visible.</a:t>
+            </a:r>
+          </a:p>
+          <a:p/>
+          <a:p>
+            <a:r>
+              <a:t>Third, the reset, where timing matters. Reset before a run, never after one. If you do not reset before the simplified run, leftover files and drafts change the result. If you start before the green 'workspace is restored' message, you are running on a half-restored account. And if you reset after the run, you have just deleted the files you still needed to upload. Reset first, save your evidence second.</a:t>
+            </a:r>
+          </a:p>
+          <a:p/>
+          <a:p>
+            <a:r>
+              <a:t>If an option is missing or the account looks wrong for your locale, ask in the War Room before you claim a task. As a quick gauge, many of you have probably lost a task to a reset at the wrong moment at least once; the habit that prevents it is boringly simple, which is reset, wait for the green message, work, and only then save and upload. Let's go to the opening prompt.</a:t>
+            </a:r>
+          </a:p>
+        </p:txBody>
+      </p:sp>
+      <p:sp>
+        <p:nvSpPr>
+          <p:cNvPr id="4" name="Slide Number Placeholder 3"/>
+          <p:cNvSpPr>
+            <a:spLocks noGrp="1"/>
+          </p:cNvSpPr>
+          <p:nvPr>
+            <p:ph type="sldNum" idx="5" sz="quarter"/>
+          </p:nvPr>
+        </p:nvSpPr>
+        <p:spPr/>
+      </p:sp>
+    </p:spTree>
+  </p:cSld>
+  <p:clrMapOvr>
+    <a:masterClrMapping/>
+  </p:clrMapOvr>
+</p:notes>
+</file>
+
+<file path=ppt/notesSlides/notesSlide4.xml><?xml version="1.0" encoding="utf-8"?>
+<p:notes xmlns:a="http://schemas.openxmlformats.org/drawingml/2006/main" xmlns:p="http://schemas.openxmlformats.org/presentationml/2006/main" xmlns:r="http://schemas.openxmlformats.org/officeDocument/2006/relationships">
+  <p:cSld>
+    <p:spTree>
+      <p:nvGrpSpPr>
+        <p:cNvPr id="1" name=""/>
+        <p:cNvGrpSpPr/>
+        <p:nvPr/>
+      </p:nvGrpSpPr>
+      <p:grpSpPr>
+        <a:xfrm>
+          <a:off x="0" y="0"/>
+          <a:ext cx="0" cy="0"/>
+          <a:chOff x="0" y="0"/>
+          <a:chExt cx="0" cy="0"/>
+        </a:xfrm>
+      </p:grpSpPr>
+      <p:sp>
+        <p:nvSpPr>
+          <p:cNvPr id="2" name="Slide Image Placeholder 1"/>
+          <p:cNvSpPr>
+            <a:spLocks noGrp="1"/>
+          </p:cNvSpPr>
+          <p:nvPr>
+            <p:ph type="sldImg" idx="2"/>
+          </p:nvPr>
+        </p:nvSpPr>
+        <p:spPr/>
+      </p:sp>
+      <p:sp>
+        <p:nvSpPr>
+          <p:cNvPr id="3" name="Notes Placeholder 2"/>
+          <p:cNvSpPr>
+            <a:spLocks noGrp="1"/>
+          </p:cNvSpPr>
+          <p:nvPr>
+            <p:ph type="body" idx="3" sz="quarter"/>
+          </p:nvPr>
+        </p:nvSpPr>
+        <p:spPr/>
+        <p:txBody>
+          <a:bodyPr/>
+          <a:lstStyle/>
+          <a:p>
+            <a:r>
+              <a:t>The opening prompt is the heart of the item, and it is deliberately incomplete. The gap between what the opener says and what it holds back is what makes your item hard. If you give everything away in the first message, a strong model one-shots it, and there is no 20+ turn conversation to evaluate.</a:t>
+            </a:r>
+          </a:p>
+          <a:p/>
+          <a:p>
+            <a:r>
+              <a:t>The first mistake is no ask at all. If the prompt only describes a situation, the model has nothing to do. Compare 'I have been buried in the Q3 vendor review all week', which is just a statement, with the same line plus 'can you help me work out which bids are solid before Friday'. Always include two or three loose asks.</a:t>
+            </a:r>
+          </a:p>
+          <a:p/>
+          <a:p>
+            <a:r>
+              <a:t>The opposite is asking for everything at once. 'Make a one-page PDF of my March expenses and email it to my manager' names the artifact, the format, and the action, so a strong model finishes it in one turn. Lead with the situation and the worry, and keep the detail for later.</a:t>
+            </a:r>
+          </a:p>
+          <a:p/>
+          <a:p>
+            <a:r>
+              <a:t>Next, the big one: the ungrounded entity. Every file, person, and date must exist in your universe, so confirm each on screen.</a:t>
+            </a:r>
+          </a:p>
+          <a:p/>
+          <a:p>
+            <a:r>
+              <a:t>Do not let an LLM write or polish the opener. Paste is disabled, and you attest the text is your own.</a:t>
+            </a:r>
+          </a:p>
+          <a:p/>
+          <a:p>
+            <a:r>
+              <a:t>Watch the language. Write natively in your assigned locale from the start. A fully English opener on a French or German item does not pass, and a translated scenario reads unnatural. Loanwords are fine, but you cannot fix it in translation later.</a:t>
+            </a:r>
+          </a:p>
+          <a:p/>
+          <a:p>
+            <a:r>
+              <a:t>And do not hide all the deliverables in the opener. The file, the numbers, the email belong in the Target Deliverables field, not the first message.</a:t>
+            </a:r>
+          </a:p>
+          <a:p/>
+          <a:p>
+            <a:r>
+              <a:t>One more opener trap is contrived or stacked constraints. If you pile on rigid, unrealistic rules, like exactly three tables, fifteen-minute blocks, or legally-binding wording that no real user would stack, the item reads as artificial. Use only constraints a real user would actually set, and keep the opener a loose, situation-first ask.</a:t>
+            </a:r>
+          </a:p>
+          <a:p/>
+          <a:p>
+            <a:r>
+              <a:t>There are worked examples, including tasks rated 5 out of 5 and 3 out of 5, at the exemplar link on the slide. One tip: if you are ever unsure whether an opener is too easy, try it once on 3.8 Flash yourself, and if a single reply basically finishes it, loosen it before you commit. Let's look at deliverables next.</a:t>
+            </a:r>
+          </a:p>
+        </p:txBody>
+      </p:sp>
+      <p:sp>
+        <p:nvSpPr>
+          <p:cNvPr id="4" name="Slide Number Placeholder 3"/>
+          <p:cNvSpPr>
+            <a:spLocks noGrp="1"/>
+          </p:cNvSpPr>
+          <p:nvPr>
+            <p:ph type="sldNum" idx="5" sz="quarter"/>
+          </p:nvPr>
+        </p:nvSpPr>
+        <p:spPr/>
+      </p:sp>
+    </p:spTree>
+  </p:cSld>
+  <p:clrMapOvr>
+    <a:masterClrMapping/>
+  </p:clrMapOvr>
+</p:notes>
+</file>
+
+<file path=ppt/notesSlides/notesSlide5.xml><?xml version="1.0" encoding="utf-8"?>
+<p:notes xmlns:a="http://schemas.openxmlformats.org/drawingml/2006/main" xmlns:p="http://schemas.openxmlformats.org/presentationml/2006/main" xmlns:r="http://schemas.openxmlformats.org/officeDocument/2006/relationships">
+  <p:cSld>
+    <p:spTree>
+      <p:nvGrpSpPr>
+        <p:cNvPr id="1" name=""/>
+        <p:cNvGrpSpPr/>
+        <p:nvPr/>
+      </p:nvGrpSpPr>
+      <p:grpSpPr>
+        <a:xfrm>
+          <a:off x="0" y="0"/>
+          <a:ext cx="0" cy="0"/>
+          <a:chOff x="0" y="0"/>
+          <a:chExt cx="0" cy="0"/>
+        </a:xfrm>
+      </p:grpSpPr>
+      <p:sp>
+        <p:nvSpPr>
+          <p:cNvPr id="2" name="Slide Image Placeholder 1"/>
+          <p:cNvSpPr>
+            <a:spLocks noGrp="1"/>
+          </p:cNvSpPr>
+          <p:nvPr>
+            <p:ph type="sldImg" idx="2"/>
+          </p:nvPr>
+        </p:nvSpPr>
+        <p:spPr/>
+      </p:sp>
+      <p:sp>
+        <p:nvSpPr>
+          <p:cNvPr id="3" name="Notes Placeholder 2"/>
+          <p:cNvSpPr>
+            <a:spLocks noGrp="1"/>
+          </p:cNvSpPr>
+          <p:nvPr>
+            <p:ph type="body" idx="3" sz="quarter"/>
+          </p:nvPr>
+        </p:nvSpPr>
+        <p:spPr/>
+        <p:txBody>
+          <a:bodyPr/>
+          <a:lstStyle/>
+          <a:p>
+            <a:r>
+              <a:t>The target outcome is your answer key, and you write it before you know how the model will behave. Work the task yourself first, then write down every element a fully successful run leaves behind. One rule keeps these clean: every entry must be something you can mark present or absent without a judgment call.</a:t>
+            </a:r>
+          </a:p>
+          <a:p/>
+          <a:p>
+            <a:r>
+              <a:t>The first mistake is a vague deliverable. 'The model should give a good vendor recommendation' cannot be checked. Write instead 'produces a one-page PDF naming the two selected vendors and their bid totals'.</a:t>
+            </a:r>
+          </a:p>
+          <a:p/>
+          <a:p>
+            <a:r>
+              <a:t>The second is writing the deliverable as a guess about the user, like 'the user might ask to fix the budget sheet'. You cannot grade a prediction. State the finished result: 'produces a corrected budget sheet with March totals'.</a:t>
+            </a:r>
+          </a:p>
+          <a:p/>
+          <a:p>
+            <a:r>
+              <a:t>Third, no values or absences. 'Prepare a reconciliation file' gives the rubric nothing to hold. Each deliverable should name the artifact, its exact values, any side effects like drafts or events, and what must be absent, such as out-of-scope data or a sent email.</a:t>
+            </a:r>
+          </a:p>
+          <a:p/>
+          <a:p>
+            <a:r>
+              <a:t>Fourth, a hard project rule: nothing should require sending or sharing. The model may create drafts, documents, and files, but it must never send an email or share a file. So write 'drafts an email that stays unsent'.</a:t>
+            </a:r>
+          </a:p>
+          <a:p/>
+          <a:p>
+            <a:r>
+              <a:t>And last, an item too thin for 20+ turns. If your honest turn estimate is under 20, add real work: a new artifact, a cross-source check, or a mid-task correction. Re-confirming or splitting one ask into two does not count.</a:t>
+            </a:r>
+          </a:p>
+          <a:p/>
+          <a:p>
+            <a:r>
+              <a:t>One more point that is sending items back: your item must have a unique ground truth. It should land on exactly one correct answer that you can derive from the sources, and it must actually ask for something concrete to be produced. If two qualified people could reasonably answer differently, if the result is subjective, or if your target outcome is written as a question with nothing to produce, tighten the item until there is a single correct final state.</a:t>
+            </a:r>
+          </a:p>
+          <a:p/>
+          <a:p>
+            <a:r>
+              <a:t>A good test for each entry is whether you could hand it to a colleague and have them rebuild the exact output without asking you a single question; if they would need to ask, add the missing value. With solid deliverables, the GTFA almost writes itself.</a:t>
+            </a:r>
+          </a:p>
+        </p:txBody>
+      </p:sp>
+      <p:sp>
+        <p:nvSpPr>
+          <p:cNvPr id="4" name="Slide Number Placeholder 3"/>
+          <p:cNvSpPr>
+            <a:spLocks noGrp="1"/>
+          </p:cNvSpPr>
+          <p:nvPr>
+            <p:ph type="sldNum" idx="5" sz="quarter"/>
+          </p:nvPr>
+        </p:nvSpPr>
+        <p:spPr/>
+      </p:sp>
+    </p:spTree>
+  </p:cSld>
+  <p:clrMapOvr>
+    <a:masterClrMapping/>
+  </p:clrMapOvr>
+</p:notes>
+</file>
+
+<file path=ppt/notesSlides/notesSlide6.xml><?xml version="1.0" encoding="utf-8"?>
+<p:notes xmlns:a="http://schemas.openxmlformats.org/drawingml/2006/main" xmlns:p="http://schemas.openxmlformats.org/presentationml/2006/main" xmlns:r="http://schemas.openxmlformats.org/officeDocument/2006/relationships">
+  <p:cSld>
+    <p:spTree>
+      <p:nvGrpSpPr>
+        <p:cNvPr id="1" name=""/>
+        <p:cNvGrpSpPr/>
+        <p:nvPr/>
+      </p:nvGrpSpPr>
+      <p:grpSpPr>
+        <a:xfrm>
+          <a:off x="0" y="0"/>
+          <a:ext cx="0" cy="0"/>
+          <a:chOff x="0" y="0"/>
+          <a:chExt cx="0" cy="0"/>
+        </a:xfrm>
+      </p:grpSpPr>
+      <p:sp>
+        <p:nvSpPr>
+          <p:cNvPr id="2" name="Slide Image Placeholder 1"/>
+          <p:cNvSpPr>
+            <a:spLocks noGrp="1"/>
+          </p:cNvSpPr>
+          <p:nvPr>
+            <p:ph type="sldImg" idx="2"/>
+          </p:nvPr>
+        </p:nvSpPr>
+        <p:spPr/>
+      </p:sp>
+      <p:sp>
+        <p:nvSpPr>
+          <p:cNvPr id="3" name="Notes Placeholder 2"/>
+          <p:cNvSpPr>
+            <a:spLocks noGrp="1"/>
+          </p:cNvSpPr>
+          <p:nvPr>
+            <p:ph type="body" idx="3" sz="quarter"/>
+          </p:nvPr>
+        </p:nvSpPr>
+        <p:spPr/>
+        <p:txBody>
+          <a:bodyPr/>
+          <a:lstStyle/>
+          <a:p>
+            <a:r>
+              <a:t>The GTFA is the ideal, factually correct completion of the task, with the real values filled in. The key point: anything missing from the GTFA cannot be graded later, so it has to be complete.</a:t>
+            </a:r>
+          </a:p>
+          <a:p/>
+          <a:p>
+            <a:r>
+              <a:t>First, leaving things out. If the GTFA does not cover one of the prompt's asks, that ask cannot be scored. Walk the prompt ask by ask and tick each one against the GTFA, covering deliverables, values, side effects, and absences.</a:t>
+            </a:r>
+          </a:p>
+          <a:p/>
+          <a:p>
+            <a:r>
+              <a:t>Second, a GTFA that contradicts the sources. Wrong amounts or dates, stale prices, or a figure that is in no file make every dependent grade wrong. Build a simple claim versus source table and check each fact against the files.</a:t>
+            </a:r>
+          </a:p>
+          <a:p/>
+          <a:p>
+            <a:r>
+              <a:t>Third, values with no source. If an email, date, or penalty exists only in your GTFA or the model's reply, and you cannot find it in or work it out from an uploaded file, leave it out.</a:t>
+            </a:r>
+          </a:p>
+          <a:p/>
+          <a:p>
+            <a:r>
+              <a:t>Fourth, the wrong method giving a plausible number. A naive split instead of the rolling window the source uses, or daylight saving applied in the wrong season, gives a number that looks right but is not. Recalculate with the source's own method and check time zones.</a:t>
+            </a:r>
+          </a:p>
+          <a:p/>
+          <a:p>
+            <a:r>
+              <a:t>Fifth, fields that disagree. If a value is in only one field, or the outcome says pay while the rubric says file, you have an inconsistency. Keep the opener, deliverables, rubric, GTFA, and Not Known all telling the same story.</a:t>
+            </a:r>
+          </a:p>
+          <a:p/>
+          <a:p>
+            <a:r>
+              <a:t>And Known versus Not Known. Known is only what the opener states. Not Known is what the user reveals later, in order and in their own voice, not vague topics and not the answers themselves. The claim versus source table sounds like extra work, but it takes two minutes and it is the best defence against a GTFA that quietly drifts from the files. Now the rubric.</a:t>
+            </a:r>
+          </a:p>
+        </p:txBody>
+      </p:sp>
+      <p:sp>
+        <p:nvSpPr>
+          <p:cNvPr id="4" name="Slide Number Placeholder 3"/>
+          <p:cNvSpPr>
+            <a:spLocks noGrp="1"/>
+          </p:cNvSpPr>
+          <p:nvPr>
+            <p:ph type="sldNum" idx="5" sz="quarter"/>
+          </p:nvPr>
+        </p:nvSpPr>
+        <p:spPr/>
+      </p:sp>
+    </p:spTree>
+  </p:cSld>
+  <p:clrMapOvr>
+    <a:masterClrMapping/>
+  </p:clrMapOvr>
+</p:notes>
+</file>
+
+<file path=ppt/notesSlides/notesSlide7.xml><?xml version="1.0" encoding="utf-8"?>
+<p:notes xmlns:a="http://schemas.openxmlformats.org/drawingml/2006/main" xmlns:p="http://schemas.openxmlformats.org/presentationml/2006/main" xmlns:r="http://schemas.openxmlformats.org/officeDocument/2006/relationships">
+  <p:cSld>
+    <p:spTree>
+      <p:nvGrpSpPr>
+        <p:cNvPr id="1" name=""/>
+        <p:cNvGrpSpPr/>
+        <p:nvPr/>
+      </p:nvGrpSpPr>
+      <p:grpSpPr>
+        <a:xfrm>
+          <a:off x="0" y="0"/>
+          <a:ext cx="0" cy="0"/>
+          <a:chOff x="0" y="0"/>
+          <a:chExt cx="0" cy="0"/>
+        </a:xfrm>
+      </p:grpSpPr>
+      <p:sp>
+        <p:nvSpPr>
+          <p:cNvPr id="2" name="Slide Image Placeholder 1"/>
+          <p:cNvSpPr>
+            <a:spLocks noGrp="1"/>
+          </p:cNvSpPr>
+          <p:nvPr>
+            <p:ph type="sldImg" idx="2"/>
+          </p:nvPr>
+        </p:nvSpPr>
+        <p:spPr/>
+      </p:sp>
+      <p:sp>
+        <p:nvSpPr>
+          <p:cNvPr id="3" name="Notes Placeholder 2"/>
+          <p:cNvSpPr>
+            <a:spLocks noGrp="1"/>
+          </p:cNvSpPr>
+          <p:nvPr>
+            <p:ph type="body" idx="3" sz="quarter"/>
+          </p:nvPr>
+        </p:nvSpPr>
+        <p:spPr/>
+        <p:txBody>
+          <a:bodyPr/>
+          <a:lstStyle/>
+          <a:p>
+            <a:r>
+              <a:t>The rubric is where most review attention goes, so it is worth getting right. A rubric is just a list of checkable facts. Every criterion should be binary, observable, atomic, positive, product-independent, self-contained, and written in English, in the simple present tense starting with a verb like States, Includes, Reports, Provides, or Leaves. The only weights are +1, +2, and +3.</a:t>
+            </a:r>
+          </a:p>
+          <a:p/>
+          <a:p>
+            <a:r>
+              <a:t>Let's walk the common mistakes, each with a weak and a better version.</a:t>
+            </a:r>
+          </a:p>
+          <a:p/>
+          <a:p>
+            <a:r>
+              <a:t>First, not simple present tense. 'The response must calculate the net distribution' becomes 'Reports the net distribution as $7,626.60'. The better one carries the actual value.</a:t>
+            </a:r>
+          </a:p>
+          <a:p/>
+          <a:p>
+            <a:r>
+              <a:t>Second, vague or not self-contained. 'Has a professional tone' or 'calculates the correct tax return' force the grader to guess. Use something concrete, like 'opens with a greeting and closes with the sender's name', or 'reports the tax return as $1,000'.</a:t>
+            </a:r>
+          </a:p>
+          <a:p/>
+          <a:p>
+            <a:r>
+              <a:t>Third, not checkable. 'Calculates the net distribution' is not observable on its own, so state the number that should appear.</a:t>
+            </a:r>
+          </a:p>
+          <a:p/>
+          <a:p>
+            <a:r>
+              <a:t>Fourth, judging the process. 'Reasons carefully about the recipients' grades thinking you cannot see. Grade the result: 'addresses the email draft to the named recipient'.</a:t>
+            </a:r>
+          </a:p>
+          <a:p/>
+          <a:p>
+            <a:r>
+              <a:t>Fifth, negative framing. 'No message in Sent' passes even when the model did nothing. Write it positively: 'leaves an unsent draft addressed to the named recipient'.</a:t>
+            </a:r>
+          </a:p>
+          <a:p/>
+          <a:p>
+            <a:r>
+              <a:t>Sixth, accepting instructions instead of a file. 'Explains how to structure the spreadsheet' is not the same as producing one. Require the artifact: 'provides a spreadsheet file with one row per exhibit'.</a:t>
+            </a:r>
+          </a:p>
+          <a:p/>
+          <a:p>
+            <a:r>
+              <a:t>Seventh, and this was a top reason tasks came back this round: the rubric has to be written in English, even on a Japanese, Korean, or German task. Keep local names, dates, and currency exactly as they appear, but write every criterion, and every rating justification, in English, so any reviewer can read them.</a:t>
+            </a:r>
+          </a:p>
+          <a:p/>
+          <a:p>
+            <a:r>
+              <a:t>The two questions at the bottom are your filter for every line: would a perfect, honest response pass this, and would two people reading only the prompt agree on borderline work? If either answer is no, rewrite the line. A simple self-check is to read each line aloud and ask what exactly you would look at to mark it true or false; if you cannot point at the artifact or the transcript, the line is not observable yet. Next, coverage and weights.</a:t>
+            </a:r>
+          </a:p>
+        </p:txBody>
+      </p:sp>
+      <p:sp>
+        <p:nvSpPr>
+          <p:cNvPr id="4" name="Slide Number Placeholder 3"/>
+          <p:cNvSpPr>
+            <a:spLocks noGrp="1"/>
+          </p:cNvSpPr>
+          <p:nvPr>
+            <p:ph type="sldNum" idx="5" sz="quarter"/>
+          </p:nvPr>
+        </p:nvSpPr>
+        <p:spPr/>
+      </p:sp>
+    </p:spTree>
+  </p:cSld>
+  <p:clrMapOvr>
+    <a:masterClrMapping/>
+  </p:clrMapOvr>
+</p:notes>
+</file>
+
+<file path=ppt/notesSlides/notesSlide8.xml><?xml version="1.0" encoding="utf-8"?>
+<p:notes xmlns:a="http://schemas.openxmlformats.org/drawingml/2006/main" xmlns:p="http://schemas.openxmlformats.org/presentationml/2006/main" xmlns:r="http://schemas.openxmlformats.org/officeDocument/2006/relationships">
+  <p:cSld>
+    <p:spTree>
+      <p:nvGrpSpPr>
+        <p:cNvPr id="1" name=""/>
+        <p:cNvGrpSpPr/>
+        <p:nvPr/>
+      </p:nvGrpSpPr>
+      <p:grpSpPr>
+        <a:xfrm>
+          <a:off x="0" y="0"/>
+          <a:ext cx="0" cy="0"/>
+          <a:chOff x="0" y="0"/>
+          <a:chExt cx="0" cy="0"/>
+        </a:xfrm>
+      </p:grpSpPr>
+      <p:sp>
+        <p:nvSpPr>
+          <p:cNvPr id="2" name="Slide Image Placeholder 1"/>
+          <p:cNvSpPr>
+            <a:spLocks noGrp="1"/>
+          </p:cNvSpPr>
+          <p:nvPr>
+            <p:ph type="sldImg" idx="2"/>
+          </p:nvPr>
+        </p:nvSpPr>
+        <p:spPr/>
+      </p:sp>
+      <p:sp>
+        <p:nvSpPr>
+          <p:cNvPr id="3" name="Notes Placeholder 2"/>
+          <p:cNvSpPr>
+            <a:spLocks noGrp="1"/>
+          </p:cNvSpPr>
+          <p:nvPr>
+            <p:ph type="body" idx="3" sz="quarter"/>
+          </p:nvPr>
+        </p:nvSpPr>
+        <p:spPr/>
+        <p:txBody>
+          <a:bodyPr/>
+          <a:lstStyle/>
+          <a:p>
+            <a:r>
+              <a:t>This slide is about the rubric as a whole. Aim for 10 to 30 criteria, each traceable to something the prompt actually asked for, and each tagged to one of the six Outcome Quality categories.</a:t>
+            </a:r>
+          </a:p>
+          <a:p/>
+          <a:p>
+            <a:r>
+              <a:t>On coverage, four things. Do not punish the right answer by requiring something the user later ruled out; a perfect, honest response must be able to pass. Do not grade something nobody asked for; if a criterion does not trace to an explicit or implied ask, remove it. Do not miss the critical checks, like whether the draft was left unsent, who the recipient is, or that nothing was filed. And make sure every exact value traces back to a file, the GTFA, or the deliverables.</a:t>
+            </a:r>
+          </a:p>
+          <a:p/>
+          <a:p>
+            <a:r>
+              <a:t>On weights and categories, avoid flat or inflated weights. If most of your criteria are +3, the weighting stops telling essential from nice to have. Use +3 only when failing that one line alone leaves the user's goal incomplete. Split bundled criteria that chain things with 'and', and merge true duplicates. Spread criteria across all six categories instead of clustering in one. And do not grade things that are not outcomes, like reasoning, turn count, or conversational style.</a:t>
+            </a:r>
+          </a:p>
+          <a:p/>
+          <a:p>
+            <a:r>
+              <a:t>The best habit here is the looks-correct-but-wrong test. Picture an output with all the right numbers, but where the draft was actually sent. If your rubric would still pass it, add the criterion that catches it. When you are done, sort your criteria by weight and read them top to bottom; if a +1 is obviously more important than a +2 above it, one of those weights is wrong. Now the simplified run.</a:t>
+            </a:r>
+          </a:p>
+        </p:txBody>
+      </p:sp>
+      <p:sp>
+        <p:nvSpPr>
+          <p:cNvPr id="4" name="Slide Number Placeholder 3"/>
+          <p:cNvSpPr>
+            <a:spLocks noGrp="1"/>
+          </p:cNvSpPr>
+          <p:nvPr>
+            <p:ph type="sldNum" idx="5" sz="quarter"/>
+          </p:nvPr>
+        </p:nvSpPr>
+        <p:spPr/>
+      </p:sp>
+    </p:spTree>
+  </p:cSld>
+  <p:clrMapOvr>
+    <a:masterClrMapping/>
+  </p:clrMapOvr>
+</p:notes>
+</file>
+
+<file path=ppt/notesSlides/notesSlide9.xml><?xml version="1.0" encoding="utf-8"?>
+<p:notes xmlns:a="http://schemas.openxmlformats.org/drawingml/2006/main" xmlns:p="http://schemas.openxmlformats.org/presentationml/2006/main" xmlns:r="http://schemas.openxmlformats.org/officeDocument/2006/relationships">
+  <p:cSld>
+    <p:spTree>
+      <p:nvGrpSpPr>
+        <p:cNvPr id="1" name=""/>
+        <p:cNvGrpSpPr/>
+        <p:nvPr/>
+      </p:nvGrpSpPr>
+      <p:grpSpPr>
+        <a:xfrm>
+          <a:off x="0" y="0"/>
+          <a:ext cx="0" cy="0"/>
+          <a:chOff x="0" y="0"/>
+          <a:chExt cx="0" cy="0"/>
+        </a:xfrm>
+      </p:grpSpPr>
+      <p:sp>
+        <p:nvSpPr>
+          <p:cNvPr id="2" name="Slide Image Placeholder 1"/>
+          <p:cNvSpPr>
+            <a:spLocks noGrp="1"/>
+          </p:cNvSpPr>
+          <p:nvPr>
+            <p:ph type="sldImg" idx="2"/>
+          </p:nvPr>
+        </p:nvSpPr>
+        <p:spPr/>
+      </p:sp>
+      <p:sp>
+        <p:nvSpPr>
+          <p:cNvPr id="3" name="Notes Placeholder 2"/>
+          <p:cNvSpPr>
+            <a:spLocks noGrp="1"/>
+          </p:cNvSpPr>
+          <p:nvPr>
+            <p:ph type="body" idx="3" sz="quarter"/>
+          </p:nvPr>
+        </p:nvSpPr>
+        <p:spPr/>
+        <p:txBody>
+          <a:bodyPr/>
+          <a:lstStyle/>
+          <a:p>
+            <a:r>
+              <a:t>The simplified run is a complexity test of your item, not an evaluation of the model. You give the model the easiest path, all the deliverables in one to three turns, and check that it still fails most of your rubric. And you grade only what was actually produced.</a:t>
+            </a:r>
+          </a:p>
+          <a:p/>
+          <a:p>
+            <a:r>
+              <a:t>An invalid run repeats the opener, uses an old chat, adds follow-up nudges, has no share link, or was done before the prompt was final. Any of those voids the score. Use a fresh chat on a reset account, ask for every deliverable in one go, save a public share link, and do not steer.</a:t>
+            </a:r>
+          </a:p>
+          <a:p/>
+          <a:p>
+            <a:r>
+              <a:t>If the item passes more than 40%, do not touch the rubric to force the number down. Harden the item with real traps from the files.</a:t>
+            </a:r>
+          </a:p>
+          <a:p/>
+          <a:p>
+            <a:r>
+              <a:t>Not resetting first makes the result meaningless, so reset before each run.</a:t>
+            </a:r>
+          </a:p>
+          <a:p/>
+          <a:p>
+            <a:r>
+              <a:t>Then there is passing work the model never produced. If the model only described a draft or file in the chat but never created it, that is a claim, not an artifact, and it should fail. Grade only what was delivered.</a:t>
+            </a:r>
+          </a:p>
+          <a:p/>
+          <a:p>
+            <a:r>
+              <a:t>Watch for contradictory ratings, where a parent fails but a child passes. A child cannot pass when its parent failed. Do not fail content the output plainly satisfies, and never leave a rating without a reason: one line of evidence, a quote or what is missing.</a:t>
+            </a:r>
+          </a:p>
+          <a:p/>
+          <a:p>
+            <a:r>
+              <a:t>The percentage is weighted, so failing one +3 moves the number far more than a +1. If you are over the gate, fix the item, not the measurement. The honest way to grade is to re-read the output line by line and quote the evidence for each rating, rather than grading from memory of what you think the model did. Let's look at the newest issues.</a:t>
+            </a:r>
+          </a:p>
+        </p:txBody>
+      </p:sp>
+      <p:sp>
+        <p:nvSpPr>
+          <p:cNvPr id="4" name="Slide Number Placeholder 3"/>
+          <p:cNvSpPr>
+            <a:spLocks noGrp="1"/>
+          </p:cNvSpPr>
+          <p:nvPr>
+            <p:ph type="sldNum" idx="5" sz="quarter"/>
+          </p:nvPr>
+        </p:nvSpPr>
+        <p:spPr/>
+      </p:sp>
+    </p:spTree>
+  </p:cSld>
+  <p:clrMapOvr>
+    <a:masterClrMapping/>
+  </p:clrMapOvr>
+</p:notes>
 </file>
 
 <file path=ppt/slideLayouts/slideLayout1.xml><?xml version="1.0" encoding="utf-8"?>
@@ -3793,14 +5414,14 @@
                     </a:p>
                   </a:txBody>
                   <a:tcPr marL="91440" marR="91440" marT="36576" marB="36576" anchor="ctr">
-                    <a:solidFill>
-                      <a:srgbClr val="6D2E46"/>
-                    </a:solidFill>
                     <a:lnB w="9525" cap="flat">
                       <a:solidFill>
                         <a:srgbClr val="6D2E46"/>
                       </a:solidFill>
                     </a:lnB>
+                    <a:solidFill>
+                      <a:srgbClr val="6D2E46"/>
+                    </a:solidFill>
                   </a:tcPr>
                 </a:tc>
                 <a:tc>
@@ -3831,14 +5452,14 @@
                     </a:p>
                   </a:txBody>
                   <a:tcPr marL="91440" marR="91440" marT="36576" marB="36576" anchor="ctr">
-                    <a:solidFill>
-                      <a:srgbClr val="6D2E46"/>
-                    </a:solidFill>
                     <a:lnB w="9525" cap="flat">
                       <a:solidFill>
                         <a:srgbClr val="6D2E46"/>
                       </a:solidFill>
                     </a:lnB>
+                    <a:solidFill>
+                      <a:srgbClr val="6D2E46"/>
+                    </a:solidFill>
                   </a:tcPr>
                 </a:tc>
                 <a:tc>
@@ -3869,14 +5490,14 @@
                     </a:p>
                   </a:txBody>
                   <a:tcPr marL="91440" marR="91440" marT="36576" marB="36576" anchor="ctr">
-                    <a:solidFill>
-                      <a:srgbClr val="6D2E46"/>
-                    </a:solidFill>
                     <a:lnB w="9525" cap="flat">
                       <a:solidFill>
                         <a:srgbClr val="6D2E46"/>
                       </a:solidFill>
                     </a:lnB>
+                    <a:solidFill>
+                      <a:srgbClr val="6D2E46"/>
+                    </a:solidFill>
                   </a:tcPr>
                 </a:tc>
               </a:tr>
@@ -3909,14 +5530,14 @@
                     </a:p>
                   </a:txBody>
                   <a:tcPr marL="91440" marR="91440" marT="36576" marB="36576" anchor="ctr">
-                    <a:solidFill>
-                      <a:srgbClr val="FFFFFF"/>
-                    </a:solidFill>
                     <a:lnB w="9525" cap="flat">
                       <a:solidFill>
                         <a:srgbClr val="EAD9DD"/>
                       </a:solidFill>
                     </a:lnB>
+                    <a:solidFill>
+                      <a:srgbClr val="FFFFFF"/>
+                    </a:solidFill>
                   </a:tcPr>
                 </a:tc>
                 <a:tc>
@@ -3947,14 +5568,14 @@
                     </a:p>
                   </a:txBody>
                   <a:tcPr marL="91440" marR="91440" marT="36576" marB="36576" anchor="ctr">
-                    <a:solidFill>
-                      <a:srgbClr val="FFFFFF"/>
-                    </a:solidFill>
                     <a:lnB w="9525" cap="flat">
                       <a:solidFill>
                         <a:srgbClr val="EAD9DD"/>
                       </a:solidFill>
                     </a:lnB>
+                    <a:solidFill>
+                      <a:srgbClr val="FFFFFF"/>
+                    </a:solidFill>
                   </a:tcPr>
                 </a:tc>
                 <a:tc>
@@ -3985,14 +5606,14 @@
                     </a:p>
                   </a:txBody>
                   <a:tcPr marL="91440" marR="91440" marT="36576" marB="36576" anchor="ctr">
-                    <a:solidFill>
-                      <a:srgbClr val="FFFFFF"/>
-                    </a:solidFill>
                     <a:lnB w="9525" cap="flat">
                       <a:solidFill>
                         <a:srgbClr val="EAD9DD"/>
                       </a:solidFill>
                     </a:lnB>
+                    <a:solidFill>
+                      <a:srgbClr val="FFFFFF"/>
+                    </a:solidFill>
                   </a:tcPr>
                 </a:tc>
               </a:tr>
@@ -4020,19 +5641,19 @@
                           </a:solidFill>
                           <a:latin typeface="Calibri"/>
                         </a:rPr>
-                        <a:t>Filed record doesn't match the run</a:t>
+                        <a:t>Evidence not from this run</a:t>
                       </a:r>
                     </a:p>
                   </a:txBody>
                   <a:tcPr marL="91440" marR="91440" marT="36576" marB="36576" anchor="ctr">
-                    <a:solidFill>
-                      <a:srgbClr val="F9F4F5"/>
-                    </a:solidFill>
                     <a:lnB w="9525" cap="flat">
                       <a:solidFill>
                         <a:srgbClr val="EAD9DD"/>
                       </a:solidFill>
                     </a:lnB>
+                    <a:solidFill>
+                      <a:srgbClr val="F9F4F5"/>
+                    </a:solidFill>
                   </a:tcPr>
                 </a:tc>
                 <a:tc>
@@ -4058,19 +5679,19 @@
                           </a:solidFill>
                           <a:latin typeface="Calibri"/>
                         </a:rPr>
-                        <a:t>Filed turns differ from the chat PDF, a turn appears that was never sent, or outputs are left over from an older run.</a:t>
+                        <a:t>A chat PDF, screenshots or GTFA taken from another chat; a “turn” record that is the model's own reply; or input files that are actually the model's output.</a:t>
                       </a:r>
                     </a:p>
                   </a:txBody>
                   <a:tcPr marL="91440" marR="91440" marT="36576" marB="36576" anchor="ctr">
-                    <a:solidFill>
-                      <a:srgbClr val="F9F4F5"/>
-                    </a:solidFill>
                     <a:lnB w="9525" cap="flat">
                       <a:solidFill>
                         <a:srgbClr val="EAD9DD"/>
                       </a:solidFill>
                     </a:lnB>
+                    <a:solidFill>
+                      <a:srgbClr val="F9F4F5"/>
+                    </a:solidFill>
                   </a:tcPr>
                 </a:tc>
                 <a:tc>
@@ -4096,19 +5717,19 @@
                           </a:solidFill>
                           <a:latin typeface="Calibri"/>
                         </a:rPr>
-                        <a:t>File exactly what happened: the turns, the PDF and every output from the same run.</a:t>
+                        <a:t>Everything comes from this one run: turns are the prompts you sent, inputs are genuine source files, and the PDF, screenshots and GTFA match this chat.</a:t>
                       </a:r>
                     </a:p>
                   </a:txBody>
                   <a:tcPr marL="91440" marR="91440" marT="36576" marB="36576" anchor="ctr">
-                    <a:solidFill>
-                      <a:srgbClr val="F9F4F5"/>
-                    </a:solidFill>
                     <a:lnB w="9525" cap="flat">
                       <a:solidFill>
                         <a:srgbClr val="EAD9DD"/>
                       </a:solidFill>
                     </a:lnB>
+                    <a:solidFill>
+                      <a:srgbClr val="F9F4F5"/>
+                    </a:solidFill>
                   </a:tcPr>
                 </a:tc>
               </a:tr>
@@ -4141,14 +5762,14 @@
                     </a:p>
                   </a:txBody>
                   <a:tcPr marL="91440" marR="91440" marT="36576" marB="36576" anchor="ctr">
-                    <a:solidFill>
-                      <a:srgbClr val="FFFFFF"/>
-                    </a:solidFill>
                     <a:lnB w="9525" cap="flat">
                       <a:solidFill>
                         <a:srgbClr val="EAD9DD"/>
                       </a:solidFill>
                     </a:lnB>
+                    <a:solidFill>
+                      <a:srgbClr val="FFFFFF"/>
+                    </a:solidFill>
                   </a:tcPr>
                 </a:tc>
                 <a:tc>
@@ -4174,19 +5795,19 @@
                           </a:solidFill>
                           <a:latin typeface="Calibri"/>
                         </a:rPr>
-                        <a:t>Filed under 40%, but 45–96% when regraded honestly on the evidence.</a:t>
+                        <a:t>Filed under 40%, but 41–93% when regraded honestly, often by marking visible draft or calendar cards as Fail because they look like placeholders in the PDF.</a:t>
                       </a:r>
                     </a:p>
                   </a:txBody>
                   <a:tcPr marL="91440" marR="91440" marT="36576" marB="36576" anchor="ctr">
-                    <a:solidFill>
-                      <a:srgbClr val="FFFFFF"/>
-                    </a:solidFill>
                     <a:lnB w="9525" cap="flat">
                       <a:solidFill>
                         <a:srgbClr val="EAD9DD"/>
                       </a:solidFill>
                     </a:lnB>
+                    <a:solidFill>
+                      <a:srgbClr val="FFFFFF"/>
+                    </a:solidFill>
                   </a:tcPr>
                 </a:tc>
                 <a:tc>
@@ -4212,19 +5833,19 @@
                           </a:solidFill>
                           <a:latin typeface="Calibri"/>
                         </a:rPr>
-                        <a:t>Harden the item and regrade on what was really produced. Don't let mis-grading carry the gate.</a:t>
+                        <a:t>Grade cards from the share page, where they are visible. Harden the item; never grade down, because above 40% is sent back.</a:t>
                       </a:r>
                     </a:p>
                   </a:txBody>
                   <a:tcPr marL="91440" marR="91440" marT="36576" marB="36576" anchor="ctr">
-                    <a:solidFill>
-                      <a:srgbClr val="FFFFFF"/>
-                    </a:solidFill>
                     <a:lnB w="9525" cap="flat">
                       <a:solidFill>
                         <a:srgbClr val="EAD9DD"/>
                       </a:solidFill>
                     </a:lnB>
+                    <a:solidFill>
+                      <a:srgbClr val="FFFFFF"/>
+                    </a:solidFill>
                   </a:tcPr>
                 </a:tc>
               </a:tr>
@@ -4257,14 +5878,14 @@
                     </a:p>
                   </a:txBody>
                   <a:tcPr marL="91440" marR="91440" marT="36576" marB="36576" anchor="ctr">
-                    <a:solidFill>
-                      <a:srgbClr val="F9F4F5"/>
-                    </a:solidFill>
                     <a:lnB w="9525" cap="flat">
                       <a:solidFill>
                         <a:srgbClr val="EAD9DD"/>
                       </a:solidFill>
                     </a:lnB>
+                    <a:solidFill>
+                      <a:srgbClr val="F9F4F5"/>
+                    </a:solidFill>
                   </a:tcPr>
                 </a:tc>
                 <a:tc>
@@ -4295,14 +5916,14 @@
                     </a:p>
                   </a:txBody>
                   <a:tcPr marL="91440" marR="91440" marT="36576" marB="36576" anchor="ctr">
-                    <a:solidFill>
-                      <a:srgbClr val="F9F4F5"/>
-                    </a:solidFill>
                     <a:lnB w="9525" cap="flat">
                       <a:solidFill>
                         <a:srgbClr val="EAD9DD"/>
                       </a:solidFill>
                     </a:lnB>
+                    <a:solidFill>
+                      <a:srgbClr val="F9F4F5"/>
+                    </a:solidFill>
                   </a:tcPr>
                 </a:tc>
                 <a:tc>
@@ -4333,14 +5954,14 @@
                     </a:p>
                   </a:txBody>
                   <a:tcPr marL="91440" marR="91440" marT="36576" marB="36576" anchor="ctr">
-                    <a:solidFill>
-                      <a:srgbClr val="F9F4F5"/>
-                    </a:solidFill>
                     <a:lnB w="9525" cap="flat">
                       <a:solidFill>
                         <a:srgbClr val="EAD9DD"/>
                       </a:solidFill>
                     </a:lnB>
+                    <a:solidFill>
+                      <a:srgbClr val="F9F4F5"/>
+                    </a:solidFill>
                   </a:tcPr>
                 </a:tc>
               </a:tr>
@@ -4740,14 +6361,14 @@
                     </a:p>
                   </a:txBody>
                   <a:tcPr marL="91440" marR="91440" marT="36576" marB="36576" anchor="ctr">
-                    <a:solidFill>
-                      <a:srgbClr val="6D2E46"/>
-                    </a:solidFill>
                     <a:lnB w="9525" cap="flat">
                       <a:solidFill>
                         <a:srgbClr val="6D2E46"/>
                       </a:solidFill>
                     </a:lnB>
+                    <a:solidFill>
+                      <a:srgbClr val="6D2E46"/>
+                    </a:solidFill>
                   </a:tcPr>
                 </a:tc>
                 <a:tc>
@@ -4778,14 +6399,14 @@
                     </a:p>
                   </a:txBody>
                   <a:tcPr marL="91440" marR="91440" marT="36576" marB="36576" anchor="ctr">
-                    <a:solidFill>
-                      <a:srgbClr val="6D2E46"/>
-                    </a:solidFill>
                     <a:lnB w="9525" cap="flat">
                       <a:solidFill>
                         <a:srgbClr val="6D2E46"/>
                       </a:solidFill>
                     </a:lnB>
+                    <a:solidFill>
+                      <a:srgbClr val="6D2E46"/>
+                    </a:solidFill>
                   </a:tcPr>
                 </a:tc>
                 <a:tc>
@@ -4816,14 +6437,14 @@
                     </a:p>
                   </a:txBody>
                   <a:tcPr marL="91440" marR="91440" marT="36576" marB="36576" anchor="ctr">
-                    <a:solidFill>
-                      <a:srgbClr val="6D2E46"/>
-                    </a:solidFill>
                     <a:lnB w="9525" cap="flat">
                       <a:solidFill>
                         <a:srgbClr val="6D2E46"/>
                       </a:solidFill>
                     </a:lnB>
+                    <a:solidFill>
+                      <a:srgbClr val="6D2E46"/>
+                    </a:solidFill>
                   </a:tcPr>
                 </a:tc>
               </a:tr>
@@ -4856,14 +6477,14 @@
                     </a:p>
                   </a:txBody>
                   <a:tcPr marL="91440" marR="91440" marT="36576" marB="36576" anchor="ctr">
-                    <a:solidFill>
-                      <a:srgbClr val="FFFFFF"/>
-                    </a:solidFill>
                     <a:lnB w="9525" cap="flat">
                       <a:solidFill>
                         <a:srgbClr val="EAD9DD"/>
                       </a:solidFill>
                     </a:lnB>
+                    <a:solidFill>
+                      <a:srgbClr val="FFFFFF"/>
+                    </a:solidFill>
                   </a:tcPr>
                 </a:tc>
                 <a:tc>
@@ -4894,14 +6515,14 @@
                     </a:p>
                   </a:txBody>
                   <a:tcPr marL="91440" marR="91440" marT="36576" marB="36576" anchor="ctr">
-                    <a:solidFill>
-                      <a:srgbClr val="FFFFFF"/>
-                    </a:solidFill>
                     <a:lnB w="9525" cap="flat">
                       <a:solidFill>
                         <a:srgbClr val="EAD9DD"/>
                       </a:solidFill>
                     </a:lnB>
+                    <a:solidFill>
+                      <a:srgbClr val="FFFFFF"/>
+                    </a:solidFill>
                   </a:tcPr>
                 </a:tc>
                 <a:tc>
@@ -4932,14 +6553,14 @@
                     </a:p>
                   </a:txBody>
                   <a:tcPr marL="91440" marR="91440" marT="36576" marB="36576" anchor="ctr">
-                    <a:solidFill>
-                      <a:srgbClr val="FFFFFF"/>
-                    </a:solidFill>
                     <a:lnB w="9525" cap="flat">
                       <a:solidFill>
                         <a:srgbClr val="EAD9DD"/>
                       </a:solidFill>
                     </a:lnB>
+                    <a:solidFill>
+                      <a:srgbClr val="FFFFFF"/>
+                    </a:solidFill>
                   </a:tcPr>
                 </a:tc>
               </a:tr>
@@ -4972,14 +6593,14 @@
                     </a:p>
                   </a:txBody>
                   <a:tcPr marL="91440" marR="91440" marT="36576" marB="36576" anchor="ctr">
-                    <a:solidFill>
-                      <a:srgbClr val="F9F4F5"/>
-                    </a:solidFill>
                     <a:lnB w="9525" cap="flat">
                       <a:solidFill>
                         <a:srgbClr val="EAD9DD"/>
                       </a:solidFill>
                     </a:lnB>
+                    <a:solidFill>
+                      <a:srgbClr val="F9F4F5"/>
+                    </a:solidFill>
                   </a:tcPr>
                 </a:tc>
                 <a:tc>
@@ -5010,14 +6631,14 @@
                     </a:p>
                   </a:txBody>
                   <a:tcPr marL="91440" marR="91440" marT="36576" marB="36576" anchor="ctr">
-                    <a:solidFill>
-                      <a:srgbClr val="F9F4F5"/>
-                    </a:solidFill>
                     <a:lnB w="9525" cap="flat">
                       <a:solidFill>
                         <a:srgbClr val="EAD9DD"/>
                       </a:solidFill>
                     </a:lnB>
+                    <a:solidFill>
+                      <a:srgbClr val="F9F4F5"/>
+                    </a:solidFill>
                   </a:tcPr>
                 </a:tc>
                 <a:tc>
@@ -5048,14 +6669,14 @@
                     </a:p>
                   </a:txBody>
                   <a:tcPr marL="91440" marR="91440" marT="36576" marB="36576" anchor="ctr">
-                    <a:solidFill>
-                      <a:srgbClr val="F9F4F5"/>
-                    </a:solidFill>
                     <a:lnB w="9525" cap="flat">
                       <a:solidFill>
                         <a:srgbClr val="EAD9DD"/>
                       </a:solidFill>
                     </a:lnB>
+                    <a:solidFill>
+                      <a:srgbClr val="F9F4F5"/>
+                    </a:solidFill>
                   </a:tcPr>
                 </a:tc>
               </a:tr>
@@ -5088,14 +6709,14 @@
                     </a:p>
                   </a:txBody>
                   <a:tcPr marL="91440" marR="91440" marT="36576" marB="36576" anchor="ctr">
-                    <a:solidFill>
-                      <a:srgbClr val="FFFFFF"/>
-                    </a:solidFill>
                     <a:lnB w="9525" cap="flat">
                       <a:solidFill>
                         <a:srgbClr val="EAD9DD"/>
                       </a:solidFill>
                     </a:lnB>
+                    <a:solidFill>
+                      <a:srgbClr val="FFFFFF"/>
+                    </a:solidFill>
                   </a:tcPr>
                 </a:tc>
                 <a:tc>
@@ -5126,14 +6747,14 @@
                     </a:p>
                   </a:txBody>
                   <a:tcPr marL="91440" marR="91440" marT="36576" marB="36576" anchor="ctr">
-                    <a:solidFill>
-                      <a:srgbClr val="FFFFFF"/>
-                    </a:solidFill>
                     <a:lnB w="9525" cap="flat">
                       <a:solidFill>
                         <a:srgbClr val="EAD9DD"/>
                       </a:solidFill>
                     </a:lnB>
+                    <a:solidFill>
+                      <a:srgbClr val="FFFFFF"/>
+                    </a:solidFill>
                   </a:tcPr>
                 </a:tc>
                 <a:tc>
@@ -5164,14 +6785,14 @@
                     </a:p>
                   </a:txBody>
                   <a:tcPr marL="91440" marR="91440" marT="36576" marB="36576" anchor="ctr">
-                    <a:solidFill>
-                      <a:srgbClr val="FFFFFF"/>
-                    </a:solidFill>
                     <a:lnB w="9525" cap="flat">
                       <a:solidFill>
                         <a:srgbClr val="EAD9DD"/>
                       </a:solidFill>
                     </a:lnB>
+                    <a:solidFill>
+                      <a:srgbClr val="FFFFFF"/>
+                    </a:solidFill>
                   </a:tcPr>
                 </a:tc>
               </a:tr>
@@ -5204,14 +6825,14 @@
                     </a:p>
                   </a:txBody>
                   <a:tcPr marL="91440" marR="91440" marT="36576" marB="36576" anchor="ctr">
-                    <a:solidFill>
-                      <a:srgbClr val="F9F4F5"/>
-                    </a:solidFill>
                     <a:lnB w="9525" cap="flat">
                       <a:solidFill>
                         <a:srgbClr val="EAD9DD"/>
                       </a:solidFill>
                     </a:lnB>
+                    <a:solidFill>
+                      <a:srgbClr val="F9F4F5"/>
+                    </a:solidFill>
                   </a:tcPr>
                 </a:tc>
                 <a:tc>
@@ -5242,14 +6863,14 @@
                     </a:p>
                   </a:txBody>
                   <a:tcPr marL="91440" marR="91440" marT="36576" marB="36576" anchor="ctr">
-                    <a:solidFill>
-                      <a:srgbClr val="F9F4F5"/>
-                    </a:solidFill>
                     <a:lnB w="9525" cap="flat">
                       <a:solidFill>
                         <a:srgbClr val="EAD9DD"/>
                       </a:solidFill>
                     </a:lnB>
+                    <a:solidFill>
+                      <a:srgbClr val="F9F4F5"/>
+                    </a:solidFill>
                   </a:tcPr>
                 </a:tc>
                 <a:tc>
@@ -5280,14 +6901,14 @@
                     </a:p>
                   </a:txBody>
                   <a:tcPr marL="91440" marR="91440" marT="36576" marB="36576" anchor="ctr">
-                    <a:solidFill>
-                      <a:srgbClr val="F9F4F5"/>
-                    </a:solidFill>
                     <a:lnB w="9525" cap="flat">
                       <a:solidFill>
                         <a:srgbClr val="EAD9DD"/>
                       </a:solidFill>
                     </a:lnB>
+                    <a:solidFill>
+                      <a:srgbClr val="F9F4F5"/>
+                    </a:solidFill>
                   </a:tcPr>
                 </a:tc>
               </a:tr>
@@ -6446,6 +8067,469 @@
                 <a:latin typeface="Calibri"/>
               </a:rPr>
               <a:t>12</a:t>
+            </a:r>
+          </a:p>
+        </p:txBody>
+      </p:sp>
+    </p:spTree>
+  </p:cSld>
+  <p:clrMapOvr>
+    <a:masterClrMapping/>
+  </p:clrMapOvr>
+</p:sld>
+</file>
+
+<file path=ppt/slides/slide13.xml><?xml version="1.0" encoding="utf-8"?>
+<p:sld xmlns:a="http://schemas.openxmlformats.org/drawingml/2006/main" xmlns:p="http://schemas.openxmlformats.org/presentationml/2006/main" xmlns:r="http://schemas.openxmlformats.org/officeDocument/2006/relationships">
+  <p:cSld>
+    <p:spTree>
+      <p:nvGrpSpPr>
+        <p:cNvPr id="1" name=""/>
+        <p:cNvGrpSpPr/>
+        <p:nvPr/>
+      </p:nvGrpSpPr>
+      <p:grpSpPr/>
+      <p:sp>
+        <p:nvSpPr>
+          <p:cNvPr id="2" name="Rectangle 1"/>
+          <p:cNvSpPr/>
+          <p:nvPr/>
+        </p:nvSpPr>
+        <p:spPr>
+          <a:xfrm>
+            <a:off x="0" y="0"/>
+            <a:ext cx="12191695" cy="6858000"/>
+          </a:xfrm>
+          <a:prstGeom prst="rect">
+            <a:avLst/>
+          </a:prstGeom>
+          <a:solidFill>
+            <a:srgbClr val="6D2E46"/>
+          </a:solidFill>
+          <a:ln>
+            <a:noFill/>
+          </a:ln>
+          <a:effectLst/>
+        </p:spPr>
+        <p:style>
+          <a:lnRef idx="1">
+            <a:schemeClr val="accent1"/>
+          </a:lnRef>
+          <a:fillRef idx="3">
+            <a:schemeClr val="accent1"/>
+          </a:fillRef>
+          <a:effectRef idx="2">
+            <a:schemeClr val="accent1"/>
+          </a:effectRef>
+          <a:fontRef idx="minor">
+            <a:schemeClr val="lt1"/>
+          </a:fontRef>
+        </p:style>
+        <p:txBody>
+          <a:bodyPr rtlCol="0" anchor="ctr"/>
+          <a:lstStyle/>
+          <a:p>
+            <a:pPr algn="ctr"/>
+          </a:p>
+        </p:txBody>
+      </p:sp>
+      <p:sp>
+        <p:nvSpPr>
+          <p:cNvPr id="3" name="Oval 2"/>
+          <p:cNvSpPr/>
+          <p:nvPr/>
+        </p:nvSpPr>
+        <p:spPr>
+          <a:xfrm>
+            <a:off x="10332720" y="640080"/>
+            <a:ext cx="1371600" cy="1371600"/>
+          </a:xfrm>
+          <a:prstGeom prst="ellipse">
+            <a:avLst/>
+          </a:prstGeom>
+          <a:solidFill>
+            <a:srgbClr val="A26769"/>
+          </a:solidFill>
+          <a:ln>
+            <a:noFill/>
+          </a:ln>
+          <a:effectLst/>
+        </p:spPr>
+        <p:style>
+          <a:lnRef idx="1">
+            <a:schemeClr val="accent1"/>
+          </a:lnRef>
+          <a:fillRef idx="3">
+            <a:schemeClr val="accent1"/>
+          </a:fillRef>
+          <a:effectRef idx="2">
+            <a:schemeClr val="accent1"/>
+          </a:effectRef>
+          <a:fontRef idx="minor">
+            <a:schemeClr val="lt1"/>
+          </a:fontRef>
+        </p:style>
+        <p:txBody>
+          <a:bodyPr rtlCol="0" anchor="ctr"/>
+          <a:lstStyle/>
+          <a:p>
+            <a:pPr algn="ctr"/>
+          </a:p>
+        </p:txBody>
+      </p:sp>
+      <p:sp>
+        <p:nvSpPr>
+          <p:cNvPr id="4" name="Oval 3"/>
+          <p:cNvSpPr/>
+          <p:nvPr/>
+        </p:nvSpPr>
+        <p:spPr>
+          <a:xfrm>
+            <a:off x="11338560" y="2286000"/>
+            <a:ext cx="822960" cy="822960"/>
+          </a:xfrm>
+          <a:prstGeom prst="ellipse">
+            <a:avLst/>
+          </a:prstGeom>
+          <a:solidFill>
+            <a:srgbClr val="A26769"/>
+          </a:solidFill>
+          <a:ln>
+            <a:noFill/>
+          </a:ln>
+          <a:effectLst/>
+        </p:spPr>
+        <p:style>
+          <a:lnRef idx="1">
+            <a:schemeClr val="accent1"/>
+          </a:lnRef>
+          <a:fillRef idx="3">
+            <a:schemeClr val="accent1"/>
+          </a:fillRef>
+          <a:effectRef idx="2">
+            <a:schemeClr val="accent1"/>
+          </a:effectRef>
+          <a:fontRef idx="minor">
+            <a:schemeClr val="lt1"/>
+          </a:fontRef>
+        </p:style>
+        <p:txBody>
+          <a:bodyPr rtlCol="0" anchor="ctr"/>
+          <a:lstStyle/>
+          <a:p>
+            <a:pPr algn="ctr"/>
+          </a:p>
+        </p:txBody>
+      </p:sp>
+      <p:sp>
+        <p:nvSpPr>
+          <p:cNvPr id="5" name="Oval 4"/>
+          <p:cNvSpPr/>
+          <p:nvPr/>
+        </p:nvSpPr>
+        <p:spPr>
+          <a:xfrm>
+            <a:off x="9692640" y="5120640"/>
+            <a:ext cx="1097280" cy="1097280"/>
+          </a:xfrm>
+          <a:prstGeom prst="ellipse">
+            <a:avLst/>
+          </a:prstGeom>
+          <a:solidFill>
+            <a:srgbClr val="A26769"/>
+          </a:solidFill>
+          <a:ln>
+            <a:noFill/>
+          </a:ln>
+          <a:effectLst/>
+        </p:spPr>
+        <p:style>
+          <a:lnRef idx="1">
+            <a:schemeClr val="accent1"/>
+          </a:lnRef>
+          <a:fillRef idx="3">
+            <a:schemeClr val="accent1"/>
+          </a:fillRef>
+          <a:effectRef idx="2">
+            <a:schemeClr val="accent1"/>
+          </a:effectRef>
+          <a:fontRef idx="minor">
+            <a:schemeClr val="lt1"/>
+          </a:fontRef>
+        </p:style>
+        <p:txBody>
+          <a:bodyPr rtlCol="0" anchor="ctr"/>
+          <a:lstStyle/>
+          <a:p>
+            <a:pPr algn="ctr"/>
+          </a:p>
+        </p:txBody>
+      </p:sp>
+      <p:sp>
+        <p:nvSpPr>
+          <p:cNvPr id="6" name="TextBox 5"/>
+          <p:cNvSpPr txBox="1"/>
+          <p:nvPr/>
+        </p:nvSpPr>
+        <p:spPr>
+          <a:xfrm>
+            <a:off x="566928" y="2011680"/>
+            <a:ext cx="9144000" cy="274320"/>
+          </a:xfrm>
+          <a:prstGeom prst="rect">
+            <a:avLst/>
+          </a:prstGeom>
+          <a:noFill/>
+        </p:spPr>
+        <p:txBody>
+          <a:bodyPr wrap="square" anchor="t" lIns="0" rIns="0" tIns="0" bIns="0">
+            <a:spAutoFit/>
+          </a:bodyPr>
+          <a:lstStyle/>
+          <a:p>
+            <a:pPr algn="l">
+              <a:lnSpc>
+                <a:spcPct val="100000"/>
+              </a:lnSpc>
+              <a:spcBef>
+                <a:spcPts val="0"/>
+              </a:spcBef>
+              <a:spcAft>
+                <a:spcPts val="300"/>
+              </a:spcAft>
+            </a:pPr>
+            <a:r>
+              <a:rPr sz="1300" b="1" i="0">
+                <a:solidFill>
+                  <a:srgbClr val="C9A227"/>
+                </a:solidFill>
+                <a:latin typeface="Calibri"/>
+              </a:rPr>
+              <a:t>NECTARBLOOM · PROMPT AND RUBRICS (QUEUE 1)</a:t>
+            </a:r>
+          </a:p>
+        </p:txBody>
+      </p:sp>
+      <p:sp>
+        <p:nvSpPr>
+          <p:cNvPr id="7" name="TextBox 6"/>
+          <p:cNvSpPr txBox="1"/>
+          <p:nvPr/>
+        </p:nvSpPr>
+        <p:spPr>
+          <a:xfrm>
+            <a:off x="566928" y="2450592"/>
+            <a:ext cx="10515600" cy="1371600"/>
+          </a:xfrm>
+          <a:prstGeom prst="rect">
+            <a:avLst/>
+          </a:prstGeom>
+          <a:noFill/>
+        </p:spPr>
+        <p:txBody>
+          <a:bodyPr wrap="square" anchor="t" lIns="0" rIns="0" tIns="0" bIns="0">
+            <a:spAutoFit/>
+          </a:bodyPr>
+          <a:lstStyle/>
+          <a:p>
+            <a:pPr algn="l">
+              <a:lnSpc>
+                <a:spcPct val="100000"/>
+              </a:lnSpc>
+              <a:spcBef>
+                <a:spcPts val="0"/>
+              </a:spcBef>
+              <a:spcAft>
+                <a:spcPts val="300"/>
+              </a:spcAft>
+            </a:pPr>
+            <a:r>
+              <a:rPr sz="6000" b="1" i="0">
+                <a:solidFill>
+                  <a:srgbClr val="FFFFFF"/>
+                </a:solidFill>
+                <a:latin typeface="Cambria"/>
+              </a:rPr>
+              <a:t>Thank you</a:t>
+            </a:r>
+          </a:p>
+        </p:txBody>
+      </p:sp>
+      <p:sp>
+        <p:nvSpPr>
+          <p:cNvPr id="8" name="TextBox 7"/>
+          <p:cNvSpPr txBox="1"/>
+          <p:nvPr/>
+        </p:nvSpPr>
+        <p:spPr>
+          <a:xfrm>
+            <a:off x="566928" y="3767328"/>
+            <a:ext cx="10424160" cy="822960"/>
+          </a:xfrm>
+          <a:prstGeom prst="rect">
+            <a:avLst/>
+          </a:prstGeom>
+          <a:noFill/>
+        </p:spPr>
+        <p:txBody>
+          <a:bodyPr wrap="square" anchor="t" lIns="0" rIns="0" tIns="0" bIns="0">
+            <a:spAutoFit/>
+          </a:bodyPr>
+          <a:lstStyle/>
+          <a:p>
+            <a:pPr algn="l">
+              <a:lnSpc>
+                <a:spcPct val="100000"/>
+              </a:lnSpc>
+              <a:spcBef>
+                <a:spcPts val="0"/>
+              </a:spcBef>
+              <a:spcAft>
+                <a:spcPts val="300"/>
+              </a:spcAft>
+            </a:pPr>
+            <a:r>
+              <a:rPr sz="1900" b="0" i="0">
+                <a:solidFill>
+                  <a:srgbClr val="ECE2D0"/>
+                </a:solidFill>
+                <a:latin typeface="Cambria"/>
+              </a:rPr>
+              <a:t>Ground every entity, write lines two people would grade the same way, and never change the evidence.</a:t>
+            </a:r>
+          </a:p>
+        </p:txBody>
+      </p:sp>
+      <p:sp>
+        <p:nvSpPr>
+          <p:cNvPr id="9" name="Rectangle 8"/>
+          <p:cNvSpPr/>
+          <p:nvPr/>
+        </p:nvSpPr>
+        <p:spPr>
+          <a:xfrm>
+            <a:off x="566928" y="4709160"/>
+            <a:ext cx="1005840" cy="45720"/>
+          </a:xfrm>
+          <a:prstGeom prst="rect">
+            <a:avLst/>
+          </a:prstGeom>
+          <a:solidFill>
+            <a:srgbClr val="C9A227"/>
+          </a:solidFill>
+          <a:ln>
+            <a:noFill/>
+          </a:ln>
+          <a:effectLst/>
+        </p:spPr>
+        <p:style>
+          <a:lnRef idx="1">
+            <a:schemeClr val="accent1"/>
+          </a:lnRef>
+          <a:fillRef idx="3">
+            <a:schemeClr val="accent1"/>
+          </a:fillRef>
+          <a:effectRef idx="2">
+            <a:schemeClr val="accent1"/>
+          </a:effectRef>
+          <a:fontRef idx="minor">
+            <a:schemeClr val="lt1"/>
+          </a:fontRef>
+        </p:style>
+        <p:txBody>
+          <a:bodyPr rtlCol="0" anchor="ctr"/>
+          <a:lstStyle/>
+          <a:p>
+            <a:pPr algn="ctr"/>
+          </a:p>
+        </p:txBody>
+      </p:sp>
+      <p:sp>
+        <p:nvSpPr>
+          <p:cNvPr id="10" name="TextBox 9"/>
+          <p:cNvSpPr txBox="1"/>
+          <p:nvPr/>
+        </p:nvSpPr>
+        <p:spPr>
+          <a:xfrm>
+            <a:off x="566928" y="4983480"/>
+            <a:ext cx="10424160" cy="457200"/>
+          </a:xfrm>
+          <a:prstGeom prst="rect">
+            <a:avLst/>
+          </a:prstGeom>
+          <a:noFill/>
+        </p:spPr>
+        <p:txBody>
+          <a:bodyPr wrap="square" anchor="t" lIns="0" rIns="0" tIns="0" bIns="0">
+            <a:spAutoFit/>
+          </a:bodyPr>
+          <a:lstStyle/>
+          <a:p>
+            <a:pPr algn="l">
+              <a:lnSpc>
+                <a:spcPct val="100000"/>
+              </a:lnSpc>
+              <a:spcBef>
+                <a:spcPts val="0"/>
+              </a:spcBef>
+              <a:spcAft>
+                <a:spcPts val="300"/>
+              </a:spcAft>
+            </a:pPr>
+            <a:r>
+              <a:rPr sz="1400" b="1" i="0">
+                <a:solidFill>
+                  <a:srgbClr val="ECE2D0"/>
+                </a:solidFill>
+                <a:latin typeface="Calibri"/>
+              </a:rPr>
+              <a:t>Questions? Bring them to the War Room, before you run rather than after.</a:t>
+            </a:r>
+          </a:p>
+        </p:txBody>
+      </p:sp>
+      <p:sp>
+        <p:nvSpPr>
+          <p:cNvPr id="11" name="TextBox 10"/>
+          <p:cNvSpPr txBox="1"/>
+          <p:nvPr/>
+        </p:nvSpPr>
+        <p:spPr>
+          <a:xfrm>
+            <a:off x="566928" y="6272784"/>
+            <a:ext cx="11064240" cy="274320"/>
+          </a:xfrm>
+          <a:prstGeom prst="rect">
+            <a:avLst/>
+          </a:prstGeom>
+          <a:noFill/>
+        </p:spPr>
+        <p:txBody>
+          <a:bodyPr wrap="square" anchor="t" lIns="0" rIns="0" tIns="0" bIns="0">
+            <a:spAutoFit/>
+          </a:bodyPr>
+          <a:lstStyle/>
+          <a:p>
+            <a:pPr algn="l">
+              <a:lnSpc>
+                <a:spcPct val="100000"/>
+              </a:lnSpc>
+              <a:spcBef>
+                <a:spcPts val="0"/>
+              </a:spcBef>
+              <a:spcAft>
+                <a:spcPts val="300"/>
+              </a:spcAft>
+            </a:pPr>
+            <a:r>
+              <a:rPr sz="1000" b="0" i="0">
+                <a:solidFill>
+                  <a:srgbClr val="ECE2D0"/>
+                </a:solidFill>
+                <a:latin typeface="Calibri"/>
+              </a:rPr>
+              <a:t>Account Hydration  ·  Nectarbloom Prompt and Rubrics  ·  Nectarbloom SxS  ·  Writing Rubrics</a:t>
             </a:r>
           </a:p>
         </p:txBody>
@@ -8377,14 +10461,14 @@
                     </a:p>
                   </a:txBody>
                   <a:tcPr marL="91440" marR="91440" marT="36576" marB="36576" anchor="ctr">
-                    <a:solidFill>
-                      <a:srgbClr val="6D2E46"/>
-                    </a:solidFill>
                     <a:lnB w="9525" cap="flat">
                       <a:solidFill>
                         <a:srgbClr val="6D2E46"/>
                       </a:solidFill>
                     </a:lnB>
+                    <a:solidFill>
+                      <a:srgbClr val="6D2E46"/>
+                    </a:solidFill>
                   </a:tcPr>
                 </a:tc>
                 <a:tc>
@@ -8415,14 +10499,14 @@
                     </a:p>
                   </a:txBody>
                   <a:tcPr marL="91440" marR="91440" marT="36576" marB="36576" anchor="ctr">
-                    <a:solidFill>
-                      <a:srgbClr val="6D2E46"/>
-                    </a:solidFill>
                     <a:lnB w="9525" cap="flat">
                       <a:solidFill>
                         <a:srgbClr val="6D2E46"/>
                       </a:solidFill>
                     </a:lnB>
+                    <a:solidFill>
+                      <a:srgbClr val="6D2E46"/>
+                    </a:solidFill>
                   </a:tcPr>
                 </a:tc>
                 <a:tc>
@@ -8453,14 +10537,14 @@
                     </a:p>
                   </a:txBody>
                   <a:tcPr marL="91440" marR="91440" marT="36576" marB="36576" anchor="ctr">
-                    <a:solidFill>
-                      <a:srgbClr val="6D2E46"/>
-                    </a:solidFill>
                     <a:lnB w="9525" cap="flat">
                       <a:solidFill>
                         <a:srgbClr val="6D2E46"/>
                       </a:solidFill>
                     </a:lnB>
+                    <a:solidFill>
+                      <a:srgbClr val="6D2E46"/>
+                    </a:solidFill>
                   </a:tcPr>
                 </a:tc>
               </a:tr>
@@ -8493,14 +10577,14 @@
                     </a:p>
                   </a:txBody>
                   <a:tcPr marL="91440" marR="91440" marT="36576" marB="36576" anchor="ctr">
-                    <a:solidFill>
-                      <a:srgbClr val="FFFFFF"/>
-                    </a:solidFill>
                     <a:lnB w="9525" cap="flat">
                       <a:solidFill>
                         <a:srgbClr val="EAD9DD"/>
                       </a:solidFill>
                     </a:lnB>
+                    <a:solidFill>
+                      <a:srgbClr val="FFFFFF"/>
+                    </a:solidFill>
                   </a:tcPr>
                 </a:tc>
                 <a:tc>
@@ -8531,14 +10615,14 @@
                     </a:p>
                   </a:txBody>
                   <a:tcPr marL="91440" marR="91440" marT="36576" marB="36576" anchor="ctr">
-                    <a:solidFill>
-                      <a:srgbClr val="FFFFFF"/>
-                    </a:solidFill>
                     <a:lnB w="9525" cap="flat">
                       <a:solidFill>
                         <a:srgbClr val="EAD9DD"/>
                       </a:solidFill>
                     </a:lnB>
+                    <a:solidFill>
+                      <a:srgbClr val="FFFFFF"/>
+                    </a:solidFill>
                   </a:tcPr>
                 </a:tc>
                 <a:tc>
@@ -8569,14 +10653,14 @@
                     </a:p>
                   </a:txBody>
                   <a:tcPr marL="91440" marR="91440" marT="36576" marB="36576" anchor="ctr">
-                    <a:solidFill>
-                      <a:srgbClr val="FFFFFF"/>
-                    </a:solidFill>
                     <a:lnB w="9525" cap="flat">
                       <a:solidFill>
                         <a:srgbClr val="EAD9DD"/>
                       </a:solidFill>
                     </a:lnB>
+                    <a:solidFill>
+                      <a:srgbClr val="FFFFFF"/>
+                    </a:solidFill>
                   </a:tcPr>
                 </a:tc>
               </a:tr>
@@ -8609,14 +10693,14 @@
                     </a:p>
                   </a:txBody>
                   <a:tcPr marL="91440" marR="91440" marT="36576" marB="36576" anchor="ctr">
-                    <a:solidFill>
-                      <a:srgbClr val="F9F4F5"/>
-                    </a:solidFill>
                     <a:lnB w="9525" cap="flat">
                       <a:solidFill>
                         <a:srgbClr val="EAD9DD"/>
                       </a:solidFill>
                     </a:lnB>
+                    <a:solidFill>
+                      <a:srgbClr val="F9F4F5"/>
+                    </a:solidFill>
                   </a:tcPr>
                 </a:tc>
                 <a:tc>
@@ -8647,14 +10731,14 @@
                     </a:p>
                   </a:txBody>
                   <a:tcPr marL="91440" marR="91440" marT="36576" marB="36576" anchor="ctr">
-                    <a:solidFill>
-                      <a:srgbClr val="F9F4F5"/>
-                    </a:solidFill>
                     <a:lnB w="9525" cap="flat">
                       <a:solidFill>
                         <a:srgbClr val="EAD9DD"/>
                       </a:solidFill>
                     </a:lnB>
+                    <a:solidFill>
+                      <a:srgbClr val="F9F4F5"/>
+                    </a:solidFill>
                   </a:tcPr>
                 </a:tc>
                 <a:tc>
@@ -8685,14 +10769,14 @@
                     </a:p>
                   </a:txBody>
                   <a:tcPr marL="91440" marR="91440" marT="36576" marB="36576" anchor="ctr">
-                    <a:solidFill>
-                      <a:srgbClr val="F9F4F5"/>
-                    </a:solidFill>
                     <a:lnB w="9525" cap="flat">
                       <a:solidFill>
                         <a:srgbClr val="EAD9DD"/>
                       </a:solidFill>
                     </a:lnB>
+                    <a:solidFill>
+                      <a:srgbClr val="F9F4F5"/>
+                    </a:solidFill>
                   </a:tcPr>
                 </a:tc>
               </a:tr>
@@ -8725,14 +10809,14 @@
                     </a:p>
                   </a:txBody>
                   <a:tcPr marL="91440" marR="91440" marT="36576" marB="36576" anchor="ctr">
-                    <a:solidFill>
-                      <a:srgbClr val="FFFFFF"/>
-                    </a:solidFill>
                     <a:lnB w="9525" cap="flat">
                       <a:solidFill>
                         <a:srgbClr val="EAD9DD"/>
                       </a:solidFill>
                     </a:lnB>
+                    <a:solidFill>
+                      <a:srgbClr val="FFFFFF"/>
+                    </a:solidFill>
                   </a:tcPr>
                 </a:tc>
                 <a:tc>
@@ -8763,14 +10847,14 @@
                     </a:p>
                   </a:txBody>
                   <a:tcPr marL="91440" marR="91440" marT="36576" marB="36576" anchor="ctr">
-                    <a:solidFill>
-                      <a:srgbClr val="FFFFFF"/>
-                    </a:solidFill>
                     <a:lnB w="9525" cap="flat">
                       <a:solidFill>
                         <a:srgbClr val="EAD9DD"/>
                       </a:solidFill>
                     </a:lnB>
+                    <a:solidFill>
+                      <a:srgbClr val="FFFFFF"/>
+                    </a:solidFill>
                   </a:tcPr>
                 </a:tc>
                 <a:tc>
@@ -8801,14 +10885,14 @@
                     </a:p>
                   </a:txBody>
                   <a:tcPr marL="91440" marR="91440" marT="36576" marB="36576" anchor="ctr">
-                    <a:solidFill>
-                      <a:srgbClr val="FFFFFF"/>
-                    </a:solidFill>
                     <a:lnB w="9525" cap="flat">
                       <a:solidFill>
                         <a:srgbClr val="EAD9DD"/>
                       </a:solidFill>
                     </a:lnB>
+                    <a:solidFill>
+                      <a:srgbClr val="FFFFFF"/>
+                    </a:solidFill>
                   </a:tcPr>
                 </a:tc>
               </a:tr>
@@ -8841,14 +10925,14 @@
                     </a:p>
                   </a:txBody>
                   <a:tcPr marL="91440" marR="91440" marT="36576" marB="36576" anchor="ctr">
-                    <a:solidFill>
-                      <a:srgbClr val="F9F4F5"/>
-                    </a:solidFill>
                     <a:lnB w="9525" cap="flat">
                       <a:solidFill>
                         <a:srgbClr val="EAD9DD"/>
                       </a:solidFill>
                     </a:lnB>
+                    <a:solidFill>
+                      <a:srgbClr val="F9F4F5"/>
+                    </a:solidFill>
                   </a:tcPr>
                 </a:tc>
                 <a:tc>
@@ -8879,14 +10963,14 @@
                     </a:p>
                   </a:txBody>
                   <a:tcPr marL="91440" marR="91440" marT="36576" marB="36576" anchor="ctr">
-                    <a:solidFill>
-                      <a:srgbClr val="F9F4F5"/>
-                    </a:solidFill>
                     <a:lnB w="9525" cap="flat">
                       <a:solidFill>
                         <a:srgbClr val="EAD9DD"/>
                       </a:solidFill>
                     </a:lnB>
+                    <a:solidFill>
+                      <a:srgbClr val="F9F4F5"/>
+                    </a:solidFill>
                   </a:tcPr>
                 </a:tc>
                 <a:tc>
@@ -8917,14 +11001,14 @@
                     </a:p>
                   </a:txBody>
                   <a:tcPr marL="91440" marR="91440" marT="36576" marB="36576" anchor="ctr">
-                    <a:solidFill>
-                      <a:srgbClr val="F9F4F5"/>
-                    </a:solidFill>
                     <a:lnB w="9525" cap="flat">
                       <a:solidFill>
                         <a:srgbClr val="EAD9DD"/>
                       </a:solidFill>
                     </a:lnB>
+                    <a:solidFill>
+                      <a:srgbClr val="F9F4F5"/>
+                    </a:solidFill>
                   </a:tcPr>
                 </a:tc>
               </a:tr>
@@ -8957,14 +11041,14 @@
                     </a:p>
                   </a:txBody>
                   <a:tcPr marL="91440" marR="91440" marT="36576" marB="36576" anchor="ctr">
-                    <a:solidFill>
-                      <a:srgbClr val="FFFFFF"/>
-                    </a:solidFill>
                     <a:lnB w="9525" cap="flat">
                       <a:solidFill>
                         <a:srgbClr val="EAD9DD"/>
                       </a:solidFill>
                     </a:lnB>
+                    <a:solidFill>
+                      <a:srgbClr val="FFFFFF"/>
+                    </a:solidFill>
                   </a:tcPr>
                 </a:tc>
                 <a:tc>
@@ -8995,14 +11079,14 @@
                     </a:p>
                   </a:txBody>
                   <a:tcPr marL="91440" marR="91440" marT="36576" marB="36576" anchor="ctr">
-                    <a:solidFill>
-                      <a:srgbClr val="FFFFFF"/>
-                    </a:solidFill>
                     <a:lnB w="9525" cap="flat">
                       <a:solidFill>
                         <a:srgbClr val="EAD9DD"/>
                       </a:solidFill>
                     </a:lnB>
+                    <a:solidFill>
+                      <a:srgbClr val="FFFFFF"/>
+                    </a:solidFill>
                   </a:tcPr>
                 </a:tc>
                 <a:tc>
@@ -9033,14 +11117,14 @@
                     </a:p>
                   </a:txBody>
                   <a:tcPr marL="91440" marR="91440" marT="36576" marB="36576" anchor="ctr">
-                    <a:solidFill>
-                      <a:srgbClr val="FFFFFF"/>
-                    </a:solidFill>
                     <a:lnB w="9525" cap="flat">
                       <a:solidFill>
                         <a:srgbClr val="EAD9DD"/>
                       </a:solidFill>
                     </a:lnB>
+                    <a:solidFill>
+                      <a:srgbClr val="FFFFFF"/>
+                    </a:solidFill>
                   </a:tcPr>
                 </a:tc>
               </a:tr>
@@ -9073,14 +11157,14 @@
                     </a:p>
                   </a:txBody>
                   <a:tcPr marL="91440" marR="91440" marT="36576" marB="36576" anchor="ctr">
-                    <a:solidFill>
-                      <a:srgbClr val="F9F4F5"/>
-                    </a:solidFill>
                     <a:lnB w="9525" cap="flat">
                       <a:solidFill>
                         <a:srgbClr val="EAD9DD"/>
                       </a:solidFill>
                     </a:lnB>
+                    <a:solidFill>
+                      <a:srgbClr val="F9F4F5"/>
+                    </a:solidFill>
                   </a:tcPr>
                 </a:tc>
                 <a:tc>
@@ -9111,14 +11195,14 @@
                     </a:p>
                   </a:txBody>
                   <a:tcPr marL="91440" marR="91440" marT="36576" marB="36576" anchor="ctr">
-                    <a:solidFill>
-                      <a:srgbClr val="F9F4F5"/>
-                    </a:solidFill>
                     <a:lnB w="9525" cap="flat">
                       <a:solidFill>
                         <a:srgbClr val="EAD9DD"/>
                       </a:solidFill>
                     </a:lnB>
+                    <a:solidFill>
+                      <a:srgbClr val="F9F4F5"/>
+                    </a:solidFill>
                   </a:tcPr>
                 </a:tc>
                 <a:tc>
@@ -9149,14 +11233,14 @@
                     </a:p>
                   </a:txBody>
                   <a:tcPr marL="91440" marR="91440" marT="36576" marB="36576" anchor="ctr">
-                    <a:solidFill>
-                      <a:srgbClr val="F9F4F5"/>
-                    </a:solidFill>
                     <a:lnB w="9525" cap="flat">
                       <a:solidFill>
                         <a:srgbClr val="EAD9DD"/>
                       </a:solidFill>
                     </a:lnB>
+                    <a:solidFill>
+                      <a:srgbClr val="F9F4F5"/>
+                    </a:solidFill>
                   </a:tcPr>
                 </a:tc>
               </a:tr>
@@ -9513,8 +11597,8 @@
           <p:nvPr/>
         </p:nvGraphicFramePr>
         <p:xfrm>
-          <a:off x="566928" y="1865376"/>
-          <a:ext cx="11064240" cy="3877056"/>
+          <a:off x="566928" y="1828800"/>
+          <a:ext cx="11064240" cy="3867912"/>
         </p:xfrm>
         <a:graphic>
           <a:graphicData uri="http://schemas.openxmlformats.org/drawingml/2006/table">
@@ -9527,7 +11611,7 @@
                 <a:gridCol w="3703320"/>
                 <a:gridCol w="5029200"/>
               </a:tblGrid>
-              <a:tr h="365760">
+              <a:tr h="347472">
                 <a:tc>
                   <a:txBody>
                     <a:bodyPr wrap="square"/>
@@ -9556,14 +11640,14 @@
                     </a:p>
                   </a:txBody>
                   <a:tcPr marL="91440" marR="91440" marT="36576" marB="36576" anchor="ctr">
-                    <a:solidFill>
-                      <a:srgbClr val="6D2E46"/>
-                    </a:solidFill>
                     <a:lnB w="9525" cap="flat">
                       <a:solidFill>
                         <a:srgbClr val="6D2E46"/>
                       </a:solidFill>
                     </a:lnB>
+                    <a:solidFill>
+                      <a:srgbClr val="6D2E46"/>
+                    </a:solidFill>
                   </a:tcPr>
                 </a:tc>
                 <a:tc>
@@ -9594,14 +11678,14 @@
                     </a:p>
                   </a:txBody>
                   <a:tcPr marL="91440" marR="91440" marT="36576" marB="36576" anchor="ctr">
-                    <a:solidFill>
-                      <a:srgbClr val="6D2E46"/>
-                    </a:solidFill>
                     <a:lnB w="9525" cap="flat">
                       <a:solidFill>
                         <a:srgbClr val="6D2E46"/>
                       </a:solidFill>
                     </a:lnB>
+                    <a:solidFill>
+                      <a:srgbClr val="6D2E46"/>
+                    </a:solidFill>
                   </a:tcPr>
                 </a:tc>
                 <a:tc>
@@ -9632,18 +11716,18 @@
                     </a:p>
                   </a:txBody>
                   <a:tcPr marL="91440" marR="91440" marT="36576" marB="36576" anchor="ctr">
-                    <a:solidFill>
-                      <a:srgbClr val="6D2E46"/>
-                    </a:solidFill>
                     <a:lnB w="9525" cap="flat">
                       <a:solidFill>
                         <a:srgbClr val="6D2E46"/>
                       </a:solidFill>
                     </a:lnB>
+                    <a:solidFill>
+                      <a:srgbClr val="6D2E46"/>
+                    </a:solidFill>
                   </a:tcPr>
                 </a:tc>
               </a:tr>
-              <a:tr h="585216">
+              <a:tr h="502920">
                 <a:tc>
                   <a:txBody>
                     <a:bodyPr wrap="square"/>
@@ -9672,14 +11756,14 @@
                     </a:p>
                   </a:txBody>
                   <a:tcPr marL="91440" marR="91440" marT="36576" marB="36576" anchor="ctr">
-                    <a:solidFill>
-                      <a:srgbClr val="FFFFFF"/>
-                    </a:solidFill>
                     <a:lnB w="9525" cap="flat">
                       <a:solidFill>
                         <a:srgbClr val="EAD9DD"/>
                       </a:solidFill>
                     </a:lnB>
+                    <a:solidFill>
+                      <a:srgbClr val="FFFFFF"/>
+                    </a:solidFill>
                   </a:tcPr>
                 </a:tc>
                 <a:tc>
@@ -9710,14 +11794,14 @@
                     </a:p>
                   </a:txBody>
                   <a:tcPr marL="91440" marR="91440" marT="36576" marB="36576" anchor="ctr">
-                    <a:solidFill>
-                      <a:srgbClr val="FFFFFF"/>
-                    </a:solidFill>
                     <a:lnB w="9525" cap="flat">
                       <a:solidFill>
                         <a:srgbClr val="EAD9DD"/>
                       </a:solidFill>
                     </a:lnB>
+                    <a:solidFill>
+                      <a:srgbClr val="FFFFFF"/>
+                    </a:solidFill>
                   </a:tcPr>
                 </a:tc>
                 <a:tc>
@@ -9788,18 +11872,18 @@
                     </a:p>
                   </a:txBody>
                   <a:tcPr marL="91440" marR="91440" marT="36576" marB="36576" anchor="ctr">
-                    <a:solidFill>
-                      <a:srgbClr val="FFFFFF"/>
-                    </a:solidFill>
                     <a:lnB w="9525" cap="flat">
                       <a:solidFill>
                         <a:srgbClr val="EAD9DD"/>
                       </a:solidFill>
                     </a:lnB>
+                    <a:solidFill>
+                      <a:srgbClr val="FFFFFF"/>
+                    </a:solidFill>
                   </a:tcPr>
                 </a:tc>
               </a:tr>
-              <a:tr h="585216">
+              <a:tr h="502920">
                 <a:tc>
                   <a:txBody>
                     <a:bodyPr wrap="square"/>
@@ -9828,14 +11912,14 @@
                     </a:p>
                   </a:txBody>
                   <a:tcPr marL="91440" marR="91440" marT="36576" marB="36576" anchor="ctr">
-                    <a:solidFill>
-                      <a:srgbClr val="F9F4F5"/>
-                    </a:solidFill>
                     <a:lnB w="9525" cap="flat">
                       <a:solidFill>
                         <a:srgbClr val="EAD9DD"/>
                       </a:solidFill>
                     </a:lnB>
+                    <a:solidFill>
+                      <a:srgbClr val="F9F4F5"/>
+                    </a:solidFill>
                   </a:tcPr>
                 </a:tc>
                 <a:tc>
@@ -9866,14 +11950,14 @@
                     </a:p>
                   </a:txBody>
                   <a:tcPr marL="91440" marR="91440" marT="36576" marB="36576" anchor="ctr">
-                    <a:solidFill>
-                      <a:srgbClr val="F9F4F5"/>
-                    </a:solidFill>
                     <a:lnB w="9525" cap="flat">
                       <a:solidFill>
                         <a:srgbClr val="EAD9DD"/>
                       </a:solidFill>
                     </a:lnB>
+                    <a:solidFill>
+                      <a:srgbClr val="F9F4F5"/>
+                    </a:solidFill>
                   </a:tcPr>
                 </a:tc>
                 <a:tc>
@@ -9944,18 +12028,18 @@
                     </a:p>
                   </a:txBody>
                   <a:tcPr marL="91440" marR="91440" marT="36576" marB="36576" anchor="ctr">
-                    <a:solidFill>
-                      <a:srgbClr val="F9F4F5"/>
-                    </a:solidFill>
                     <a:lnB w="9525" cap="flat">
                       <a:solidFill>
                         <a:srgbClr val="EAD9DD"/>
                       </a:solidFill>
                     </a:lnB>
+                    <a:solidFill>
+                      <a:srgbClr val="F9F4F5"/>
+                    </a:solidFill>
                   </a:tcPr>
                 </a:tc>
               </a:tr>
-              <a:tr h="585216">
+              <a:tr h="502920">
                 <a:tc>
                   <a:txBody>
                     <a:bodyPr wrap="square"/>
@@ -9984,14 +12068,14 @@
                     </a:p>
                   </a:txBody>
                   <a:tcPr marL="91440" marR="91440" marT="36576" marB="36576" anchor="ctr">
-                    <a:solidFill>
-                      <a:srgbClr val="FFFFFF"/>
-                    </a:solidFill>
                     <a:lnB w="9525" cap="flat">
                       <a:solidFill>
                         <a:srgbClr val="EAD9DD"/>
                       </a:solidFill>
                     </a:lnB>
+                    <a:solidFill>
+                      <a:srgbClr val="FFFFFF"/>
+                    </a:solidFill>
                   </a:tcPr>
                 </a:tc>
                 <a:tc>
@@ -10022,14 +12106,14 @@
                     </a:p>
                   </a:txBody>
                   <a:tcPr marL="91440" marR="91440" marT="36576" marB="36576" anchor="ctr">
-                    <a:solidFill>
-                      <a:srgbClr val="FFFFFF"/>
-                    </a:solidFill>
                     <a:lnB w="9525" cap="flat">
                       <a:solidFill>
                         <a:srgbClr val="EAD9DD"/>
                       </a:solidFill>
                     </a:lnB>
+                    <a:solidFill>
+                      <a:srgbClr val="FFFFFF"/>
+                    </a:solidFill>
                   </a:tcPr>
                 </a:tc>
                 <a:tc>
@@ -10060,18 +12144,18 @@
                     </a:p>
                   </a:txBody>
                   <a:tcPr marL="91440" marR="91440" marT="36576" marB="36576" anchor="ctr">
-                    <a:solidFill>
-                      <a:srgbClr val="FFFFFF"/>
-                    </a:solidFill>
                     <a:lnB w="9525" cap="flat">
                       <a:solidFill>
                         <a:srgbClr val="EAD9DD"/>
                       </a:solidFill>
                     </a:lnB>
+                    <a:solidFill>
+                      <a:srgbClr val="FFFFFF"/>
+                    </a:solidFill>
                   </a:tcPr>
                 </a:tc>
               </a:tr>
-              <a:tr h="585216">
+              <a:tr h="502920">
                 <a:tc>
                   <a:txBody>
                     <a:bodyPr wrap="square"/>
@@ -10100,14 +12184,14 @@
                     </a:p>
                   </a:txBody>
                   <a:tcPr marL="91440" marR="91440" marT="36576" marB="36576" anchor="ctr">
-                    <a:solidFill>
-                      <a:srgbClr val="F9F4F5"/>
-                    </a:solidFill>
                     <a:lnB w="9525" cap="flat">
                       <a:solidFill>
                         <a:srgbClr val="EAD9DD"/>
                       </a:solidFill>
                     </a:lnB>
+                    <a:solidFill>
+                      <a:srgbClr val="F9F4F5"/>
+                    </a:solidFill>
                   </a:tcPr>
                 </a:tc>
                 <a:tc>
@@ -10138,14 +12222,14 @@
                     </a:p>
                   </a:txBody>
                   <a:tcPr marL="91440" marR="91440" marT="36576" marB="36576" anchor="ctr">
-                    <a:solidFill>
-                      <a:srgbClr val="F9F4F5"/>
-                    </a:solidFill>
                     <a:lnB w="9525" cap="flat">
                       <a:solidFill>
                         <a:srgbClr val="EAD9DD"/>
                       </a:solidFill>
                     </a:lnB>
+                    <a:solidFill>
+                      <a:srgbClr val="F9F4F5"/>
+                    </a:solidFill>
                   </a:tcPr>
                 </a:tc>
                 <a:tc>
@@ -10176,18 +12260,18 @@
                     </a:p>
                   </a:txBody>
                   <a:tcPr marL="91440" marR="91440" marT="36576" marB="36576" anchor="ctr">
-                    <a:solidFill>
-                      <a:srgbClr val="F9F4F5"/>
-                    </a:solidFill>
                     <a:lnB w="9525" cap="flat">
                       <a:solidFill>
                         <a:srgbClr val="EAD9DD"/>
                       </a:solidFill>
                     </a:lnB>
+                    <a:solidFill>
+                      <a:srgbClr val="F9F4F5"/>
+                    </a:solidFill>
                   </a:tcPr>
                 </a:tc>
               </a:tr>
-              <a:tr h="585216">
+              <a:tr h="502920">
                 <a:tc>
                   <a:txBody>
                     <a:bodyPr wrap="square"/>
@@ -10216,14 +12300,14 @@
                     </a:p>
                   </a:txBody>
                   <a:tcPr marL="91440" marR="91440" marT="36576" marB="36576" anchor="ctr">
-                    <a:solidFill>
-                      <a:srgbClr val="FFFFFF"/>
-                    </a:solidFill>
                     <a:lnB w="9525" cap="flat">
                       <a:solidFill>
                         <a:srgbClr val="EAD9DD"/>
                       </a:solidFill>
                     </a:lnB>
+                    <a:solidFill>
+                      <a:srgbClr val="FFFFFF"/>
+                    </a:solidFill>
                   </a:tcPr>
                 </a:tc>
                 <a:tc>
@@ -10254,14 +12338,14 @@
                     </a:p>
                   </a:txBody>
                   <a:tcPr marL="91440" marR="91440" marT="36576" marB="36576" anchor="ctr">
-                    <a:solidFill>
-                      <a:srgbClr val="FFFFFF"/>
-                    </a:solidFill>
                     <a:lnB w="9525" cap="flat">
                       <a:solidFill>
                         <a:srgbClr val="EAD9DD"/>
                       </a:solidFill>
                     </a:lnB>
+                    <a:solidFill>
+                      <a:srgbClr val="FFFFFF"/>
+                    </a:solidFill>
                   </a:tcPr>
                 </a:tc>
                 <a:tc>
@@ -10292,18 +12376,18 @@
                     </a:p>
                   </a:txBody>
                   <a:tcPr marL="91440" marR="91440" marT="36576" marB="36576" anchor="ctr">
-                    <a:solidFill>
-                      <a:srgbClr val="FFFFFF"/>
-                    </a:solidFill>
                     <a:lnB w="9525" cap="flat">
                       <a:solidFill>
                         <a:srgbClr val="EAD9DD"/>
                       </a:solidFill>
                     </a:lnB>
+                    <a:solidFill>
+                      <a:srgbClr val="FFFFFF"/>
+                    </a:solidFill>
                   </a:tcPr>
                 </a:tc>
               </a:tr>
-              <a:tr h="585216">
+              <a:tr h="502920">
                 <a:tc>
                   <a:txBody>
                     <a:bodyPr wrap="square"/>
@@ -10332,14 +12416,14 @@
                     </a:p>
                   </a:txBody>
                   <a:tcPr marL="91440" marR="91440" marT="36576" marB="36576" anchor="ctr">
-                    <a:solidFill>
-                      <a:srgbClr val="F9F4F5"/>
-                    </a:solidFill>
                     <a:lnB w="9525" cap="flat">
                       <a:solidFill>
                         <a:srgbClr val="EAD9DD"/>
                       </a:solidFill>
                     </a:lnB>
+                    <a:solidFill>
+                      <a:srgbClr val="F9F4F5"/>
+                    </a:solidFill>
                   </a:tcPr>
                 </a:tc>
                 <a:tc>
@@ -10370,14 +12454,14 @@
                     </a:p>
                   </a:txBody>
                   <a:tcPr marL="91440" marR="91440" marT="36576" marB="36576" anchor="ctr">
-                    <a:solidFill>
-                      <a:srgbClr val="F9F4F5"/>
-                    </a:solidFill>
                     <a:lnB w="9525" cap="flat">
                       <a:solidFill>
                         <a:srgbClr val="EAD9DD"/>
                       </a:solidFill>
                     </a:lnB>
+                    <a:solidFill>
+                      <a:srgbClr val="F9F4F5"/>
+                    </a:solidFill>
                   </a:tcPr>
                 </a:tc>
                 <a:tc>
@@ -10408,14 +12492,130 @@
                     </a:p>
                   </a:txBody>
                   <a:tcPr marL="91440" marR="91440" marT="36576" marB="36576" anchor="ctr">
-                    <a:solidFill>
-                      <a:srgbClr val="F9F4F5"/>
-                    </a:solidFill>
                     <a:lnB w="9525" cap="flat">
                       <a:solidFill>
                         <a:srgbClr val="EAD9DD"/>
                       </a:solidFill>
                     </a:lnB>
+                    <a:solidFill>
+                      <a:srgbClr val="F9F4F5"/>
+                    </a:solidFill>
+                  </a:tcPr>
+                </a:tc>
+              </a:tr>
+              <a:tr h="502920">
+                <a:tc>
+                  <a:txBody>
+                    <a:bodyPr wrap="square"/>
+                    <a:lstStyle/>
+                    <a:p>
+                      <a:pPr algn="l">
+                        <a:lnSpc>
+                          <a:spcPct val="100000"/>
+                        </a:lnSpc>
+                        <a:spcBef>
+                          <a:spcPts val="0"/>
+                        </a:spcBef>
+                        <a:spcAft>
+                          <a:spcPts val="100"/>
+                        </a:spcAft>
+                      </a:pPr>
+                      <a:r>
+                        <a:rPr sz="1019" b="1" i="0">
+                          <a:solidFill>
+                            <a:srgbClr val="6D2E46"/>
+                          </a:solidFill>
+                          <a:latin typeface="Calibri"/>
+                        </a:rPr>
+                        <a:t>Contrived or stacked constraints</a:t>
+                      </a:r>
+                    </a:p>
+                  </a:txBody>
+                  <a:tcPr marL="91440" marR="91440" marT="36576" marB="36576" anchor="ctr">
+                    <a:lnB w="9525" cap="flat">
+                      <a:solidFill>
+                        <a:srgbClr val="EAD9DD"/>
+                      </a:solidFill>
+                    </a:lnB>
+                    <a:solidFill>
+                      <a:srgbClr val="FFFFFF"/>
+                    </a:solidFill>
+                  </a:tcPr>
+                </a:tc>
+                <a:tc>
+                  <a:txBody>
+                    <a:bodyPr wrap="square"/>
+                    <a:lstStyle/>
+                    <a:p>
+                      <a:pPr algn="l">
+                        <a:lnSpc>
+                          <a:spcPct val="100000"/>
+                        </a:lnSpc>
+                        <a:spcBef>
+                          <a:spcPts val="0"/>
+                        </a:spcBef>
+                        <a:spcAft>
+                          <a:spcPts val="100"/>
+                        </a:spcAft>
+                      </a:pPr>
+                      <a:r>
+                        <a:rPr sz="980" b="0" i="0">
+                          <a:solidFill>
+                            <a:srgbClr val="6B6064"/>
+                          </a:solidFill>
+                          <a:latin typeface="Calibri"/>
+                        </a:rPr>
+                        <a:t>The opener piles on rigid, unrealistic rules (exactly three tables, 15-minute blocks, legally-binding wording) that no real user would stack.</a:t>
+                      </a:r>
+                    </a:p>
+                  </a:txBody>
+                  <a:tcPr marL="91440" marR="91440" marT="36576" marB="36576" anchor="ctr">
+                    <a:lnB w="9525" cap="flat">
+                      <a:solidFill>
+                        <a:srgbClr val="EAD9DD"/>
+                      </a:solidFill>
+                    </a:lnB>
+                    <a:solidFill>
+                      <a:srgbClr val="FFFFFF"/>
+                    </a:solidFill>
+                  </a:tcPr>
+                </a:tc>
+                <a:tc>
+                  <a:txBody>
+                    <a:bodyPr wrap="square"/>
+                    <a:lstStyle/>
+                    <a:p>
+                      <a:pPr algn="l">
+                        <a:lnSpc>
+                          <a:spcPct val="100000"/>
+                        </a:lnSpc>
+                        <a:spcBef>
+                          <a:spcPts val="0"/>
+                        </a:spcBef>
+                        <a:spcAft>
+                          <a:spcPts val="100"/>
+                        </a:spcAft>
+                      </a:pPr>
+                      <a:r>
+                        <a:rPr sz="980" b="0" i="0">
+                          <a:solidFill>
+                            <a:srgbClr val="2B2126"/>
+                          </a:solidFill>
+                          <a:latin typeface="Calibri"/>
+                        </a:rPr>
+                        <a:t>Use only constraints a real user would set, and keep the opener a loose, situation-first ask.</a:t>
+                      </a:r>
+                    </a:p>
+                  </a:txBody>
+                  <a:tcPr marL="91440" marR="91440" marT="36576" marB="36576" anchor="ctr">
+                    <a:lnB w="9525" cap="flat">
+                      <a:solidFill>
+                        <a:srgbClr val="EAD9DD"/>
+                      </a:solidFill>
+                    </a:lnB>
+                    <a:solidFill>
+                      <a:srgbClr val="FFFFFF"/>
+                    </a:solidFill>
                   </a:tcPr>
                 </a:tc>
               </a:tr>
@@ -10431,8 +12631,8 @@
         </p:nvSpPr>
         <p:spPr>
           <a:xfrm>
-            <a:off x="566928" y="5907024"/>
-            <a:ext cx="11064240" cy="548640"/>
+            <a:off x="566928" y="5797296"/>
+            <a:ext cx="11064240" cy="493776"/>
           </a:xfrm>
           <a:prstGeom prst="roundRect">
             <a:avLst/>
@@ -10475,8 +12675,8 @@
         </p:nvSpPr>
         <p:spPr>
           <a:xfrm>
-            <a:off x="886968" y="6062472"/>
-            <a:ext cx="10424160" cy="274320"/>
+            <a:off x="886968" y="5952744"/>
+            <a:ext cx="10424160" cy="219456"/>
           </a:xfrm>
           <a:prstGeom prst="rect">
             <a:avLst/>
@@ -10772,8 +12972,8 @@
           <p:nvPr/>
         </p:nvGraphicFramePr>
         <p:xfrm>
-          <a:off x="566928" y="1901952"/>
-          <a:ext cx="11064240" cy="3419856"/>
+          <a:off x="566928" y="1865376"/>
+          <a:ext cx="11064240" cy="3803904"/>
         </p:xfrm>
         <a:graphic>
           <a:graphicData uri="http://schemas.openxmlformats.org/drawingml/2006/table">
@@ -10815,14 +13015,14 @@
                     </a:p>
                   </a:txBody>
                   <a:tcPr marL="91440" marR="91440" marT="36576" marB="36576" anchor="ctr">
-                    <a:solidFill>
-                      <a:srgbClr val="6D2E46"/>
-                    </a:solidFill>
                     <a:lnB w="9525" cap="flat">
                       <a:solidFill>
                         <a:srgbClr val="6D2E46"/>
                       </a:solidFill>
                     </a:lnB>
+                    <a:solidFill>
+                      <a:srgbClr val="6D2E46"/>
+                    </a:solidFill>
                   </a:tcPr>
                 </a:tc>
                 <a:tc>
@@ -10853,14 +13053,14 @@
                     </a:p>
                   </a:txBody>
                   <a:tcPr marL="91440" marR="91440" marT="36576" marB="36576" anchor="ctr">
-                    <a:solidFill>
-                      <a:srgbClr val="6D2E46"/>
-                    </a:solidFill>
                     <a:lnB w="9525" cap="flat">
                       <a:solidFill>
                         <a:srgbClr val="6D2E46"/>
                       </a:solidFill>
                     </a:lnB>
+                    <a:solidFill>
+                      <a:srgbClr val="6D2E46"/>
+                    </a:solidFill>
                   </a:tcPr>
                 </a:tc>
                 <a:tc>
@@ -10891,18 +13091,18 @@
                     </a:p>
                   </a:txBody>
                   <a:tcPr marL="91440" marR="91440" marT="36576" marB="36576" anchor="ctr">
-                    <a:solidFill>
-                      <a:srgbClr val="6D2E46"/>
-                    </a:solidFill>
                     <a:lnB w="9525" cap="flat">
                       <a:solidFill>
                         <a:srgbClr val="6D2E46"/>
                       </a:solidFill>
                     </a:lnB>
+                    <a:solidFill>
+                      <a:srgbClr val="6D2E46"/>
+                    </a:solidFill>
                   </a:tcPr>
                 </a:tc>
               </a:tr>
-              <a:tr h="603504">
+              <a:tr h="566928">
                 <a:tc>
                   <a:txBody>
                     <a:bodyPr wrap="square"/>
@@ -10931,14 +13131,14 @@
                     </a:p>
                   </a:txBody>
                   <a:tcPr marL="91440" marR="91440" marT="36576" marB="36576" anchor="ctr">
-                    <a:solidFill>
-                      <a:srgbClr val="FFFFFF"/>
-                    </a:solidFill>
                     <a:lnB w="9525" cap="flat">
                       <a:solidFill>
                         <a:srgbClr val="EAD9DD"/>
                       </a:solidFill>
                     </a:lnB>
+                    <a:solidFill>
+                      <a:srgbClr val="FFFFFF"/>
+                    </a:solidFill>
                   </a:tcPr>
                 </a:tc>
                 <a:tc>
@@ -10969,14 +13169,14 @@
                     </a:p>
                   </a:txBody>
                   <a:tcPr marL="91440" marR="91440" marT="36576" marB="36576" anchor="ctr">
-                    <a:solidFill>
-                      <a:srgbClr val="FFFFFF"/>
-                    </a:solidFill>
                     <a:lnB w="9525" cap="flat">
                       <a:solidFill>
                         <a:srgbClr val="EAD9DD"/>
                       </a:solidFill>
                     </a:lnB>
+                    <a:solidFill>
+                      <a:srgbClr val="FFFFFF"/>
+                    </a:solidFill>
                   </a:tcPr>
                 </a:tc>
                 <a:tc>
@@ -11007,18 +13207,18 @@
                     </a:p>
                   </a:txBody>
                   <a:tcPr marL="91440" marR="91440" marT="36576" marB="36576" anchor="ctr">
-                    <a:solidFill>
-                      <a:srgbClr val="FFFFFF"/>
-                    </a:solidFill>
                     <a:lnB w="9525" cap="flat">
                       <a:solidFill>
                         <a:srgbClr val="EAD9DD"/>
                       </a:solidFill>
                     </a:lnB>
+                    <a:solidFill>
+                      <a:srgbClr val="FFFFFF"/>
+                    </a:solidFill>
                   </a:tcPr>
                 </a:tc>
               </a:tr>
-              <a:tr h="603504">
+              <a:tr h="566928">
                 <a:tc>
                   <a:txBody>
                     <a:bodyPr wrap="square"/>
@@ -11047,14 +13247,14 @@
                     </a:p>
                   </a:txBody>
                   <a:tcPr marL="91440" marR="91440" marT="36576" marB="36576" anchor="ctr">
-                    <a:solidFill>
-                      <a:srgbClr val="F9F4F5"/>
-                    </a:solidFill>
                     <a:lnB w="9525" cap="flat">
                       <a:solidFill>
                         <a:srgbClr val="EAD9DD"/>
                       </a:solidFill>
                     </a:lnB>
+                    <a:solidFill>
+                      <a:srgbClr val="F9F4F5"/>
+                    </a:solidFill>
                   </a:tcPr>
                 </a:tc>
                 <a:tc>
@@ -11085,14 +13285,14 @@
                     </a:p>
                   </a:txBody>
                   <a:tcPr marL="91440" marR="91440" marT="36576" marB="36576" anchor="ctr">
-                    <a:solidFill>
-                      <a:srgbClr val="F9F4F5"/>
-                    </a:solidFill>
                     <a:lnB w="9525" cap="flat">
                       <a:solidFill>
                         <a:srgbClr val="EAD9DD"/>
                       </a:solidFill>
                     </a:lnB>
+                    <a:solidFill>
+                      <a:srgbClr val="F9F4F5"/>
+                    </a:solidFill>
                   </a:tcPr>
                 </a:tc>
                 <a:tc>
@@ -11123,18 +13323,18 @@
                     </a:p>
                   </a:txBody>
                   <a:tcPr marL="91440" marR="91440" marT="36576" marB="36576" anchor="ctr">
-                    <a:solidFill>
-                      <a:srgbClr val="F9F4F5"/>
-                    </a:solidFill>
                     <a:lnB w="9525" cap="flat">
                       <a:solidFill>
                         <a:srgbClr val="EAD9DD"/>
                       </a:solidFill>
                     </a:lnB>
+                    <a:solidFill>
+                      <a:srgbClr val="F9F4F5"/>
+                    </a:solidFill>
                   </a:tcPr>
                 </a:tc>
               </a:tr>
-              <a:tr h="603504">
+              <a:tr h="566928">
                 <a:tc>
                   <a:txBody>
                     <a:bodyPr wrap="square"/>
@@ -11163,14 +13363,14 @@
                     </a:p>
                   </a:txBody>
                   <a:tcPr marL="91440" marR="91440" marT="36576" marB="36576" anchor="ctr">
-                    <a:solidFill>
-                      <a:srgbClr val="FFFFFF"/>
-                    </a:solidFill>
                     <a:lnB w="9525" cap="flat">
                       <a:solidFill>
                         <a:srgbClr val="EAD9DD"/>
                       </a:solidFill>
                     </a:lnB>
+                    <a:solidFill>
+                      <a:srgbClr val="FFFFFF"/>
+                    </a:solidFill>
                   </a:tcPr>
                 </a:tc>
                 <a:tc>
@@ -11201,14 +13401,14 @@
                     </a:p>
                   </a:txBody>
                   <a:tcPr marL="91440" marR="91440" marT="36576" marB="36576" anchor="ctr">
-                    <a:solidFill>
-                      <a:srgbClr val="FFFFFF"/>
-                    </a:solidFill>
                     <a:lnB w="9525" cap="flat">
                       <a:solidFill>
                         <a:srgbClr val="EAD9DD"/>
                       </a:solidFill>
                     </a:lnB>
+                    <a:solidFill>
+                      <a:srgbClr val="FFFFFF"/>
+                    </a:solidFill>
                   </a:tcPr>
                 </a:tc>
                 <a:tc>
@@ -11239,18 +13439,18 @@
                     </a:p>
                   </a:txBody>
                   <a:tcPr marL="91440" marR="91440" marT="36576" marB="36576" anchor="ctr">
-                    <a:solidFill>
-                      <a:srgbClr val="FFFFFF"/>
-                    </a:solidFill>
                     <a:lnB w="9525" cap="flat">
                       <a:solidFill>
                         <a:srgbClr val="EAD9DD"/>
                       </a:solidFill>
                     </a:lnB>
+                    <a:solidFill>
+                      <a:srgbClr val="FFFFFF"/>
+                    </a:solidFill>
                   </a:tcPr>
                 </a:tc>
               </a:tr>
-              <a:tr h="603504">
+              <a:tr h="566928">
                 <a:tc>
                   <a:txBody>
                     <a:bodyPr wrap="square"/>
@@ -11279,14 +13479,14 @@
                     </a:p>
                   </a:txBody>
                   <a:tcPr marL="91440" marR="91440" marT="36576" marB="36576" anchor="ctr">
-                    <a:solidFill>
-                      <a:srgbClr val="F9F4F5"/>
-                    </a:solidFill>
                     <a:lnB w="9525" cap="flat">
                       <a:solidFill>
                         <a:srgbClr val="EAD9DD"/>
                       </a:solidFill>
                     </a:lnB>
+                    <a:solidFill>
+                      <a:srgbClr val="F9F4F5"/>
+                    </a:solidFill>
                   </a:tcPr>
                 </a:tc>
                 <a:tc>
@@ -11317,14 +13517,14 @@
                     </a:p>
                   </a:txBody>
                   <a:tcPr marL="91440" marR="91440" marT="36576" marB="36576" anchor="ctr">
-                    <a:solidFill>
-                      <a:srgbClr val="F9F4F5"/>
-                    </a:solidFill>
                     <a:lnB w="9525" cap="flat">
                       <a:solidFill>
                         <a:srgbClr val="EAD9DD"/>
                       </a:solidFill>
                     </a:lnB>
+                    <a:solidFill>
+                      <a:srgbClr val="F9F4F5"/>
+                    </a:solidFill>
                   </a:tcPr>
                 </a:tc>
                 <a:tc>
@@ -11355,18 +13555,18 @@
                     </a:p>
                   </a:txBody>
                   <a:tcPr marL="91440" marR="91440" marT="36576" marB="36576" anchor="ctr">
-                    <a:solidFill>
-                      <a:srgbClr val="F9F4F5"/>
-                    </a:solidFill>
                     <a:lnB w="9525" cap="flat">
                       <a:solidFill>
                         <a:srgbClr val="EAD9DD"/>
                       </a:solidFill>
                     </a:lnB>
+                    <a:solidFill>
+                      <a:srgbClr val="F9F4F5"/>
+                    </a:solidFill>
                   </a:tcPr>
                 </a:tc>
               </a:tr>
-              <a:tr h="603504">
+              <a:tr h="566928">
                 <a:tc>
                   <a:txBody>
                     <a:bodyPr wrap="square"/>
@@ -11395,14 +13595,14 @@
                     </a:p>
                   </a:txBody>
                   <a:tcPr marL="91440" marR="91440" marT="36576" marB="36576" anchor="ctr">
-                    <a:solidFill>
-                      <a:srgbClr val="FFFFFF"/>
-                    </a:solidFill>
                     <a:lnB w="9525" cap="flat">
                       <a:solidFill>
                         <a:srgbClr val="EAD9DD"/>
                       </a:solidFill>
                     </a:lnB>
+                    <a:solidFill>
+                      <a:srgbClr val="FFFFFF"/>
+                    </a:solidFill>
                   </a:tcPr>
                 </a:tc>
                 <a:tc>
@@ -11433,14 +13633,14 @@
                     </a:p>
                   </a:txBody>
                   <a:tcPr marL="91440" marR="91440" marT="36576" marB="36576" anchor="ctr">
-                    <a:solidFill>
-                      <a:srgbClr val="FFFFFF"/>
-                    </a:solidFill>
                     <a:lnB w="9525" cap="flat">
                       <a:solidFill>
                         <a:srgbClr val="EAD9DD"/>
                       </a:solidFill>
                     </a:lnB>
+                    <a:solidFill>
+                      <a:srgbClr val="FFFFFF"/>
+                    </a:solidFill>
                   </a:tcPr>
                 </a:tc>
                 <a:tc>
@@ -11471,14 +13671,130 @@
                     </a:p>
                   </a:txBody>
                   <a:tcPr marL="91440" marR="91440" marT="36576" marB="36576" anchor="ctr">
-                    <a:solidFill>
-                      <a:srgbClr val="FFFFFF"/>
-                    </a:solidFill>
                     <a:lnB w="9525" cap="flat">
                       <a:solidFill>
                         <a:srgbClr val="EAD9DD"/>
                       </a:solidFill>
                     </a:lnB>
+                    <a:solidFill>
+                      <a:srgbClr val="FFFFFF"/>
+                    </a:solidFill>
+                  </a:tcPr>
+                </a:tc>
+              </a:tr>
+              <a:tr h="566928">
+                <a:tc>
+                  <a:txBody>
+                    <a:bodyPr wrap="square"/>
+                    <a:lstStyle/>
+                    <a:p>
+                      <a:pPr algn="l">
+                        <a:lnSpc>
+                          <a:spcPct val="100000"/>
+                        </a:lnSpc>
+                        <a:spcBef>
+                          <a:spcPts val="0"/>
+                        </a:spcBef>
+                        <a:spcAft>
+                          <a:spcPts val="100"/>
+                        </a:spcAft>
+                      </a:pPr>
+                      <a:r>
+                        <a:rPr sz="1019" b="1" i="0">
+                          <a:solidFill>
+                            <a:srgbClr val="6D2E46"/>
+                          </a:solidFill>
+                          <a:latin typeface="Calibri"/>
+                        </a:rPr>
+                        <a:t>No unique ground truth</a:t>
+                      </a:r>
+                    </a:p>
+                  </a:txBody>
+                  <a:tcPr marL="91440" marR="91440" marT="36576" marB="36576" anchor="ctr">
+                    <a:lnB w="9525" cap="flat">
+                      <a:solidFill>
+                        <a:srgbClr val="EAD9DD"/>
+                      </a:solidFill>
+                    </a:lnB>
+                    <a:solidFill>
+                      <a:srgbClr val="F9F4F5"/>
+                    </a:solidFill>
+                  </a:tcPr>
+                </a:tc>
+                <a:tc>
+                  <a:txBody>
+                    <a:bodyPr wrap="square"/>
+                    <a:lstStyle/>
+                    <a:p>
+                      <a:pPr algn="l">
+                        <a:lnSpc>
+                          <a:spcPct val="100000"/>
+                        </a:lnSpc>
+                        <a:spcBef>
+                          <a:spcPts val="0"/>
+                        </a:spcBef>
+                        <a:spcAft>
+                          <a:spcPts val="100"/>
+                        </a:spcAft>
+                      </a:pPr>
+                      <a:r>
+                        <a:rPr sz="980" b="0" i="0">
+                          <a:solidFill>
+                            <a:srgbClr val="6B6064"/>
+                          </a:solidFill>
+                          <a:latin typeface="Calibri"/>
+                        </a:rPr>
+                        <a:t>The item has more than one valid answer, or the result is subjective or undetermined; or the target outcome is a question that names nothing to produce.</a:t>
+                      </a:r>
+                    </a:p>
+                  </a:txBody>
+                  <a:tcPr marL="91440" marR="91440" marT="36576" marB="36576" anchor="ctr">
+                    <a:lnB w="9525" cap="flat">
+                      <a:solidFill>
+                        <a:srgbClr val="EAD9DD"/>
+                      </a:solidFill>
+                    </a:lnB>
+                    <a:solidFill>
+                      <a:srgbClr val="F9F4F5"/>
+                    </a:solidFill>
+                  </a:tcPr>
+                </a:tc>
+                <a:tc>
+                  <a:txBody>
+                    <a:bodyPr wrap="square"/>
+                    <a:lstStyle/>
+                    <a:p>
+                      <a:pPr algn="l">
+                        <a:lnSpc>
+                          <a:spcPct val="100000"/>
+                        </a:lnSpc>
+                        <a:spcBef>
+                          <a:spcPts val="0"/>
+                        </a:spcBef>
+                        <a:spcAft>
+                          <a:spcPts val="100"/>
+                        </a:spcAft>
+                      </a:pPr>
+                      <a:r>
+                        <a:rPr sz="980" b="0" i="0">
+                          <a:solidFill>
+                            <a:srgbClr val="2B2126"/>
+                          </a:solidFill>
+                          <a:latin typeface="Calibri"/>
+                        </a:rPr>
+                        <a:t>Pose one concrete task that lands on a single correct final state, derivable from the sources, with at least one produced output.</a:t>
+                      </a:r>
+                    </a:p>
+                  </a:txBody>
+                  <a:tcPr marL="91440" marR="91440" marT="36576" marB="36576" anchor="ctr">
+                    <a:lnB w="9525" cap="flat">
+                      <a:solidFill>
+                        <a:srgbClr val="EAD9DD"/>
+                      </a:solidFill>
+                    </a:lnB>
+                    <a:solidFill>
+                      <a:srgbClr val="F9F4F5"/>
+                    </a:solidFill>
                   </a:tcPr>
                 </a:tc>
               </a:tr>
@@ -11494,8 +13810,8 @@
         </p:nvSpPr>
         <p:spPr>
           <a:xfrm>
-            <a:off x="566928" y="5440680"/>
-            <a:ext cx="11064240" cy="566928"/>
+            <a:off x="566928" y="5742432"/>
+            <a:ext cx="11064240" cy="512064"/>
           </a:xfrm>
           <a:prstGeom prst="roundRect">
             <a:avLst/>
@@ -11538,8 +13854,8 @@
         </p:nvSpPr>
         <p:spPr>
           <a:xfrm>
-            <a:off x="886968" y="5596128"/>
-            <a:ext cx="10424160" cy="292608"/>
+            <a:off x="886968" y="5897880"/>
+            <a:ext cx="10424160" cy="237744"/>
           </a:xfrm>
           <a:prstGeom prst="rect">
             <a:avLst/>
@@ -11878,14 +14194,14 @@
                     </a:p>
                   </a:txBody>
                   <a:tcPr marL="91440" marR="91440" marT="36576" marB="36576" anchor="ctr">
-                    <a:solidFill>
-                      <a:srgbClr val="6D2E46"/>
-                    </a:solidFill>
                     <a:lnB w="9525" cap="flat">
                       <a:solidFill>
                         <a:srgbClr val="6D2E46"/>
                       </a:solidFill>
                     </a:lnB>
+                    <a:solidFill>
+                      <a:srgbClr val="6D2E46"/>
+                    </a:solidFill>
                   </a:tcPr>
                 </a:tc>
                 <a:tc>
@@ -11916,14 +14232,14 @@
                     </a:p>
                   </a:txBody>
                   <a:tcPr marL="91440" marR="91440" marT="36576" marB="36576" anchor="ctr">
-                    <a:solidFill>
-                      <a:srgbClr val="6D2E46"/>
-                    </a:solidFill>
                     <a:lnB w="9525" cap="flat">
                       <a:solidFill>
                         <a:srgbClr val="6D2E46"/>
                       </a:solidFill>
                     </a:lnB>
+                    <a:solidFill>
+                      <a:srgbClr val="6D2E46"/>
+                    </a:solidFill>
                   </a:tcPr>
                 </a:tc>
                 <a:tc>
@@ -11954,14 +14270,14 @@
                     </a:p>
                   </a:txBody>
                   <a:tcPr marL="91440" marR="91440" marT="36576" marB="36576" anchor="ctr">
-                    <a:solidFill>
-                      <a:srgbClr val="6D2E46"/>
-                    </a:solidFill>
                     <a:lnB w="9525" cap="flat">
                       <a:solidFill>
                         <a:srgbClr val="6D2E46"/>
                       </a:solidFill>
                     </a:lnB>
+                    <a:solidFill>
+                      <a:srgbClr val="6D2E46"/>
+                    </a:solidFill>
                   </a:tcPr>
                 </a:tc>
               </a:tr>
@@ -11994,14 +14310,14 @@
                     </a:p>
                   </a:txBody>
                   <a:tcPr marL="91440" marR="91440" marT="36576" marB="36576" anchor="ctr">
-                    <a:solidFill>
-                      <a:srgbClr val="FFFFFF"/>
-                    </a:solidFill>
                     <a:lnB w="9525" cap="flat">
                       <a:solidFill>
                         <a:srgbClr val="EAD9DD"/>
                       </a:solidFill>
                     </a:lnB>
+                    <a:solidFill>
+                      <a:srgbClr val="FFFFFF"/>
+                    </a:solidFill>
                   </a:tcPr>
                 </a:tc>
                 <a:tc>
@@ -12032,14 +14348,14 @@
                     </a:p>
                   </a:txBody>
                   <a:tcPr marL="91440" marR="91440" marT="36576" marB="36576" anchor="ctr">
-                    <a:solidFill>
-                      <a:srgbClr val="FFFFFF"/>
-                    </a:solidFill>
                     <a:lnB w="9525" cap="flat">
                       <a:solidFill>
                         <a:srgbClr val="EAD9DD"/>
                       </a:solidFill>
                     </a:lnB>
+                    <a:solidFill>
+                      <a:srgbClr val="FFFFFF"/>
+                    </a:solidFill>
                   </a:tcPr>
                 </a:tc>
                 <a:tc>
@@ -12070,14 +14386,14 @@
                     </a:p>
                   </a:txBody>
                   <a:tcPr marL="91440" marR="91440" marT="36576" marB="36576" anchor="ctr">
-                    <a:solidFill>
-                      <a:srgbClr val="FFFFFF"/>
-                    </a:solidFill>
                     <a:lnB w="9525" cap="flat">
                       <a:solidFill>
                         <a:srgbClr val="EAD9DD"/>
                       </a:solidFill>
                     </a:lnB>
+                    <a:solidFill>
+                      <a:srgbClr val="FFFFFF"/>
+                    </a:solidFill>
                   </a:tcPr>
                 </a:tc>
               </a:tr>
@@ -12110,14 +14426,14 @@
                     </a:p>
                   </a:txBody>
                   <a:tcPr marL="91440" marR="91440" marT="36576" marB="36576" anchor="ctr">
-                    <a:solidFill>
-                      <a:srgbClr val="F9F4F5"/>
-                    </a:solidFill>
                     <a:lnB w="9525" cap="flat">
                       <a:solidFill>
                         <a:srgbClr val="EAD9DD"/>
                       </a:solidFill>
                     </a:lnB>
+                    <a:solidFill>
+                      <a:srgbClr val="F9F4F5"/>
+                    </a:solidFill>
                   </a:tcPr>
                 </a:tc>
                 <a:tc>
@@ -12148,14 +14464,14 @@
                     </a:p>
                   </a:txBody>
                   <a:tcPr marL="91440" marR="91440" marT="36576" marB="36576" anchor="ctr">
-                    <a:solidFill>
-                      <a:srgbClr val="F9F4F5"/>
-                    </a:solidFill>
                     <a:lnB w="9525" cap="flat">
                       <a:solidFill>
                         <a:srgbClr val="EAD9DD"/>
                       </a:solidFill>
                     </a:lnB>
+                    <a:solidFill>
+                      <a:srgbClr val="F9F4F5"/>
+                    </a:solidFill>
                   </a:tcPr>
                 </a:tc>
                 <a:tc>
@@ -12186,14 +14502,14 @@
                     </a:p>
                   </a:txBody>
                   <a:tcPr marL="91440" marR="91440" marT="36576" marB="36576" anchor="ctr">
-                    <a:solidFill>
-                      <a:srgbClr val="F9F4F5"/>
-                    </a:solidFill>
                     <a:lnB w="9525" cap="flat">
                       <a:solidFill>
                         <a:srgbClr val="EAD9DD"/>
                       </a:solidFill>
                     </a:lnB>
+                    <a:solidFill>
+                      <a:srgbClr val="F9F4F5"/>
+                    </a:solidFill>
                   </a:tcPr>
                 </a:tc>
               </a:tr>
@@ -12226,14 +14542,14 @@
                     </a:p>
                   </a:txBody>
                   <a:tcPr marL="91440" marR="91440" marT="36576" marB="36576" anchor="ctr">
-                    <a:solidFill>
-                      <a:srgbClr val="FFFFFF"/>
-                    </a:solidFill>
                     <a:lnB w="9525" cap="flat">
                       <a:solidFill>
                         <a:srgbClr val="EAD9DD"/>
                       </a:solidFill>
                     </a:lnB>
+                    <a:solidFill>
+                      <a:srgbClr val="FFFFFF"/>
+                    </a:solidFill>
                   </a:tcPr>
                 </a:tc>
                 <a:tc>
@@ -12264,14 +14580,14 @@
                     </a:p>
                   </a:txBody>
                   <a:tcPr marL="91440" marR="91440" marT="36576" marB="36576" anchor="ctr">
-                    <a:solidFill>
-                      <a:srgbClr val="FFFFFF"/>
-                    </a:solidFill>
                     <a:lnB w="9525" cap="flat">
                       <a:solidFill>
                         <a:srgbClr val="EAD9DD"/>
                       </a:solidFill>
                     </a:lnB>
+                    <a:solidFill>
+                      <a:srgbClr val="FFFFFF"/>
+                    </a:solidFill>
                   </a:tcPr>
                 </a:tc>
                 <a:tc>
@@ -12302,14 +14618,14 @@
                     </a:p>
                   </a:txBody>
                   <a:tcPr marL="91440" marR="91440" marT="36576" marB="36576" anchor="ctr">
-                    <a:solidFill>
-                      <a:srgbClr val="FFFFFF"/>
-                    </a:solidFill>
                     <a:lnB w="9525" cap="flat">
                       <a:solidFill>
                         <a:srgbClr val="EAD9DD"/>
                       </a:solidFill>
                     </a:lnB>
+                    <a:solidFill>
+                      <a:srgbClr val="FFFFFF"/>
+                    </a:solidFill>
                   </a:tcPr>
                 </a:tc>
               </a:tr>
@@ -12342,14 +14658,14 @@
                     </a:p>
                   </a:txBody>
                   <a:tcPr marL="91440" marR="91440" marT="36576" marB="36576" anchor="ctr">
-                    <a:solidFill>
-                      <a:srgbClr val="F9F4F5"/>
-                    </a:solidFill>
                     <a:lnB w="9525" cap="flat">
                       <a:solidFill>
                         <a:srgbClr val="EAD9DD"/>
                       </a:solidFill>
                     </a:lnB>
+                    <a:solidFill>
+                      <a:srgbClr val="F9F4F5"/>
+                    </a:solidFill>
                   </a:tcPr>
                 </a:tc>
                 <a:tc>
@@ -12380,14 +14696,14 @@
                     </a:p>
                   </a:txBody>
                   <a:tcPr marL="91440" marR="91440" marT="36576" marB="36576" anchor="ctr">
-                    <a:solidFill>
-                      <a:srgbClr val="F9F4F5"/>
-                    </a:solidFill>
                     <a:lnB w="9525" cap="flat">
                       <a:solidFill>
                         <a:srgbClr val="EAD9DD"/>
                       </a:solidFill>
                     </a:lnB>
+                    <a:solidFill>
+                      <a:srgbClr val="F9F4F5"/>
+                    </a:solidFill>
                   </a:tcPr>
                 </a:tc>
                 <a:tc>
@@ -12418,14 +14734,14 @@
                     </a:p>
                   </a:txBody>
                   <a:tcPr marL="91440" marR="91440" marT="36576" marB="36576" anchor="ctr">
-                    <a:solidFill>
-                      <a:srgbClr val="F9F4F5"/>
-                    </a:solidFill>
                     <a:lnB w="9525" cap="flat">
                       <a:solidFill>
                         <a:srgbClr val="EAD9DD"/>
                       </a:solidFill>
                     </a:lnB>
+                    <a:solidFill>
+                      <a:srgbClr val="F9F4F5"/>
+                    </a:solidFill>
                   </a:tcPr>
                 </a:tc>
               </a:tr>
@@ -12458,14 +14774,14 @@
                     </a:p>
                   </a:txBody>
                   <a:tcPr marL="91440" marR="91440" marT="36576" marB="36576" anchor="ctr">
-                    <a:solidFill>
-                      <a:srgbClr val="FFFFFF"/>
-                    </a:solidFill>
                     <a:lnB w="9525" cap="flat">
                       <a:solidFill>
                         <a:srgbClr val="EAD9DD"/>
                       </a:solidFill>
                     </a:lnB>
+                    <a:solidFill>
+                      <a:srgbClr val="FFFFFF"/>
+                    </a:solidFill>
                   </a:tcPr>
                 </a:tc>
                 <a:tc>
@@ -12496,14 +14812,14 @@
                     </a:p>
                   </a:txBody>
                   <a:tcPr marL="91440" marR="91440" marT="36576" marB="36576" anchor="ctr">
-                    <a:solidFill>
-                      <a:srgbClr val="FFFFFF"/>
-                    </a:solidFill>
                     <a:lnB w="9525" cap="flat">
                       <a:solidFill>
                         <a:srgbClr val="EAD9DD"/>
                       </a:solidFill>
                     </a:lnB>
+                    <a:solidFill>
+                      <a:srgbClr val="FFFFFF"/>
+                    </a:solidFill>
                   </a:tcPr>
                 </a:tc>
                 <a:tc>
@@ -12534,14 +14850,14 @@
                     </a:p>
                   </a:txBody>
                   <a:tcPr marL="91440" marR="91440" marT="36576" marB="36576" anchor="ctr">
-                    <a:solidFill>
-                      <a:srgbClr val="FFFFFF"/>
-                    </a:solidFill>
                     <a:lnB w="9525" cap="flat">
                       <a:solidFill>
                         <a:srgbClr val="EAD9DD"/>
                       </a:solidFill>
                     </a:lnB>
+                    <a:solidFill>
+                      <a:srgbClr val="FFFFFF"/>
+                    </a:solidFill>
                   </a:tcPr>
                 </a:tc>
               </a:tr>
@@ -12574,14 +14890,14 @@
                     </a:p>
                   </a:txBody>
                   <a:tcPr marL="91440" marR="91440" marT="36576" marB="36576" anchor="ctr">
-                    <a:solidFill>
-                      <a:srgbClr val="F9F4F5"/>
-                    </a:solidFill>
                     <a:lnB w="9525" cap="flat">
                       <a:solidFill>
                         <a:srgbClr val="EAD9DD"/>
                       </a:solidFill>
                     </a:lnB>
+                    <a:solidFill>
+                      <a:srgbClr val="F9F4F5"/>
+                    </a:solidFill>
                   </a:tcPr>
                 </a:tc>
                 <a:tc>
@@ -12612,14 +14928,14 @@
                     </a:p>
                   </a:txBody>
                   <a:tcPr marL="91440" marR="91440" marT="36576" marB="36576" anchor="ctr">
-                    <a:solidFill>
-                      <a:srgbClr val="F9F4F5"/>
-                    </a:solidFill>
                     <a:lnB w="9525" cap="flat">
                       <a:solidFill>
                         <a:srgbClr val="EAD9DD"/>
                       </a:solidFill>
                     </a:lnB>
+                    <a:solidFill>
+                      <a:srgbClr val="F9F4F5"/>
+                    </a:solidFill>
                   </a:tcPr>
                 </a:tc>
                 <a:tc>
@@ -12650,14 +14966,14 @@
                     </a:p>
                   </a:txBody>
                   <a:tcPr marL="91440" marR="91440" marT="36576" marB="36576" anchor="ctr">
-                    <a:solidFill>
-                      <a:srgbClr val="F9F4F5"/>
-                    </a:solidFill>
                     <a:lnB w="9525" cap="flat">
                       <a:solidFill>
                         <a:srgbClr val="EAD9DD"/>
                       </a:solidFill>
                     </a:lnB>
+                    <a:solidFill>
+                      <a:srgbClr val="F9F4F5"/>
+                    </a:solidFill>
                   </a:tcPr>
                 </a:tc>
               </a:tr>
@@ -13000,7 +15316,7 @@
                 </a:solidFill>
                 <a:latin typeface="Calibri"/>
               </a:rPr>
-              <a:t>Every criterion is binary, observable, atomic, positive, product-independent and self-contained, in the simple present tense (States, Includes, Reports…). Weights are only +1, +2, +3.</a:t>
+              <a:t>Every criterion is binary, observable, atomic, positive, product-independent, self-contained and written in English, in the simple present tense (States, Includes, Reports…). Weights are only +1, +2, +3.</a:t>
             </a:r>
           </a:p>
         </p:txBody>
@@ -13014,8 +15330,8 @@
           <p:nvPr/>
         </p:nvGraphicFramePr>
         <p:xfrm>
-          <a:off x="566928" y="1901952"/>
-          <a:ext cx="11064240" cy="3767328"/>
+          <a:off x="566928" y="1847088"/>
+          <a:ext cx="11064240" cy="3867912"/>
         </p:xfrm>
         <a:graphic>
           <a:graphicData uri="http://schemas.openxmlformats.org/drawingml/2006/table">
@@ -13028,7 +15344,7 @@
                 <a:gridCol w="4160520"/>
                 <a:gridCol w="4160520"/>
               </a:tblGrid>
-              <a:tr h="365760">
+              <a:tr h="347472">
                 <a:tc>
                   <a:txBody>
                     <a:bodyPr wrap="square"/>
@@ -13057,14 +15373,14 @@
                     </a:p>
                   </a:txBody>
                   <a:tcPr marL="91440" marR="91440" marT="36576" marB="36576" anchor="ctr">
-                    <a:solidFill>
-                      <a:srgbClr val="6D2E46"/>
-                    </a:solidFill>
                     <a:lnB w="9525" cap="flat">
                       <a:solidFill>
                         <a:srgbClr val="6D2E46"/>
                       </a:solidFill>
                     </a:lnB>
+                    <a:solidFill>
+                      <a:srgbClr val="6D2E46"/>
+                    </a:solidFill>
                   </a:tcPr>
                 </a:tc>
                 <a:tc>
@@ -13095,14 +15411,14 @@
                     </a:p>
                   </a:txBody>
                   <a:tcPr marL="91440" marR="91440" marT="36576" marB="36576" anchor="ctr">
-                    <a:solidFill>
-                      <a:srgbClr val="6D2E46"/>
-                    </a:solidFill>
                     <a:lnB w="9525" cap="flat">
                       <a:solidFill>
                         <a:srgbClr val="6D2E46"/>
                       </a:solidFill>
                     </a:lnB>
+                    <a:solidFill>
+                      <a:srgbClr val="6D2E46"/>
+                    </a:solidFill>
                   </a:tcPr>
                 </a:tc>
                 <a:tc>
@@ -13133,18 +15449,18 @@
                     </a:p>
                   </a:txBody>
                   <a:tcPr marL="91440" marR="91440" marT="36576" marB="36576" anchor="ctr">
-                    <a:solidFill>
-                      <a:srgbClr val="6D2E46"/>
-                    </a:solidFill>
                     <a:lnB w="9525" cap="flat">
                       <a:solidFill>
                         <a:srgbClr val="6D2E46"/>
                       </a:solidFill>
                     </a:lnB>
+                    <a:solidFill>
+                      <a:srgbClr val="6D2E46"/>
+                    </a:solidFill>
                   </a:tcPr>
                 </a:tc>
               </a:tr>
-              <a:tr h="566928">
+              <a:tr h="502920">
                 <a:tc>
                   <a:txBody>
                     <a:bodyPr wrap="square"/>
@@ -13173,14 +15489,14 @@
                     </a:p>
                   </a:txBody>
                   <a:tcPr marL="91440" marR="91440" marT="36576" marB="36576" anchor="ctr">
-                    <a:solidFill>
-                      <a:srgbClr val="FFFFFF"/>
-                    </a:solidFill>
                     <a:lnB w="9525" cap="flat">
                       <a:solidFill>
                         <a:srgbClr val="EAD9DD"/>
                       </a:solidFill>
                     </a:lnB>
+                    <a:solidFill>
+                      <a:srgbClr val="FFFFFF"/>
+                    </a:solidFill>
                   </a:tcPr>
                 </a:tc>
                 <a:tc>
@@ -13211,14 +15527,14 @@
                     </a:p>
                   </a:txBody>
                   <a:tcPr marL="91440" marR="91440" marT="36576" marB="36576" anchor="ctr">
-                    <a:solidFill>
-                      <a:srgbClr val="FFFFFF"/>
-                    </a:solidFill>
                     <a:lnB w="9525" cap="flat">
                       <a:solidFill>
                         <a:srgbClr val="EAD9DD"/>
                       </a:solidFill>
                     </a:lnB>
+                    <a:solidFill>
+                      <a:srgbClr val="FFFFFF"/>
+                    </a:solidFill>
                   </a:tcPr>
                 </a:tc>
                 <a:tc>
@@ -13249,18 +15565,18 @@
                     </a:p>
                   </a:txBody>
                   <a:tcPr marL="91440" marR="91440" marT="36576" marB="36576" anchor="ctr">
-                    <a:solidFill>
-                      <a:srgbClr val="FFFFFF"/>
-                    </a:solidFill>
                     <a:lnB w="9525" cap="flat">
                       <a:solidFill>
                         <a:srgbClr val="EAD9DD"/>
                       </a:solidFill>
                     </a:lnB>
+                    <a:solidFill>
+                      <a:srgbClr val="FFFFFF"/>
+                    </a:solidFill>
                   </a:tcPr>
                 </a:tc>
               </a:tr>
-              <a:tr h="566928">
+              <a:tr h="502920">
                 <a:tc>
                   <a:txBody>
                     <a:bodyPr wrap="square"/>
@@ -13289,14 +15605,14 @@
                     </a:p>
                   </a:txBody>
                   <a:tcPr marL="91440" marR="91440" marT="36576" marB="36576" anchor="ctr">
-                    <a:solidFill>
-                      <a:srgbClr val="F9F4F5"/>
-                    </a:solidFill>
                     <a:lnB w="9525" cap="flat">
                       <a:solidFill>
                         <a:srgbClr val="EAD9DD"/>
                       </a:solidFill>
                     </a:lnB>
+                    <a:solidFill>
+                      <a:srgbClr val="F9F4F5"/>
+                    </a:solidFill>
                   </a:tcPr>
                 </a:tc>
                 <a:tc>
@@ -13327,14 +15643,14 @@
                     </a:p>
                   </a:txBody>
                   <a:tcPr marL="91440" marR="91440" marT="36576" marB="36576" anchor="ctr">
-                    <a:solidFill>
-                      <a:srgbClr val="F9F4F5"/>
-                    </a:solidFill>
                     <a:lnB w="9525" cap="flat">
                       <a:solidFill>
                         <a:srgbClr val="EAD9DD"/>
                       </a:solidFill>
                     </a:lnB>
+                    <a:solidFill>
+                      <a:srgbClr val="F9F4F5"/>
+                    </a:solidFill>
                   </a:tcPr>
                 </a:tc>
                 <a:tc>
@@ -13365,18 +15681,18 @@
                     </a:p>
                   </a:txBody>
                   <a:tcPr marL="91440" marR="91440" marT="36576" marB="36576" anchor="ctr">
-                    <a:solidFill>
-                      <a:srgbClr val="F9F4F5"/>
-                    </a:solidFill>
                     <a:lnB w="9525" cap="flat">
                       <a:solidFill>
                         <a:srgbClr val="EAD9DD"/>
                       </a:solidFill>
                     </a:lnB>
+                    <a:solidFill>
+                      <a:srgbClr val="F9F4F5"/>
+                    </a:solidFill>
                   </a:tcPr>
                 </a:tc>
               </a:tr>
-              <a:tr h="566928">
+              <a:tr h="502920">
                 <a:tc>
                   <a:txBody>
                     <a:bodyPr wrap="square"/>
@@ -13405,14 +15721,14 @@
                     </a:p>
                   </a:txBody>
                   <a:tcPr marL="91440" marR="91440" marT="36576" marB="36576" anchor="ctr">
-                    <a:solidFill>
-                      <a:srgbClr val="FFFFFF"/>
-                    </a:solidFill>
                     <a:lnB w="9525" cap="flat">
                       <a:solidFill>
                         <a:srgbClr val="EAD9DD"/>
                       </a:solidFill>
                     </a:lnB>
+                    <a:solidFill>
+                      <a:srgbClr val="FFFFFF"/>
+                    </a:solidFill>
                   </a:tcPr>
                 </a:tc>
                 <a:tc>
@@ -13443,14 +15759,14 @@
                     </a:p>
                   </a:txBody>
                   <a:tcPr marL="91440" marR="91440" marT="36576" marB="36576" anchor="ctr">
-                    <a:solidFill>
-                      <a:srgbClr val="FFFFFF"/>
-                    </a:solidFill>
                     <a:lnB w="9525" cap="flat">
                       <a:solidFill>
                         <a:srgbClr val="EAD9DD"/>
                       </a:solidFill>
                     </a:lnB>
+                    <a:solidFill>
+                      <a:srgbClr val="FFFFFF"/>
+                    </a:solidFill>
                   </a:tcPr>
                 </a:tc>
                 <a:tc>
@@ -13481,18 +15797,18 @@
                     </a:p>
                   </a:txBody>
                   <a:tcPr marL="91440" marR="91440" marT="36576" marB="36576" anchor="ctr">
-                    <a:solidFill>
-                      <a:srgbClr val="FFFFFF"/>
-                    </a:solidFill>
                     <a:lnB w="9525" cap="flat">
                       <a:solidFill>
                         <a:srgbClr val="EAD9DD"/>
                       </a:solidFill>
                     </a:lnB>
+                    <a:solidFill>
+                      <a:srgbClr val="FFFFFF"/>
+                    </a:solidFill>
                   </a:tcPr>
                 </a:tc>
               </a:tr>
-              <a:tr h="566928">
+              <a:tr h="502920">
                 <a:tc>
                   <a:txBody>
                     <a:bodyPr wrap="square"/>
@@ -13521,14 +15837,14 @@
                     </a:p>
                   </a:txBody>
                   <a:tcPr marL="91440" marR="91440" marT="36576" marB="36576" anchor="ctr">
-                    <a:solidFill>
-                      <a:srgbClr val="F9F4F5"/>
-                    </a:solidFill>
                     <a:lnB w="9525" cap="flat">
                       <a:solidFill>
                         <a:srgbClr val="EAD9DD"/>
                       </a:solidFill>
                     </a:lnB>
+                    <a:solidFill>
+                      <a:srgbClr val="F9F4F5"/>
+                    </a:solidFill>
                   </a:tcPr>
                 </a:tc>
                 <a:tc>
@@ -13559,14 +15875,14 @@
                     </a:p>
                   </a:txBody>
                   <a:tcPr marL="91440" marR="91440" marT="36576" marB="36576" anchor="ctr">
-                    <a:solidFill>
-                      <a:srgbClr val="F9F4F5"/>
-                    </a:solidFill>
                     <a:lnB w="9525" cap="flat">
                       <a:solidFill>
                         <a:srgbClr val="EAD9DD"/>
                       </a:solidFill>
                     </a:lnB>
+                    <a:solidFill>
+                      <a:srgbClr val="F9F4F5"/>
+                    </a:solidFill>
                   </a:tcPr>
                 </a:tc>
                 <a:tc>
@@ -13597,18 +15913,18 @@
                     </a:p>
                   </a:txBody>
                   <a:tcPr marL="91440" marR="91440" marT="36576" marB="36576" anchor="ctr">
-                    <a:solidFill>
-                      <a:srgbClr val="F9F4F5"/>
-                    </a:solidFill>
                     <a:lnB w="9525" cap="flat">
                       <a:solidFill>
                         <a:srgbClr val="EAD9DD"/>
                       </a:solidFill>
                     </a:lnB>
+                    <a:solidFill>
+                      <a:srgbClr val="F9F4F5"/>
+                    </a:solidFill>
                   </a:tcPr>
                 </a:tc>
               </a:tr>
-              <a:tr h="566928">
+              <a:tr h="502920">
                 <a:tc>
                   <a:txBody>
                     <a:bodyPr wrap="square"/>
@@ -13637,14 +15953,14 @@
                     </a:p>
                   </a:txBody>
                   <a:tcPr marL="91440" marR="91440" marT="36576" marB="36576" anchor="ctr">
-                    <a:solidFill>
-                      <a:srgbClr val="FFFFFF"/>
-                    </a:solidFill>
                     <a:lnB w="9525" cap="flat">
                       <a:solidFill>
                         <a:srgbClr val="EAD9DD"/>
                       </a:solidFill>
                     </a:lnB>
+                    <a:solidFill>
+                      <a:srgbClr val="FFFFFF"/>
+                    </a:solidFill>
                   </a:tcPr>
                 </a:tc>
                 <a:tc>
@@ -13675,14 +15991,14 @@
                     </a:p>
                   </a:txBody>
                   <a:tcPr marL="91440" marR="91440" marT="36576" marB="36576" anchor="ctr">
-                    <a:solidFill>
-                      <a:srgbClr val="FFFFFF"/>
-                    </a:solidFill>
                     <a:lnB w="9525" cap="flat">
                       <a:solidFill>
                         <a:srgbClr val="EAD9DD"/>
                       </a:solidFill>
                     </a:lnB>
+                    <a:solidFill>
+                      <a:srgbClr val="FFFFFF"/>
+                    </a:solidFill>
                   </a:tcPr>
                 </a:tc>
                 <a:tc>
@@ -13713,18 +16029,18 @@
                     </a:p>
                   </a:txBody>
                   <a:tcPr marL="91440" marR="91440" marT="36576" marB="36576" anchor="ctr">
-                    <a:solidFill>
-                      <a:srgbClr val="FFFFFF"/>
-                    </a:solidFill>
                     <a:lnB w="9525" cap="flat">
                       <a:solidFill>
                         <a:srgbClr val="EAD9DD"/>
                       </a:solidFill>
                     </a:lnB>
+                    <a:solidFill>
+                      <a:srgbClr val="FFFFFF"/>
+                    </a:solidFill>
                   </a:tcPr>
                 </a:tc>
               </a:tr>
-              <a:tr h="566928">
+              <a:tr h="502920">
                 <a:tc>
                   <a:txBody>
                     <a:bodyPr wrap="square"/>
@@ -13753,14 +16069,14 @@
                     </a:p>
                   </a:txBody>
                   <a:tcPr marL="91440" marR="91440" marT="36576" marB="36576" anchor="ctr">
-                    <a:solidFill>
-                      <a:srgbClr val="F9F4F5"/>
-                    </a:solidFill>
                     <a:lnB w="9525" cap="flat">
                       <a:solidFill>
                         <a:srgbClr val="EAD9DD"/>
                       </a:solidFill>
                     </a:lnB>
+                    <a:solidFill>
+                      <a:srgbClr val="F9F4F5"/>
+                    </a:solidFill>
                   </a:tcPr>
                 </a:tc>
                 <a:tc>
@@ -13791,14 +16107,14 @@
                     </a:p>
                   </a:txBody>
                   <a:tcPr marL="91440" marR="91440" marT="36576" marB="36576" anchor="ctr">
-                    <a:solidFill>
-                      <a:srgbClr val="F9F4F5"/>
-                    </a:solidFill>
                     <a:lnB w="9525" cap="flat">
                       <a:solidFill>
                         <a:srgbClr val="EAD9DD"/>
                       </a:solidFill>
                     </a:lnB>
+                    <a:solidFill>
+                      <a:srgbClr val="F9F4F5"/>
+                    </a:solidFill>
                   </a:tcPr>
                 </a:tc>
                 <a:tc>
@@ -13829,14 +16145,130 @@
                     </a:p>
                   </a:txBody>
                   <a:tcPr marL="91440" marR="91440" marT="36576" marB="36576" anchor="ctr">
-                    <a:solidFill>
-                      <a:srgbClr val="F9F4F5"/>
-                    </a:solidFill>
                     <a:lnB w="9525" cap="flat">
                       <a:solidFill>
                         <a:srgbClr val="EAD9DD"/>
                       </a:solidFill>
                     </a:lnB>
+                    <a:solidFill>
+                      <a:srgbClr val="F9F4F5"/>
+                    </a:solidFill>
+                  </a:tcPr>
+                </a:tc>
+              </a:tr>
+              <a:tr h="502920">
+                <a:tc>
+                  <a:txBody>
+                    <a:bodyPr wrap="square"/>
+                    <a:lstStyle/>
+                    <a:p>
+                      <a:pPr algn="l">
+                        <a:lnSpc>
+                          <a:spcPct val="100000"/>
+                        </a:lnSpc>
+                        <a:spcBef>
+                          <a:spcPts val="0"/>
+                        </a:spcBef>
+                        <a:spcAft>
+                          <a:spcPts val="100"/>
+                        </a:spcAft>
+                      </a:pPr>
+                      <a:r>
+                        <a:rPr sz="1019" b="1" i="0">
+                          <a:solidFill>
+                            <a:srgbClr val="6D2E46"/>
+                          </a:solidFill>
+                          <a:latin typeface="Calibri"/>
+                        </a:rPr>
+                        <a:t>Rubric not in English</a:t>
+                      </a:r>
+                    </a:p>
+                  </a:txBody>
+                  <a:tcPr marL="91440" marR="91440" marT="36576" marB="36576" anchor="ctr">
+                    <a:lnB w="9525" cap="flat">
+                      <a:solidFill>
+                        <a:srgbClr val="EAD9DD"/>
+                      </a:solidFill>
+                    </a:lnB>
+                    <a:solidFill>
+                      <a:srgbClr val="FFFFFF"/>
+                    </a:solidFill>
+                  </a:tcPr>
+                </a:tc>
+                <a:tc>
+                  <a:txBody>
+                    <a:bodyPr wrap="square"/>
+                    <a:lstStyle/>
+                    <a:p>
+                      <a:pPr algn="l">
+                        <a:lnSpc>
+                          <a:spcPct val="100000"/>
+                        </a:lnSpc>
+                        <a:spcBef>
+                          <a:spcPts val="0"/>
+                        </a:spcBef>
+                        <a:spcAft>
+                          <a:spcPts val="100"/>
+                        </a:spcAft>
+                      </a:pPr>
+                      <a:r>
+                        <a:rPr sz="960" b="0" i="0">
+                          <a:solidFill>
+                            <a:srgbClr val="A2433E"/>
+                          </a:solidFill>
+                          <a:latin typeface="Calibri"/>
+                        </a:rPr>
+                        <a:t>Criteria and justifications written in Japanese, Korean or German.</a:t>
+                      </a:r>
+                    </a:p>
+                  </a:txBody>
+                  <a:tcPr marL="91440" marR="91440" marT="36576" marB="36576" anchor="ctr">
+                    <a:lnB w="9525" cap="flat">
+                      <a:solidFill>
+                        <a:srgbClr val="EAD9DD"/>
+                      </a:solidFill>
+                    </a:lnB>
+                    <a:solidFill>
+                      <a:srgbClr val="FFFFFF"/>
+                    </a:solidFill>
+                  </a:tcPr>
+                </a:tc>
+                <a:tc>
+                  <a:txBody>
+                    <a:bodyPr wrap="square"/>
+                    <a:lstStyle/>
+                    <a:p>
+                      <a:pPr algn="l">
+                        <a:lnSpc>
+                          <a:spcPct val="100000"/>
+                        </a:lnSpc>
+                        <a:spcBef>
+                          <a:spcPts val="0"/>
+                        </a:spcBef>
+                        <a:spcAft>
+                          <a:spcPts val="100"/>
+                        </a:spcAft>
+                      </a:pPr>
+                      <a:r>
+                        <a:rPr sz="960" b="0" i="0">
+                          <a:solidFill>
+                            <a:srgbClr val="5B6E2F"/>
+                          </a:solidFill>
+                          <a:latin typeface="Calibri"/>
+                        </a:rPr>
+                        <a:t>Written in English; keep local names, dates and currency as they appear.</a:t>
+                      </a:r>
+                    </a:p>
+                  </a:txBody>
+                  <a:tcPr marL="91440" marR="91440" marT="36576" marB="36576" anchor="ctr">
+                    <a:lnB w="9525" cap="flat">
+                      <a:solidFill>
+                        <a:srgbClr val="EAD9DD"/>
+                      </a:solidFill>
+                    </a:lnB>
+                    <a:solidFill>
+                      <a:srgbClr val="FFFFFF"/>
+                    </a:solidFill>
                   </a:tcPr>
                 </a:tc>
               </a:tr>
@@ -13852,8 +16284,8 @@
         </p:nvSpPr>
         <p:spPr>
           <a:xfrm>
-            <a:off x="566928" y="5760720"/>
-            <a:ext cx="11064240" cy="566928"/>
+            <a:off x="566928" y="5797296"/>
+            <a:ext cx="11064240" cy="493776"/>
           </a:xfrm>
           <a:prstGeom prst="roundRect">
             <a:avLst/>
@@ -13896,8 +16328,8 @@
         </p:nvSpPr>
         <p:spPr>
           <a:xfrm>
-            <a:off x="886968" y="5916168"/>
-            <a:ext cx="10424160" cy="292608"/>
+            <a:off x="886968" y="5952744"/>
+            <a:ext cx="10424160" cy="219456"/>
           </a:xfrm>
           <a:prstGeom prst="rect">
             <a:avLst/>
@@ -15048,14 +17480,14 @@
                     </a:p>
                   </a:txBody>
                   <a:tcPr marL="91440" marR="91440" marT="36576" marB="36576" anchor="ctr">
-                    <a:solidFill>
-                      <a:srgbClr val="6D2E46"/>
-                    </a:solidFill>
                     <a:lnB w="9525" cap="flat">
                       <a:solidFill>
                         <a:srgbClr val="6D2E46"/>
                       </a:solidFill>
                     </a:lnB>
+                    <a:solidFill>
+                      <a:srgbClr val="6D2E46"/>
+                    </a:solidFill>
                   </a:tcPr>
                 </a:tc>
                 <a:tc>
@@ -15086,14 +17518,14 @@
                     </a:p>
                   </a:txBody>
                   <a:tcPr marL="91440" marR="91440" marT="36576" marB="36576" anchor="ctr">
-                    <a:solidFill>
-                      <a:srgbClr val="6D2E46"/>
-                    </a:solidFill>
                     <a:lnB w="9525" cap="flat">
                       <a:solidFill>
                         <a:srgbClr val="6D2E46"/>
                       </a:solidFill>
                     </a:lnB>
+                    <a:solidFill>
+                      <a:srgbClr val="6D2E46"/>
+                    </a:solidFill>
                   </a:tcPr>
                 </a:tc>
                 <a:tc>
@@ -15124,14 +17556,14 @@
                     </a:p>
                   </a:txBody>
                   <a:tcPr marL="91440" marR="91440" marT="36576" marB="36576" anchor="ctr">
-                    <a:solidFill>
-                      <a:srgbClr val="6D2E46"/>
-                    </a:solidFill>
                     <a:lnB w="9525" cap="flat">
                       <a:solidFill>
                         <a:srgbClr val="6D2E46"/>
                       </a:solidFill>
                     </a:lnB>
+                    <a:solidFill>
+                      <a:srgbClr val="6D2E46"/>
+                    </a:solidFill>
                   </a:tcPr>
                 </a:tc>
               </a:tr>
@@ -15164,14 +17596,14 @@
                     </a:p>
                   </a:txBody>
                   <a:tcPr marL="91440" marR="91440" marT="36576" marB="36576" anchor="ctr">
-                    <a:solidFill>
-                      <a:srgbClr val="FFFFFF"/>
-                    </a:solidFill>
                     <a:lnB w="9525" cap="flat">
                       <a:solidFill>
                         <a:srgbClr val="EAD9DD"/>
                       </a:solidFill>
                     </a:lnB>
+                    <a:solidFill>
+                      <a:srgbClr val="FFFFFF"/>
+                    </a:solidFill>
                   </a:tcPr>
                 </a:tc>
                 <a:tc>
@@ -15202,14 +17634,14 @@
                     </a:p>
                   </a:txBody>
                   <a:tcPr marL="91440" marR="91440" marT="36576" marB="36576" anchor="ctr">
-                    <a:solidFill>
-                      <a:srgbClr val="FFFFFF"/>
-                    </a:solidFill>
                     <a:lnB w="9525" cap="flat">
                       <a:solidFill>
                         <a:srgbClr val="EAD9DD"/>
                       </a:solidFill>
                     </a:lnB>
+                    <a:solidFill>
+                      <a:srgbClr val="FFFFFF"/>
+                    </a:solidFill>
                   </a:tcPr>
                 </a:tc>
                 <a:tc>
@@ -15240,14 +17672,14 @@
                     </a:p>
                   </a:txBody>
                   <a:tcPr marL="91440" marR="91440" marT="36576" marB="36576" anchor="ctr">
-                    <a:solidFill>
-                      <a:srgbClr val="FFFFFF"/>
-                    </a:solidFill>
                     <a:lnB w="9525" cap="flat">
                       <a:solidFill>
                         <a:srgbClr val="EAD9DD"/>
                       </a:solidFill>
                     </a:lnB>
+                    <a:solidFill>
+                      <a:srgbClr val="FFFFFF"/>
+                    </a:solidFill>
                   </a:tcPr>
                 </a:tc>
               </a:tr>
@@ -15280,14 +17712,14 @@
                     </a:p>
                   </a:txBody>
                   <a:tcPr marL="91440" marR="91440" marT="36576" marB="36576" anchor="ctr">
-                    <a:solidFill>
-                      <a:srgbClr val="F9F4F5"/>
-                    </a:solidFill>
                     <a:lnB w="9525" cap="flat">
                       <a:solidFill>
                         <a:srgbClr val="EAD9DD"/>
                       </a:solidFill>
                     </a:lnB>
+                    <a:solidFill>
+                      <a:srgbClr val="F9F4F5"/>
+                    </a:solidFill>
                   </a:tcPr>
                 </a:tc>
                 <a:tc>
@@ -15318,14 +17750,14 @@
                     </a:p>
                   </a:txBody>
                   <a:tcPr marL="91440" marR="91440" marT="36576" marB="36576" anchor="ctr">
-                    <a:solidFill>
-                      <a:srgbClr val="F9F4F5"/>
-                    </a:solidFill>
                     <a:lnB w="9525" cap="flat">
                       <a:solidFill>
                         <a:srgbClr val="EAD9DD"/>
                       </a:solidFill>
                     </a:lnB>
+                    <a:solidFill>
+                      <a:srgbClr val="F9F4F5"/>
+                    </a:solidFill>
                   </a:tcPr>
                 </a:tc>
                 <a:tc>
@@ -15356,14 +17788,14 @@
                     </a:p>
                   </a:txBody>
                   <a:tcPr marL="91440" marR="91440" marT="36576" marB="36576" anchor="ctr">
-                    <a:solidFill>
-                      <a:srgbClr val="F9F4F5"/>
-                    </a:solidFill>
                     <a:lnB w="9525" cap="flat">
                       <a:solidFill>
                         <a:srgbClr val="EAD9DD"/>
                       </a:solidFill>
                     </a:lnB>
+                    <a:solidFill>
+                      <a:srgbClr val="F9F4F5"/>
+                    </a:solidFill>
                   </a:tcPr>
                 </a:tc>
               </a:tr>
@@ -15396,14 +17828,14 @@
                     </a:p>
                   </a:txBody>
                   <a:tcPr marL="91440" marR="91440" marT="36576" marB="36576" anchor="ctr">
-                    <a:solidFill>
-                      <a:srgbClr val="FFFFFF"/>
-                    </a:solidFill>
                     <a:lnB w="9525" cap="flat">
                       <a:solidFill>
                         <a:srgbClr val="EAD9DD"/>
                       </a:solidFill>
                     </a:lnB>
+                    <a:solidFill>
+                      <a:srgbClr val="FFFFFF"/>
+                    </a:solidFill>
                   </a:tcPr>
                 </a:tc>
                 <a:tc>
@@ -15434,14 +17866,14 @@
                     </a:p>
                   </a:txBody>
                   <a:tcPr marL="91440" marR="91440" marT="36576" marB="36576" anchor="ctr">
-                    <a:solidFill>
-                      <a:srgbClr val="FFFFFF"/>
-                    </a:solidFill>
                     <a:lnB w="9525" cap="flat">
                       <a:solidFill>
                         <a:srgbClr val="EAD9DD"/>
                       </a:solidFill>
                     </a:lnB>
+                    <a:solidFill>
+                      <a:srgbClr val="FFFFFF"/>
+                    </a:solidFill>
                   </a:tcPr>
                 </a:tc>
                 <a:tc>
@@ -15472,14 +17904,14 @@
                     </a:p>
                   </a:txBody>
                   <a:tcPr marL="91440" marR="91440" marT="36576" marB="36576" anchor="ctr">
-                    <a:solidFill>
-                      <a:srgbClr val="FFFFFF"/>
-                    </a:solidFill>
                     <a:lnB w="9525" cap="flat">
                       <a:solidFill>
                         <a:srgbClr val="EAD9DD"/>
                       </a:solidFill>
                     </a:lnB>
+                    <a:solidFill>
+                      <a:srgbClr val="FFFFFF"/>
+                    </a:solidFill>
                   </a:tcPr>
                 </a:tc>
               </a:tr>
@@ -15512,14 +17944,14 @@
                     </a:p>
                   </a:txBody>
                   <a:tcPr marL="91440" marR="91440" marT="36576" marB="36576" anchor="ctr">
-                    <a:solidFill>
-                      <a:srgbClr val="F9F4F5"/>
-                    </a:solidFill>
                     <a:lnB w="9525" cap="flat">
                       <a:solidFill>
                         <a:srgbClr val="EAD9DD"/>
                       </a:solidFill>
                     </a:lnB>
+                    <a:solidFill>
+                      <a:srgbClr val="F9F4F5"/>
+                    </a:solidFill>
                   </a:tcPr>
                 </a:tc>
                 <a:tc>
@@ -15550,14 +17982,14 @@
                     </a:p>
                   </a:txBody>
                   <a:tcPr marL="91440" marR="91440" marT="36576" marB="36576" anchor="ctr">
-                    <a:solidFill>
-                      <a:srgbClr val="F9F4F5"/>
-                    </a:solidFill>
                     <a:lnB w="9525" cap="flat">
                       <a:solidFill>
                         <a:srgbClr val="EAD9DD"/>
                       </a:solidFill>
                     </a:lnB>
+                    <a:solidFill>
+                      <a:srgbClr val="F9F4F5"/>
+                    </a:solidFill>
                   </a:tcPr>
                 </a:tc>
                 <a:tc>
@@ -15588,14 +18020,14 @@
                     </a:p>
                   </a:txBody>
                   <a:tcPr marL="91440" marR="91440" marT="36576" marB="36576" anchor="ctr">
-                    <a:solidFill>
-                      <a:srgbClr val="F9F4F5"/>
-                    </a:solidFill>
                     <a:lnB w="9525" cap="flat">
                       <a:solidFill>
                         <a:srgbClr val="EAD9DD"/>
                       </a:solidFill>
                     </a:lnB>
+                    <a:solidFill>
+                      <a:srgbClr val="F9F4F5"/>
+                    </a:solidFill>
                   </a:tcPr>
                 </a:tc>
               </a:tr>
@@ -15628,14 +18060,14 @@
                     </a:p>
                   </a:txBody>
                   <a:tcPr marL="91440" marR="91440" marT="36576" marB="36576" anchor="ctr">
-                    <a:solidFill>
-                      <a:srgbClr val="FFFFFF"/>
-                    </a:solidFill>
                     <a:lnB w="9525" cap="flat">
                       <a:solidFill>
                         <a:srgbClr val="EAD9DD"/>
                       </a:solidFill>
                     </a:lnB>
+                    <a:solidFill>
+                      <a:srgbClr val="FFFFFF"/>
+                    </a:solidFill>
                   </a:tcPr>
                 </a:tc>
                 <a:tc>
@@ -15666,14 +18098,14 @@
                     </a:p>
                   </a:txBody>
                   <a:tcPr marL="91440" marR="91440" marT="36576" marB="36576" anchor="ctr">
-                    <a:solidFill>
-                      <a:srgbClr val="FFFFFF"/>
-                    </a:solidFill>
                     <a:lnB w="9525" cap="flat">
                       <a:solidFill>
                         <a:srgbClr val="EAD9DD"/>
                       </a:solidFill>
                     </a:lnB>
+                    <a:solidFill>
+                      <a:srgbClr val="FFFFFF"/>
+                    </a:solidFill>
                   </a:tcPr>
                 </a:tc>
                 <a:tc>
@@ -15704,14 +18136,14 @@
                     </a:p>
                   </a:txBody>
                   <a:tcPr marL="91440" marR="91440" marT="36576" marB="36576" anchor="ctr">
-                    <a:solidFill>
-                      <a:srgbClr val="FFFFFF"/>
-                    </a:solidFill>
                     <a:lnB w="9525" cap="flat">
                       <a:solidFill>
                         <a:srgbClr val="EAD9DD"/>
                       </a:solidFill>
                     </a:lnB>
+                    <a:solidFill>
+                      <a:srgbClr val="FFFFFF"/>
+                    </a:solidFill>
                   </a:tcPr>
                 </a:tc>
               </a:tr>
@@ -15744,14 +18176,14 @@
                     </a:p>
                   </a:txBody>
                   <a:tcPr marL="91440" marR="91440" marT="36576" marB="36576" anchor="ctr">
-                    <a:solidFill>
-                      <a:srgbClr val="F9F4F5"/>
-                    </a:solidFill>
                     <a:lnB w="9525" cap="flat">
                       <a:solidFill>
                         <a:srgbClr val="EAD9DD"/>
                       </a:solidFill>
                     </a:lnB>
+                    <a:solidFill>
+                      <a:srgbClr val="F9F4F5"/>
+                    </a:solidFill>
                   </a:tcPr>
                 </a:tc>
                 <a:tc>
@@ -15782,14 +18214,14 @@
                     </a:p>
                   </a:txBody>
                   <a:tcPr marL="91440" marR="91440" marT="36576" marB="36576" anchor="ctr">
-                    <a:solidFill>
-                      <a:srgbClr val="F9F4F5"/>
-                    </a:solidFill>
                     <a:lnB w="9525" cap="flat">
                       <a:solidFill>
                         <a:srgbClr val="EAD9DD"/>
                       </a:solidFill>
                     </a:lnB>
+                    <a:solidFill>
+                      <a:srgbClr val="F9F4F5"/>
+                    </a:solidFill>
                   </a:tcPr>
                 </a:tc>
                 <a:tc>
@@ -15820,14 +18252,14 @@
                     </a:p>
                   </a:txBody>
                   <a:tcPr marL="91440" marR="91440" marT="36576" marB="36576" anchor="ctr">
-                    <a:solidFill>
-                      <a:srgbClr val="F9F4F5"/>
-                    </a:solidFill>
                     <a:lnB w="9525" cap="flat">
                       <a:solidFill>
                         <a:srgbClr val="EAD9DD"/>
                       </a:solidFill>
                     </a:lnB>
+                    <a:solidFill>
+                      <a:srgbClr val="F9F4F5"/>
+                    </a:solidFill>
                   </a:tcPr>
                 </a:tc>
               </a:tr>
@@ -15860,14 +18292,14 @@
                     </a:p>
                   </a:txBody>
                   <a:tcPr marL="91440" marR="91440" marT="36576" marB="36576" anchor="ctr">
-                    <a:solidFill>
-                      <a:srgbClr val="FFFFFF"/>
-                    </a:solidFill>
                     <a:lnB w="9525" cap="flat">
                       <a:solidFill>
                         <a:srgbClr val="EAD9DD"/>
                       </a:solidFill>
                     </a:lnB>
+                    <a:solidFill>
+                      <a:srgbClr val="FFFFFF"/>
+                    </a:solidFill>
                   </a:tcPr>
                 </a:tc>
                 <a:tc>
@@ -15898,14 +18330,14 @@
                     </a:p>
                   </a:txBody>
                   <a:tcPr marL="91440" marR="91440" marT="36576" marB="36576" anchor="ctr">
-                    <a:solidFill>
-                      <a:srgbClr val="FFFFFF"/>
-                    </a:solidFill>
                     <a:lnB w="9525" cap="flat">
                       <a:solidFill>
                         <a:srgbClr val="EAD9DD"/>
                       </a:solidFill>
                     </a:lnB>
+                    <a:solidFill>
+                      <a:srgbClr val="FFFFFF"/>
+                    </a:solidFill>
                   </a:tcPr>
                 </a:tc>
                 <a:tc>
@@ -15936,14 +18368,14 @@
                     </a:p>
                   </a:txBody>
                   <a:tcPr marL="91440" marR="91440" marT="36576" marB="36576" anchor="ctr">
-                    <a:solidFill>
-                      <a:srgbClr val="FFFFFF"/>
-                    </a:solidFill>
                     <a:lnB w="9525" cap="flat">
                       <a:solidFill>
                         <a:srgbClr val="EAD9DD"/>
                       </a:solidFill>
                     </a:lnB>
+                    <a:solidFill>
+                      <a:srgbClr val="FFFFFF"/>
+                    </a:solidFill>
                   </a:tcPr>
                 </a:tc>
               </a:tr>
@@ -16420,4 +18852,324 @@
   </a:objectDefaults>
   <a:extraClrSchemeLst/>
 </a:theme>
+</file>
+
+<file path=ppt/theme/theme2.xml><?xml version="1.0" encoding="utf-8"?>
+<a:theme xmlns:a="http://schemas.openxmlformats.org/drawingml/2006/main" name="Office Theme">
+  <a:themeElements>
+    <a:clrScheme name="Office">
+      <a:dk1>
+        <a:sysClr val="windowText" lastClr="000000"/>
+      </a:dk1>
+      <a:lt1>
+        <a:sysClr val="window" lastClr="FFFFFF"/>
+      </a:lt1>
+      <a:dk2>
+        <a:srgbClr val="1F497D"/>
+      </a:dk2>
+      <a:lt2>
+        <a:srgbClr val="EEECE1"/>
+      </a:lt2>
+      <a:accent1>
+        <a:srgbClr val="4F81BD"/>
+      </a:accent1>
+      <a:accent2>
+        <a:srgbClr val="C0504D"/>
+      </a:accent2>
+      <a:accent3>
+        <a:srgbClr val="9BBB59"/>
+      </a:accent3>
+      <a:accent4>
+        <a:srgbClr val="8064A2"/>
+      </a:accent4>
+      <a:accent5>
+        <a:srgbClr val="4BACC6"/>
+      </a:accent5>
+      <a:accent6>
+        <a:srgbClr val="F79646"/>
+      </a:accent6>
+      <a:hlink>
+        <a:srgbClr val="0000FF"/>
+      </a:hlink>
+      <a:folHlink>
+        <a:srgbClr val="800080"/>
+      </a:folHlink>
+    </a:clrScheme>
+    <a:fontScheme name="Office">
+      <a:majorFont>
+        <a:latin typeface="Calibri"/>
+        <a:ea typeface=""/>
+        <a:cs typeface=""/>
+        <a:font script="Jpan" typeface="ＭＳ Ｐゴシック"/>
+        <a:font script="Hang" typeface="맑은 고딕"/>
+        <a:font script="Hans" typeface="宋体"/>
+        <a:font script="Hant" typeface="新細明體"/>
+        <a:font script="Arab" typeface="Times New Roman"/>
+        <a:font script="Hebr" typeface="Times New Roman"/>
+        <a:font script="Thai" typeface="Angsana New"/>
+        <a:font script="Ethi" typeface="Nyala"/>
+        <a:font script="Beng" typeface="Vrinda"/>
+        <a:font script="Gujr" typeface="Shruti"/>
+        <a:font script="Khmr" typeface="MoolBoran"/>
+        <a:font script="Knda" typeface="Tunga"/>
+        <a:font script="Guru" typeface="Raavi"/>
+        <a:font script="Cans" typeface="Euphemia"/>
+        <a:font script="Cher" typeface="Plantagenet Cherokee"/>
+        <a:font script="Yiii" typeface="Microsoft Yi Baiti"/>
+        <a:font script="Tibt" typeface="Microsoft Himalaya"/>
+        <a:font script="Thaa" typeface="MV Boli"/>
+        <a:font script="Deva" typeface="Mangal"/>
+        <a:font script="Telu" typeface="Gautami"/>
+        <a:font script="Taml" typeface="Latha"/>
+        <a:font script="Syrc" typeface="Estrangelo Edessa"/>
+        <a:font script="Orya" typeface="Kalinga"/>
+        <a:font script="Mlym" typeface="Kartika"/>
+        <a:font script="Laoo" typeface="DokChampa"/>
+        <a:font script="Sinh" typeface="Iskoola Pota"/>
+        <a:font script="Mong" typeface="Mongolian Baiti"/>
+        <a:font script="Viet" typeface="Times New Roman"/>
+        <a:font script="Uigh" typeface="Microsoft Uighur"/>
+        <a:font script="Geor" typeface="Sylfaen"/>
+      </a:majorFont>
+      <a:minorFont>
+        <a:latin typeface="Calibri"/>
+        <a:ea typeface=""/>
+        <a:cs typeface=""/>
+        <a:font script="Jpan" typeface="ＭＳ Ｐゴシック"/>
+        <a:font script="Hang" typeface="맑은 고딕"/>
+        <a:font script="Hans" typeface="宋体"/>
+        <a:font script="Hant" typeface="新細明體"/>
+        <a:font script="Arab" typeface="Arial"/>
+        <a:font script="Hebr" typeface="Arial"/>
+        <a:font script="Thai" typeface="Cordia New"/>
+        <a:font script="Ethi" typeface="Nyala"/>
+        <a:font script="Beng" typeface="Vrinda"/>
+        <a:font script="Gujr" typeface="Shruti"/>
+        <a:font script="Khmr" typeface="DaunPenh"/>
+        <a:font script="Knda" typeface="Tunga"/>
+        <a:font script="Guru" typeface="Raavi"/>
+        <a:font script="Cans" typeface="Euphemia"/>
+        <a:font script="Cher" typeface="Plantagenet Cherokee"/>
+        <a:font script="Yiii" typeface="Microsoft Yi Baiti"/>
+        <a:font script="Tibt" typeface="Microsoft Himalaya"/>
+        <a:font script="Thaa" typeface="MV Boli"/>
+        <a:font script="Deva" typeface="Mangal"/>
+        <a:font script="Telu" typeface="Gautami"/>
+        <a:font script="Taml" typeface="Latha"/>
+        <a:font script="Syrc" typeface="Estrangelo Edessa"/>
+        <a:font script="Orya" typeface="Kalinga"/>
+        <a:font script="Mlym" typeface="Kartika"/>
+        <a:font script="Laoo" typeface="DokChampa"/>
+        <a:font script="Sinh" typeface="Iskoola Pota"/>
+        <a:font script="Mong" typeface="Mongolian Baiti"/>
+        <a:font script="Viet" typeface="Arial"/>
+        <a:font script="Uigh" typeface="Microsoft Uighur"/>
+        <a:font script="Geor" typeface="Sylfaen"/>
+      </a:minorFont>
+    </a:fontScheme>
+    <a:fmtScheme name="Office">
+      <a:fillStyleLst>
+        <a:solidFill>
+          <a:schemeClr val="phClr"/>
+        </a:solidFill>
+        <a:gradFill rotWithShape="1">
+          <a:gsLst>
+            <a:gs pos="0">
+              <a:schemeClr val="phClr">
+                <a:tint val="50000"/>
+                <a:satMod val="300000"/>
+              </a:schemeClr>
+            </a:gs>
+            <a:gs pos="35000">
+              <a:schemeClr val="phClr">
+                <a:tint val="37000"/>
+                <a:satMod val="300000"/>
+              </a:schemeClr>
+            </a:gs>
+            <a:gs pos="100000">
+              <a:schemeClr val="phClr">
+                <a:tint val="15000"/>
+                <a:satMod val="350000"/>
+              </a:schemeClr>
+            </a:gs>
+          </a:gsLst>
+          <a:lin ang="16200000" scaled="1"/>
+        </a:gradFill>
+        <a:gradFill rotWithShape="1">
+          <a:gsLst>
+            <a:gs pos="0">
+              <a:schemeClr val="phClr">
+                <a:tint val="100000"/>
+                <a:shade val="100000"/>
+                <a:satMod val="130000"/>
+              </a:schemeClr>
+            </a:gs>
+            <a:gs pos="100000">
+              <a:schemeClr val="phClr">
+                <a:tint val="50000"/>
+                <a:shade val="100000"/>
+                <a:satMod val="350000"/>
+              </a:schemeClr>
+            </a:gs>
+          </a:gsLst>
+          <a:lin ang="16200000" scaled="0"/>
+        </a:gradFill>
+      </a:fillStyleLst>
+      <a:lnStyleLst>
+        <a:ln w="9525" cap="flat" cmpd="sng" algn="ctr">
+          <a:solidFill>
+            <a:schemeClr val="phClr">
+              <a:shade val="95000"/>
+              <a:satMod val="105000"/>
+            </a:schemeClr>
+          </a:solidFill>
+          <a:prstDash val="solid"/>
+        </a:ln>
+        <a:ln w="25400" cap="flat" cmpd="sng" algn="ctr">
+          <a:solidFill>
+            <a:schemeClr val="phClr"/>
+          </a:solidFill>
+          <a:prstDash val="solid"/>
+        </a:ln>
+        <a:ln w="38100" cap="flat" cmpd="sng" algn="ctr">
+          <a:solidFill>
+            <a:schemeClr val="phClr"/>
+          </a:solidFill>
+          <a:prstDash val="solid"/>
+        </a:ln>
+      </a:lnStyleLst>
+      <a:effectStyleLst>
+        <a:effectStyle>
+          <a:effectLst>
+            <a:outerShdw blurRad="40000" dist="20000" dir="5400000" rotWithShape="0">
+              <a:srgbClr val="000000">
+                <a:alpha val="38000"/>
+              </a:srgbClr>
+            </a:outerShdw>
+          </a:effectLst>
+        </a:effectStyle>
+        <a:effectStyle>
+          <a:effectLst>
+            <a:outerShdw blurRad="40000" dist="23000" dir="5400000" rotWithShape="0">
+              <a:srgbClr val="000000">
+                <a:alpha val="35000"/>
+              </a:srgbClr>
+            </a:outerShdw>
+          </a:effectLst>
+        </a:effectStyle>
+        <a:effectStyle>
+          <a:effectLst>
+            <a:outerShdw blurRad="40000" dist="23000" dir="5400000" rotWithShape="0">
+              <a:srgbClr val="000000">
+                <a:alpha val="35000"/>
+              </a:srgbClr>
+            </a:outerShdw>
+          </a:effectLst>
+          <a:scene3d>
+            <a:camera prst="orthographicFront">
+              <a:rot lat="0" lon="0" rev="0"/>
+            </a:camera>
+            <a:lightRig rig="threePt" dir="t">
+              <a:rot lat="0" lon="0" rev="1200000"/>
+            </a:lightRig>
+          </a:scene3d>
+          <a:sp3d>
+            <a:bevelT w="63500" h="25400"/>
+          </a:sp3d>
+        </a:effectStyle>
+      </a:effectStyleLst>
+      <a:bgFillStyleLst>
+        <a:solidFill>
+          <a:schemeClr val="phClr"/>
+        </a:solidFill>
+        <a:gradFill rotWithShape="1">
+          <a:gsLst>
+            <a:gs pos="0">
+              <a:schemeClr val="phClr">
+                <a:tint val="40000"/>
+                <a:satMod val="350000"/>
+              </a:schemeClr>
+            </a:gs>
+            <a:gs pos="40000">
+              <a:schemeClr val="phClr">
+                <a:tint val="45000"/>
+                <a:shade val="99000"/>
+                <a:satMod val="350000"/>
+              </a:schemeClr>
+            </a:gs>
+            <a:gs pos="100000">
+              <a:schemeClr val="phClr">
+                <a:shade val="20000"/>
+                <a:satMod val="255000"/>
+              </a:schemeClr>
+            </a:gs>
+          </a:gsLst>
+          <a:path path="circle">
+            <a:fillToRect l="50000" t="-80000" r="50000" b="180000"/>
+          </a:path>
+        </a:gradFill>
+        <a:gradFill rotWithShape="1">
+          <a:gsLst>
+            <a:gs pos="0">
+              <a:schemeClr val="phClr">
+                <a:tint val="80000"/>
+                <a:satMod val="300000"/>
+              </a:schemeClr>
+            </a:gs>
+            <a:gs pos="100000">
+              <a:schemeClr val="phClr">
+                <a:shade val="30000"/>
+                <a:satMod val="200000"/>
+              </a:schemeClr>
+            </a:gs>
+          </a:gsLst>
+          <a:path path="circle">
+            <a:fillToRect l="50000" t="50000" r="50000" b="50000"/>
+          </a:path>
+        </a:gradFill>
+      </a:bgFillStyleLst>
+    </a:fmtScheme>
+  </a:themeElements>
+  <a:objectDefaults>
+    <a:spDef>
+      <a:spPr/>
+      <a:bodyPr/>
+      <a:lstStyle/>
+      <a:style>
+        <a:lnRef idx="1">
+          <a:schemeClr val="accent1"/>
+        </a:lnRef>
+        <a:fillRef idx="3">
+          <a:schemeClr val="accent1"/>
+        </a:fillRef>
+        <a:effectRef idx="2">
+          <a:schemeClr val="accent1"/>
+        </a:effectRef>
+        <a:fontRef idx="minor">
+          <a:schemeClr val="lt1"/>
+        </a:fontRef>
+      </a:style>
+    </a:spDef>
+    <a:lnDef>
+      <a:spPr/>
+      <a:bodyPr/>
+      <a:lstStyle/>
+      <a:style>
+        <a:lnRef idx="2">
+          <a:schemeClr val="accent1"/>
+        </a:lnRef>
+        <a:fillRef idx="0">
+          <a:schemeClr val="accent1"/>
+        </a:fillRef>
+        <a:effectRef idx="1">
+          <a:schemeClr val="accent1"/>
+        </a:effectRef>
+        <a:fontRef idx="minor">
+          <a:schemeClr val="tx1"/>
+        </a:fontRef>
+      </a:style>
+    </a:lnDef>
+  </a:objectDefaults>
+  <a:extraClrSchemeLst/>
+</a:theme>
 </file>